--- a/manuscripts/submission/figures/Figures.pptx
+++ b/manuscripts/submission/figures/Figures.pptx
@@ -5,12 +5,14 @@
     <p:sldMasterId id="2147483648" r:id="rId1"/>
   </p:sldMasterIdLst>
   <p:notesMasterIdLst>
-    <p:notesMasterId r:id="rId5"/>
+    <p:notesMasterId r:id="rId7"/>
   </p:notesMasterIdLst>
   <p:sldIdLst>
     <p:sldId id="256" r:id="rId2"/>
     <p:sldId id="257" r:id="rId3"/>
     <p:sldId id="258" r:id="rId4"/>
+    <p:sldId id="259" r:id="rId5"/>
+    <p:sldId id="260" r:id="rId6"/>
   </p:sldIdLst>
   <p:sldSz cx="12192000" cy="6858000"/>
   <p:notesSz cx="6858000" cy="9144000"/>
@@ -210,7 +212,7 @@
           <a:p>
             <a:fld id="{183F8829-A687-40F6-AB61-53986F4F43F6}" type="datetimeFigureOut">
               <a:rPr lang="zh-CN" altLang="en-US" smtClean="0"/>
-              <a:t>2026/2/22</a:t>
+              <a:t>2026/3/4</a:t>
             </a:fld>
             <a:endParaRPr lang="zh-CN" altLang="en-US"/>
           </a:p>
@@ -274,38 +276,37 @@
           <a:p>
             <a:pPr lvl="0"/>
             <a:r>
-              <a:rPr lang="zh-CN" altLang="en-US" smtClean="0"/>
+              <a:rPr lang="zh-CN" altLang="en-US"/>
               <a:t>编辑母版文本样式</a:t>
             </a:r>
           </a:p>
           <a:p>
             <a:pPr lvl="1"/>
             <a:r>
-              <a:rPr lang="zh-CN" altLang="en-US" smtClean="0"/>
+              <a:rPr lang="zh-CN" altLang="en-US"/>
               <a:t>第二级</a:t>
             </a:r>
           </a:p>
           <a:p>
             <a:pPr lvl="2"/>
             <a:r>
-              <a:rPr lang="zh-CN" altLang="en-US" smtClean="0"/>
+              <a:rPr lang="zh-CN" altLang="en-US"/>
               <a:t>第三级</a:t>
             </a:r>
           </a:p>
           <a:p>
             <a:pPr lvl="3"/>
             <a:r>
-              <a:rPr lang="zh-CN" altLang="en-US" smtClean="0"/>
+              <a:rPr lang="zh-CN" altLang="en-US"/>
               <a:t>第四级</a:t>
             </a:r>
           </a:p>
           <a:p>
             <a:pPr lvl="4"/>
             <a:r>
-              <a:rPr lang="zh-CN" altLang="en-US" smtClean="0"/>
+              <a:rPr lang="zh-CN" altLang="en-US"/>
               <a:t>第五级</a:t>
             </a:r>
-            <a:endParaRPr lang="zh-CN" altLang="en-US"/>
           </a:p>
         </p:txBody>
       </p:sp>
@@ -506,6 +507,13 @@
           </p:nvPr>
         </p:nvSpPr>
         <p:spPr/>
+        <p:txBody>
+          <a:bodyPr/>
+          <a:lstStyle/>
+          <a:p>
+            <a:endParaRPr lang="zh-CN" altLang="en-US"/>
+          </a:p>
+        </p:txBody>
       </p:sp>
       <p:sp>
         <p:nvSpPr>
@@ -523,7 +531,7 @@
           <a:lstStyle/>
           <a:p>
             <a:r>
-              <a:rPr lang="en-US" altLang="zh-CN" dirty="0" smtClean="0"/>
+              <a:rPr lang="en-US" altLang="zh-CN" dirty="0"/>
               <a:t>Figure 1. Teaser: The proposed EarthBridge framework for multi-modal aerial-view image translation across Electro-Optical (EO), Infrared(IR), and Synthetic Aperture Radar (SAR) modalities. Our method accurately bridges the domain gap, preserving structural integrity while synthesizing high-fidelity target textures</a:t>
             </a:r>
             <a:endParaRPr lang="zh-CN" altLang="en-US" dirty="0"/>
@@ -594,6 +602,13 @@
           </p:nvPr>
         </p:nvSpPr>
         <p:spPr/>
+        <p:txBody>
+          <a:bodyPr/>
+          <a:lstStyle/>
+          <a:p>
+            <a:endParaRPr lang="zh-CN" altLang="en-US"/>
+          </a:p>
+        </p:txBody>
       </p:sp>
       <p:sp>
         <p:nvSpPr>
@@ -610,42 +625,6 @@
           <a:bodyPr/>
           <a:lstStyle/>
           <a:p>
-            <a:r>
-              <a:rPr lang="en-US" altLang="zh-CN" dirty="0" smtClean="0"/>
-              <a:t>Figure 2. Overview of our EarthBridge translation pipeline based on DBIM. The source image x is concatenated with the noisy sample </a:t>
-            </a:r>
-            <a:r>
-              <a:rPr lang="en-US" altLang="zh-CN" dirty="0" err="1" smtClean="0"/>
-              <a:t>ztand</a:t>
-            </a:r>
-            <a:r>
-              <a:rPr lang="en-US" altLang="zh-CN" dirty="0" smtClean="0"/>
-              <a:t> fed to a UNet </a:t>
-            </a:r>
-            <a:r>
-              <a:rPr lang="en-US" altLang="zh-CN" dirty="0" err="1" smtClean="0"/>
-              <a:t>denoiser</a:t>
-            </a:r>
-            <a:r>
-              <a:rPr lang="en-US" altLang="zh-CN" dirty="0" smtClean="0"/>
-              <a:t>. During training, the bridge forward process constructs </a:t>
-            </a:r>
-            <a:r>
-              <a:rPr lang="en-US" altLang="zh-CN" dirty="0" err="1" smtClean="0"/>
-              <a:t>zt</a:t>
-            </a:r>
-            <a:r>
-              <a:rPr lang="en-US" altLang="zh-CN" dirty="0" smtClean="0"/>
-              <a:t> from the target y and source x via bridge </a:t>
-            </a:r>
-            <a:r>
-              <a:rPr lang="en-US" altLang="zh-CN" dirty="0" err="1" smtClean="0"/>
-              <a:t>scalings.During</a:t>
-            </a:r>
-            <a:r>
-              <a:rPr lang="en-US" altLang="zh-CN" dirty="0" smtClean="0"/>
-              <a:t> inference, deterministic DBIM sampling transforms x into the translated output ˆz0</a:t>
-            </a:r>
             <a:endParaRPr lang="zh-CN" altLang="en-US" dirty="0"/>
           </a:p>
         </p:txBody>
@@ -714,6 +693,13 @@
           </p:nvPr>
         </p:nvSpPr>
         <p:spPr/>
+        <p:txBody>
+          <a:bodyPr/>
+          <a:lstStyle/>
+          <a:p>
+            <a:endParaRPr lang="zh-CN" altLang="en-US"/>
+          </a:p>
+        </p:txBody>
       </p:sp>
       <p:sp>
         <p:nvSpPr>
@@ -730,6 +716,10 @@
           <a:bodyPr/>
           <a:lstStyle/>
           <a:p>
+            <a:r>
+              <a:rPr lang="en-US" altLang="zh-CN" dirty="0"/>
+              <a:t>DBIM Unet Architecture for RGB2IR/SAR2RGB/SAR2IR</a:t>
+            </a:r>
             <a:endParaRPr lang="zh-CN" altLang="en-US" dirty="0"/>
           </a:p>
         </p:txBody>
@@ -812,10 +802,9 @@
           </a:lstStyle>
           <a:p>
             <a:r>
-              <a:rPr lang="zh-CN" altLang="en-US" smtClean="0"/>
+              <a:rPr lang="zh-CN" altLang="en-US"/>
               <a:t>单击此处编辑母版标题样式</a:t>
             </a:r>
-            <a:endParaRPr lang="zh-CN" altLang="en-US"/>
           </a:p>
         </p:txBody>
       </p:sp>
@@ -877,10 +866,9 @@
           </a:lstStyle>
           <a:p>
             <a:r>
-              <a:rPr lang="zh-CN" altLang="en-US" smtClean="0"/>
+              <a:rPr lang="zh-CN" altLang="en-US"/>
               <a:t>单击以编辑母版副标题样式</a:t>
             </a:r>
-            <a:endParaRPr lang="zh-CN" altLang="en-US"/>
           </a:p>
         </p:txBody>
       </p:sp>
@@ -901,7 +889,7 @@
           <a:p>
             <a:fld id="{2BC34609-3014-4DC4-BA0E-9F599181006C}" type="datetimeFigureOut">
               <a:rPr lang="zh-CN" altLang="en-US" smtClean="0"/>
-              <a:t>2026/2/22</a:t>
+              <a:t>2026/3/4</a:t>
             </a:fld>
             <a:endParaRPr lang="zh-CN" altLang="en-US"/>
           </a:p>
@@ -995,10 +983,9 @@
           <a:lstStyle/>
           <a:p>
             <a:r>
-              <a:rPr lang="zh-CN" altLang="en-US" smtClean="0"/>
+              <a:rPr lang="zh-CN" altLang="en-US"/>
               <a:t>单击此处编辑母版标题样式</a:t>
             </a:r>
-            <a:endParaRPr lang="zh-CN" altLang="en-US"/>
           </a:p>
         </p:txBody>
       </p:sp>
@@ -1019,38 +1006,37 @@
           <a:p>
             <a:pPr lvl="0"/>
             <a:r>
-              <a:rPr lang="zh-CN" altLang="en-US" smtClean="0"/>
+              <a:rPr lang="zh-CN" altLang="en-US"/>
               <a:t>编辑母版文本样式</a:t>
             </a:r>
           </a:p>
           <a:p>
             <a:pPr lvl="1"/>
             <a:r>
-              <a:rPr lang="zh-CN" altLang="en-US" smtClean="0"/>
+              <a:rPr lang="zh-CN" altLang="en-US"/>
               <a:t>第二级</a:t>
             </a:r>
           </a:p>
           <a:p>
             <a:pPr lvl="2"/>
             <a:r>
-              <a:rPr lang="zh-CN" altLang="en-US" smtClean="0"/>
+              <a:rPr lang="zh-CN" altLang="en-US"/>
               <a:t>第三级</a:t>
             </a:r>
           </a:p>
           <a:p>
             <a:pPr lvl="3"/>
             <a:r>
-              <a:rPr lang="zh-CN" altLang="en-US" smtClean="0"/>
+              <a:rPr lang="zh-CN" altLang="en-US"/>
               <a:t>第四级</a:t>
             </a:r>
           </a:p>
           <a:p>
             <a:pPr lvl="4"/>
             <a:r>
-              <a:rPr lang="zh-CN" altLang="en-US" smtClean="0"/>
+              <a:rPr lang="zh-CN" altLang="en-US"/>
               <a:t>第五级</a:t>
             </a:r>
-            <a:endParaRPr lang="zh-CN" altLang="en-US"/>
           </a:p>
         </p:txBody>
       </p:sp>
@@ -1071,7 +1057,7 @@
           <a:p>
             <a:fld id="{2BC34609-3014-4DC4-BA0E-9F599181006C}" type="datetimeFigureOut">
               <a:rPr lang="zh-CN" altLang="en-US" smtClean="0"/>
-              <a:t>2026/2/22</a:t>
+              <a:t>2026/3/4</a:t>
             </a:fld>
             <a:endParaRPr lang="zh-CN" altLang="en-US"/>
           </a:p>
@@ -1170,10 +1156,9 @@
           <a:lstStyle/>
           <a:p>
             <a:r>
-              <a:rPr lang="zh-CN" altLang="en-US" smtClean="0"/>
+              <a:rPr lang="zh-CN" altLang="en-US"/>
               <a:t>单击此处编辑母版标题样式</a:t>
             </a:r>
-            <a:endParaRPr lang="zh-CN" altLang="en-US"/>
           </a:p>
         </p:txBody>
       </p:sp>
@@ -1199,38 +1184,37 @@
           <a:p>
             <a:pPr lvl="0"/>
             <a:r>
-              <a:rPr lang="zh-CN" altLang="en-US" smtClean="0"/>
+              <a:rPr lang="zh-CN" altLang="en-US"/>
               <a:t>编辑母版文本样式</a:t>
             </a:r>
           </a:p>
           <a:p>
             <a:pPr lvl="1"/>
             <a:r>
-              <a:rPr lang="zh-CN" altLang="en-US" smtClean="0"/>
+              <a:rPr lang="zh-CN" altLang="en-US"/>
               <a:t>第二级</a:t>
             </a:r>
           </a:p>
           <a:p>
             <a:pPr lvl="2"/>
             <a:r>
-              <a:rPr lang="zh-CN" altLang="en-US" smtClean="0"/>
+              <a:rPr lang="zh-CN" altLang="en-US"/>
               <a:t>第三级</a:t>
             </a:r>
           </a:p>
           <a:p>
             <a:pPr lvl="3"/>
             <a:r>
-              <a:rPr lang="zh-CN" altLang="en-US" smtClean="0"/>
+              <a:rPr lang="zh-CN" altLang="en-US"/>
               <a:t>第四级</a:t>
             </a:r>
           </a:p>
           <a:p>
             <a:pPr lvl="4"/>
             <a:r>
-              <a:rPr lang="zh-CN" altLang="en-US" smtClean="0"/>
+              <a:rPr lang="zh-CN" altLang="en-US"/>
               <a:t>第五级</a:t>
             </a:r>
-            <a:endParaRPr lang="zh-CN" altLang="en-US"/>
           </a:p>
         </p:txBody>
       </p:sp>
@@ -1251,7 +1235,7 @@
           <a:p>
             <a:fld id="{2BC34609-3014-4DC4-BA0E-9F599181006C}" type="datetimeFigureOut">
               <a:rPr lang="zh-CN" altLang="en-US" smtClean="0"/>
-              <a:t>2026/2/22</a:t>
+              <a:t>2026/3/4</a:t>
             </a:fld>
             <a:endParaRPr lang="zh-CN" altLang="en-US"/>
           </a:p>
@@ -1345,10 +1329,9 @@
           <a:lstStyle/>
           <a:p>
             <a:r>
-              <a:rPr lang="zh-CN" altLang="en-US" smtClean="0"/>
+              <a:rPr lang="zh-CN" altLang="en-US"/>
               <a:t>单击此处编辑母版标题样式</a:t>
             </a:r>
-            <a:endParaRPr lang="zh-CN" altLang="en-US"/>
           </a:p>
         </p:txBody>
       </p:sp>
@@ -1369,38 +1352,37 @@
           <a:p>
             <a:pPr lvl="0"/>
             <a:r>
-              <a:rPr lang="zh-CN" altLang="en-US" smtClean="0"/>
+              <a:rPr lang="zh-CN" altLang="en-US"/>
               <a:t>编辑母版文本样式</a:t>
             </a:r>
           </a:p>
           <a:p>
             <a:pPr lvl="1"/>
             <a:r>
-              <a:rPr lang="zh-CN" altLang="en-US" smtClean="0"/>
+              <a:rPr lang="zh-CN" altLang="en-US"/>
               <a:t>第二级</a:t>
             </a:r>
           </a:p>
           <a:p>
             <a:pPr lvl="2"/>
             <a:r>
-              <a:rPr lang="zh-CN" altLang="en-US" smtClean="0"/>
+              <a:rPr lang="zh-CN" altLang="en-US"/>
               <a:t>第三级</a:t>
             </a:r>
           </a:p>
           <a:p>
             <a:pPr lvl="3"/>
             <a:r>
-              <a:rPr lang="zh-CN" altLang="en-US" smtClean="0"/>
+              <a:rPr lang="zh-CN" altLang="en-US"/>
               <a:t>第四级</a:t>
             </a:r>
           </a:p>
           <a:p>
             <a:pPr lvl="4"/>
             <a:r>
-              <a:rPr lang="zh-CN" altLang="en-US" smtClean="0"/>
+              <a:rPr lang="zh-CN" altLang="en-US"/>
               <a:t>第五级</a:t>
             </a:r>
-            <a:endParaRPr lang="zh-CN" altLang="en-US"/>
           </a:p>
         </p:txBody>
       </p:sp>
@@ -1421,7 +1403,7 @@
           <a:p>
             <a:fld id="{2BC34609-3014-4DC4-BA0E-9F599181006C}" type="datetimeFigureOut">
               <a:rPr lang="zh-CN" altLang="en-US" smtClean="0"/>
-              <a:t>2026/2/22</a:t>
+              <a:t>2026/3/4</a:t>
             </a:fld>
             <a:endParaRPr lang="zh-CN" altLang="en-US"/>
           </a:p>
@@ -1524,10 +1506,9 @@
           </a:lstStyle>
           <a:p>
             <a:r>
-              <a:rPr lang="zh-CN" altLang="en-US" smtClean="0"/>
+              <a:rPr lang="zh-CN" altLang="en-US"/>
               <a:t>单击此处编辑母版标题样式</a:t>
             </a:r>
-            <a:endParaRPr lang="zh-CN" altLang="en-US"/>
           </a:p>
         </p:txBody>
       </p:sp>
@@ -1644,7 +1625,7 @@
           <a:p>
             <a:pPr lvl="0"/>
             <a:r>
-              <a:rPr lang="zh-CN" altLang="en-US" smtClean="0"/>
+              <a:rPr lang="zh-CN" altLang="en-US"/>
               <a:t>编辑母版文本样式</a:t>
             </a:r>
           </a:p>
@@ -1667,7 +1648,7 @@
           <a:p>
             <a:fld id="{2BC34609-3014-4DC4-BA0E-9F599181006C}" type="datetimeFigureOut">
               <a:rPr lang="zh-CN" altLang="en-US" smtClean="0"/>
-              <a:t>2026/2/22</a:t>
+              <a:t>2026/3/4</a:t>
             </a:fld>
             <a:endParaRPr lang="zh-CN" altLang="en-US"/>
           </a:p>
@@ -1761,10 +1742,9 @@
           <a:lstStyle/>
           <a:p>
             <a:r>
-              <a:rPr lang="zh-CN" altLang="en-US" smtClean="0"/>
+              <a:rPr lang="zh-CN" altLang="en-US"/>
               <a:t>单击此处编辑母版标题样式</a:t>
             </a:r>
-            <a:endParaRPr lang="zh-CN" altLang="en-US"/>
           </a:p>
         </p:txBody>
       </p:sp>
@@ -1790,38 +1770,37 @@
           <a:p>
             <a:pPr lvl="0"/>
             <a:r>
-              <a:rPr lang="zh-CN" altLang="en-US" smtClean="0"/>
+              <a:rPr lang="zh-CN" altLang="en-US"/>
               <a:t>编辑母版文本样式</a:t>
             </a:r>
           </a:p>
           <a:p>
             <a:pPr lvl="1"/>
             <a:r>
-              <a:rPr lang="zh-CN" altLang="en-US" smtClean="0"/>
+              <a:rPr lang="zh-CN" altLang="en-US"/>
               <a:t>第二级</a:t>
             </a:r>
           </a:p>
           <a:p>
             <a:pPr lvl="2"/>
             <a:r>
-              <a:rPr lang="zh-CN" altLang="en-US" smtClean="0"/>
+              <a:rPr lang="zh-CN" altLang="en-US"/>
               <a:t>第三级</a:t>
             </a:r>
           </a:p>
           <a:p>
             <a:pPr lvl="3"/>
             <a:r>
-              <a:rPr lang="zh-CN" altLang="en-US" smtClean="0"/>
+              <a:rPr lang="zh-CN" altLang="en-US"/>
               <a:t>第四级</a:t>
             </a:r>
           </a:p>
           <a:p>
             <a:pPr lvl="4"/>
             <a:r>
-              <a:rPr lang="zh-CN" altLang="en-US" smtClean="0"/>
+              <a:rPr lang="zh-CN" altLang="en-US"/>
               <a:t>第五级</a:t>
             </a:r>
-            <a:endParaRPr lang="zh-CN" altLang="en-US"/>
           </a:p>
         </p:txBody>
       </p:sp>
@@ -1847,38 +1826,37 @@
           <a:p>
             <a:pPr lvl="0"/>
             <a:r>
-              <a:rPr lang="zh-CN" altLang="en-US" smtClean="0"/>
+              <a:rPr lang="zh-CN" altLang="en-US"/>
               <a:t>编辑母版文本样式</a:t>
             </a:r>
           </a:p>
           <a:p>
             <a:pPr lvl="1"/>
             <a:r>
-              <a:rPr lang="zh-CN" altLang="en-US" smtClean="0"/>
+              <a:rPr lang="zh-CN" altLang="en-US"/>
               <a:t>第二级</a:t>
             </a:r>
           </a:p>
           <a:p>
             <a:pPr lvl="2"/>
             <a:r>
-              <a:rPr lang="zh-CN" altLang="en-US" smtClean="0"/>
+              <a:rPr lang="zh-CN" altLang="en-US"/>
               <a:t>第三级</a:t>
             </a:r>
           </a:p>
           <a:p>
             <a:pPr lvl="3"/>
             <a:r>
-              <a:rPr lang="zh-CN" altLang="en-US" smtClean="0"/>
+              <a:rPr lang="zh-CN" altLang="en-US"/>
               <a:t>第四级</a:t>
             </a:r>
           </a:p>
           <a:p>
             <a:pPr lvl="4"/>
             <a:r>
-              <a:rPr lang="zh-CN" altLang="en-US" smtClean="0"/>
+              <a:rPr lang="zh-CN" altLang="en-US"/>
               <a:t>第五级</a:t>
             </a:r>
-            <a:endParaRPr lang="zh-CN" altLang="en-US"/>
           </a:p>
         </p:txBody>
       </p:sp>
@@ -1899,7 +1877,7 @@
           <a:p>
             <a:fld id="{2BC34609-3014-4DC4-BA0E-9F599181006C}" type="datetimeFigureOut">
               <a:rPr lang="zh-CN" altLang="en-US" smtClean="0"/>
-              <a:t>2026/2/22</a:t>
+              <a:t>2026/3/4</a:t>
             </a:fld>
             <a:endParaRPr lang="zh-CN" altLang="en-US"/>
           </a:p>
@@ -1998,10 +1976,9 @@
           <a:lstStyle/>
           <a:p>
             <a:r>
-              <a:rPr lang="zh-CN" altLang="en-US" smtClean="0"/>
+              <a:rPr lang="zh-CN" altLang="en-US"/>
               <a:t>单击此处编辑母版标题样式</a:t>
             </a:r>
-            <a:endParaRPr lang="zh-CN" altLang="en-US"/>
           </a:p>
         </p:txBody>
       </p:sp>
@@ -2064,7 +2041,7 @@
           <a:p>
             <a:pPr lvl="0"/>
             <a:r>
-              <a:rPr lang="zh-CN" altLang="en-US" smtClean="0"/>
+              <a:rPr lang="zh-CN" altLang="en-US"/>
               <a:t>编辑母版文本样式</a:t>
             </a:r>
           </a:p>
@@ -2092,38 +2069,37 @@
           <a:p>
             <a:pPr lvl="0"/>
             <a:r>
-              <a:rPr lang="zh-CN" altLang="en-US" smtClean="0"/>
+              <a:rPr lang="zh-CN" altLang="en-US"/>
               <a:t>编辑母版文本样式</a:t>
             </a:r>
           </a:p>
           <a:p>
             <a:pPr lvl="1"/>
             <a:r>
-              <a:rPr lang="zh-CN" altLang="en-US" smtClean="0"/>
+              <a:rPr lang="zh-CN" altLang="en-US"/>
               <a:t>第二级</a:t>
             </a:r>
           </a:p>
           <a:p>
             <a:pPr lvl="2"/>
             <a:r>
-              <a:rPr lang="zh-CN" altLang="en-US" smtClean="0"/>
+              <a:rPr lang="zh-CN" altLang="en-US"/>
               <a:t>第三级</a:t>
             </a:r>
           </a:p>
           <a:p>
             <a:pPr lvl="3"/>
             <a:r>
-              <a:rPr lang="zh-CN" altLang="en-US" smtClean="0"/>
+              <a:rPr lang="zh-CN" altLang="en-US"/>
               <a:t>第四级</a:t>
             </a:r>
           </a:p>
           <a:p>
             <a:pPr lvl="4"/>
             <a:r>
-              <a:rPr lang="zh-CN" altLang="en-US" smtClean="0"/>
+              <a:rPr lang="zh-CN" altLang="en-US"/>
               <a:t>第五级</a:t>
             </a:r>
-            <a:endParaRPr lang="zh-CN" altLang="en-US"/>
           </a:p>
         </p:txBody>
       </p:sp>
@@ -2186,7 +2162,7 @@
           <a:p>
             <a:pPr lvl="0"/>
             <a:r>
-              <a:rPr lang="zh-CN" altLang="en-US" smtClean="0"/>
+              <a:rPr lang="zh-CN" altLang="en-US"/>
               <a:t>编辑母版文本样式</a:t>
             </a:r>
           </a:p>
@@ -2214,38 +2190,37 @@
           <a:p>
             <a:pPr lvl="0"/>
             <a:r>
-              <a:rPr lang="zh-CN" altLang="en-US" smtClean="0"/>
+              <a:rPr lang="zh-CN" altLang="en-US"/>
               <a:t>编辑母版文本样式</a:t>
             </a:r>
           </a:p>
           <a:p>
             <a:pPr lvl="1"/>
             <a:r>
-              <a:rPr lang="zh-CN" altLang="en-US" smtClean="0"/>
+              <a:rPr lang="zh-CN" altLang="en-US"/>
               <a:t>第二级</a:t>
             </a:r>
           </a:p>
           <a:p>
             <a:pPr lvl="2"/>
             <a:r>
-              <a:rPr lang="zh-CN" altLang="en-US" smtClean="0"/>
+              <a:rPr lang="zh-CN" altLang="en-US"/>
               <a:t>第三级</a:t>
             </a:r>
           </a:p>
           <a:p>
             <a:pPr lvl="3"/>
             <a:r>
-              <a:rPr lang="zh-CN" altLang="en-US" smtClean="0"/>
+              <a:rPr lang="zh-CN" altLang="en-US"/>
               <a:t>第四级</a:t>
             </a:r>
           </a:p>
           <a:p>
             <a:pPr lvl="4"/>
             <a:r>
-              <a:rPr lang="zh-CN" altLang="en-US" smtClean="0"/>
+              <a:rPr lang="zh-CN" altLang="en-US"/>
               <a:t>第五级</a:t>
             </a:r>
-            <a:endParaRPr lang="zh-CN" altLang="en-US"/>
           </a:p>
         </p:txBody>
       </p:sp>
@@ -2266,7 +2241,7 @@
           <a:p>
             <a:fld id="{2BC34609-3014-4DC4-BA0E-9F599181006C}" type="datetimeFigureOut">
               <a:rPr lang="zh-CN" altLang="en-US" smtClean="0"/>
-              <a:t>2026/2/22</a:t>
+              <a:t>2026/3/4</a:t>
             </a:fld>
             <a:endParaRPr lang="zh-CN" altLang="en-US"/>
           </a:p>
@@ -2360,10 +2335,9 @@
           <a:lstStyle/>
           <a:p>
             <a:r>
-              <a:rPr lang="zh-CN" altLang="en-US" smtClean="0"/>
+              <a:rPr lang="zh-CN" altLang="en-US"/>
               <a:t>单击此处编辑母版标题样式</a:t>
             </a:r>
-            <a:endParaRPr lang="zh-CN" altLang="en-US"/>
           </a:p>
         </p:txBody>
       </p:sp>
@@ -2384,7 +2358,7 @@
           <a:p>
             <a:fld id="{2BC34609-3014-4DC4-BA0E-9F599181006C}" type="datetimeFigureOut">
               <a:rPr lang="zh-CN" altLang="en-US" smtClean="0"/>
-              <a:t>2026/2/22</a:t>
+              <a:t>2026/3/4</a:t>
             </a:fld>
             <a:endParaRPr lang="zh-CN" altLang="en-US"/>
           </a:p>
@@ -2479,7 +2453,7 @@
           <a:p>
             <a:fld id="{2BC34609-3014-4DC4-BA0E-9F599181006C}" type="datetimeFigureOut">
               <a:rPr lang="zh-CN" altLang="en-US" smtClean="0"/>
-              <a:t>2026/2/22</a:t>
+              <a:t>2026/3/4</a:t>
             </a:fld>
             <a:endParaRPr lang="zh-CN" altLang="en-US"/>
           </a:p>
@@ -2582,10 +2556,9 @@
           </a:lstStyle>
           <a:p>
             <a:r>
-              <a:rPr lang="zh-CN" altLang="en-US" smtClean="0"/>
+              <a:rPr lang="zh-CN" altLang="en-US"/>
               <a:t>单击此处编辑母版标题样式</a:t>
             </a:r>
-            <a:endParaRPr lang="zh-CN" altLang="en-US"/>
           </a:p>
         </p:txBody>
       </p:sp>
@@ -2639,38 +2612,37 @@
           <a:p>
             <a:pPr lvl="0"/>
             <a:r>
-              <a:rPr lang="zh-CN" altLang="en-US" smtClean="0"/>
+              <a:rPr lang="zh-CN" altLang="en-US"/>
               <a:t>编辑母版文本样式</a:t>
             </a:r>
           </a:p>
           <a:p>
             <a:pPr lvl="1"/>
             <a:r>
-              <a:rPr lang="zh-CN" altLang="en-US" smtClean="0"/>
+              <a:rPr lang="zh-CN" altLang="en-US"/>
               <a:t>第二级</a:t>
             </a:r>
           </a:p>
           <a:p>
             <a:pPr lvl="2"/>
             <a:r>
-              <a:rPr lang="zh-CN" altLang="en-US" smtClean="0"/>
+              <a:rPr lang="zh-CN" altLang="en-US"/>
               <a:t>第三级</a:t>
             </a:r>
           </a:p>
           <a:p>
             <a:pPr lvl="3"/>
             <a:r>
-              <a:rPr lang="zh-CN" altLang="en-US" smtClean="0"/>
+              <a:rPr lang="zh-CN" altLang="en-US"/>
               <a:t>第四级</a:t>
             </a:r>
           </a:p>
           <a:p>
             <a:pPr lvl="4"/>
             <a:r>
-              <a:rPr lang="zh-CN" altLang="en-US" smtClean="0"/>
+              <a:rPr lang="zh-CN" altLang="en-US"/>
               <a:t>第五级</a:t>
             </a:r>
-            <a:endParaRPr lang="zh-CN" altLang="en-US"/>
           </a:p>
         </p:txBody>
       </p:sp>
@@ -2733,7 +2705,7 @@
           <a:p>
             <a:pPr lvl="0"/>
             <a:r>
-              <a:rPr lang="zh-CN" altLang="en-US" smtClean="0"/>
+              <a:rPr lang="zh-CN" altLang="en-US"/>
               <a:t>编辑母版文本样式</a:t>
             </a:r>
           </a:p>
@@ -2756,7 +2728,7 @@
           <a:p>
             <a:fld id="{2BC34609-3014-4DC4-BA0E-9F599181006C}" type="datetimeFigureOut">
               <a:rPr lang="zh-CN" altLang="en-US" smtClean="0"/>
-              <a:t>2026/2/22</a:t>
+              <a:t>2026/3/4</a:t>
             </a:fld>
             <a:endParaRPr lang="zh-CN" altLang="en-US"/>
           </a:p>
@@ -2859,10 +2831,9 @@
           </a:lstStyle>
           <a:p>
             <a:r>
-              <a:rPr lang="zh-CN" altLang="en-US" smtClean="0"/>
+              <a:rPr lang="zh-CN" altLang="en-US"/>
               <a:t>单击此处编辑母版标题样式</a:t>
             </a:r>
-            <a:endParaRPr lang="zh-CN" altLang="en-US"/>
           </a:p>
         </p:txBody>
       </p:sp>
@@ -2986,7 +2957,7 @@
           <a:p>
             <a:pPr lvl="0"/>
             <a:r>
-              <a:rPr lang="zh-CN" altLang="en-US" smtClean="0"/>
+              <a:rPr lang="zh-CN" altLang="en-US"/>
               <a:t>编辑母版文本样式</a:t>
             </a:r>
           </a:p>
@@ -3009,7 +2980,7 @@
           <a:p>
             <a:fld id="{2BC34609-3014-4DC4-BA0E-9F599181006C}" type="datetimeFigureOut">
               <a:rPr lang="zh-CN" altLang="en-US" smtClean="0"/>
-              <a:t>2026/2/22</a:t>
+              <a:t>2026/3/4</a:t>
             </a:fld>
             <a:endParaRPr lang="zh-CN" altLang="en-US"/>
           </a:p>
@@ -3118,10 +3089,9 @@
           <a:lstStyle/>
           <a:p>
             <a:r>
-              <a:rPr lang="zh-CN" altLang="en-US" smtClean="0"/>
+              <a:rPr lang="zh-CN" altLang="en-US"/>
               <a:t>单击此处编辑母版标题样式</a:t>
             </a:r>
-            <a:endParaRPr lang="zh-CN" altLang="en-US"/>
           </a:p>
         </p:txBody>
       </p:sp>
@@ -3152,38 +3122,37 @@
           <a:p>
             <a:pPr lvl="0"/>
             <a:r>
-              <a:rPr lang="zh-CN" altLang="en-US" smtClean="0"/>
+              <a:rPr lang="zh-CN" altLang="en-US"/>
               <a:t>编辑母版文本样式</a:t>
             </a:r>
           </a:p>
           <a:p>
             <a:pPr lvl="1"/>
             <a:r>
-              <a:rPr lang="zh-CN" altLang="en-US" smtClean="0"/>
+              <a:rPr lang="zh-CN" altLang="en-US"/>
               <a:t>第二级</a:t>
             </a:r>
           </a:p>
           <a:p>
             <a:pPr lvl="2"/>
             <a:r>
-              <a:rPr lang="zh-CN" altLang="en-US" smtClean="0"/>
+              <a:rPr lang="zh-CN" altLang="en-US"/>
               <a:t>第三级</a:t>
             </a:r>
           </a:p>
           <a:p>
             <a:pPr lvl="3"/>
             <a:r>
-              <a:rPr lang="zh-CN" altLang="en-US" smtClean="0"/>
+              <a:rPr lang="zh-CN" altLang="en-US"/>
               <a:t>第四级</a:t>
             </a:r>
           </a:p>
           <a:p>
             <a:pPr lvl="4"/>
             <a:r>
-              <a:rPr lang="zh-CN" altLang="en-US" smtClean="0"/>
+              <a:rPr lang="zh-CN" altLang="en-US"/>
               <a:t>第五级</a:t>
             </a:r>
-            <a:endParaRPr lang="zh-CN" altLang="en-US"/>
           </a:p>
         </p:txBody>
       </p:sp>
@@ -3222,7 +3191,7 @@
           <a:p>
             <a:fld id="{2BC34609-3014-4DC4-BA0E-9F599181006C}" type="datetimeFigureOut">
               <a:rPr lang="zh-CN" altLang="en-US" smtClean="0"/>
-              <a:t>2026/2/22</a:t>
+              <a:t>2026/3/4</a:t>
             </a:fld>
             <a:endParaRPr lang="zh-CN" altLang="en-US"/>
           </a:p>
@@ -3665,7 +3634,7 @@
             <a:p>
               <a:pPr algn="ctr"/>
               <a:r>
-                <a:rPr lang="en-US" altLang="zh-CN" dirty="0" smtClean="0"/>
+                <a:rPr lang="en-US" altLang="zh-CN" dirty="0"/>
                 <a:t>Input</a:t>
               </a:r>
               <a:endParaRPr lang="zh-CN" altLang="en-US" dirty="0"/>
@@ -3696,7 +3665,7 @@
             <a:p>
               <a:pPr algn="ctr"/>
               <a:r>
-                <a:rPr lang="en-US" altLang="zh-CN" dirty="0" smtClean="0"/>
+                <a:rPr lang="en-US" altLang="zh-CN" dirty="0"/>
                 <a:t>Generated</a:t>
               </a:r>
               <a:endParaRPr lang="zh-CN" altLang="en-US" dirty="0"/>
@@ -3727,7 +3696,7 @@
             <a:p>
               <a:pPr algn="ctr"/>
               <a:r>
-                <a:rPr lang="en-US" altLang="zh-CN" dirty="0" smtClean="0"/>
+                <a:rPr lang="en-US" altLang="zh-CN" dirty="0"/>
                 <a:t>Ground Truth</a:t>
               </a:r>
               <a:endParaRPr lang="zh-CN" altLang="en-US" dirty="0"/>
@@ -3759,17 +3728,17 @@
           <a:p>
             <a:pPr algn="ctr"/>
             <a:r>
-              <a:rPr lang="en-US" altLang="zh-CN" dirty="0" smtClean="0"/>
+              <a:rPr lang="en-US" altLang="zh-CN" dirty="0"/>
               <a:t>a) RGB </a:t>
             </a:r>
             <a:r>
-              <a:rPr lang="en-US" altLang="zh-CN" dirty="0" smtClean="0">
+              <a:rPr lang="en-US" altLang="zh-CN" dirty="0">
                 <a:sym typeface="Wingdings" panose="05000000000000000000" pitchFamily="2" charset="2"/>
               </a:rPr>
               <a:t></a:t>
             </a:r>
             <a:r>
-              <a:rPr lang="en-US" altLang="zh-CN" dirty="0" smtClean="0"/>
+              <a:rPr lang="en-US" altLang="zh-CN" dirty="0"/>
               <a:t> IR</a:t>
             </a:r>
             <a:endParaRPr lang="zh-CN" altLang="en-US" dirty="0"/>
@@ -3801,20 +3770,16 @@
             <a:pPr algn="ctr"/>
             <a:r>
               <a:rPr lang="en-US" altLang="zh-CN" dirty="0"/>
-              <a:t>b</a:t>
+              <a:t>b) SAR </a:t>
             </a:r>
             <a:r>
-              <a:rPr lang="en-US" altLang="zh-CN" dirty="0" smtClean="0"/>
-              <a:t>) SAR </a:t>
-            </a:r>
-            <a:r>
-              <a:rPr lang="en-US" altLang="zh-CN" dirty="0" smtClean="0">
+              <a:rPr lang="en-US" altLang="zh-CN" dirty="0">
                 <a:sym typeface="Wingdings" panose="05000000000000000000" pitchFamily="2" charset="2"/>
               </a:rPr>
               <a:t></a:t>
             </a:r>
             <a:r>
-              <a:rPr lang="en-US" altLang="zh-CN" dirty="0" smtClean="0"/>
+              <a:rPr lang="en-US" altLang="zh-CN" dirty="0"/>
               <a:t> EO</a:t>
             </a:r>
             <a:endParaRPr lang="zh-CN" altLang="en-US" dirty="0"/>
@@ -3845,17 +3810,17 @@
           <a:p>
             <a:pPr algn="ctr"/>
             <a:r>
-              <a:rPr lang="en-US" altLang="zh-CN" dirty="0" smtClean="0"/>
+              <a:rPr lang="en-US" altLang="zh-CN" dirty="0"/>
               <a:t>c) SAR </a:t>
             </a:r>
             <a:r>
-              <a:rPr lang="en-US" altLang="zh-CN" dirty="0" smtClean="0">
+              <a:rPr lang="en-US" altLang="zh-CN" dirty="0">
                 <a:sym typeface="Wingdings" panose="05000000000000000000" pitchFamily="2" charset="2"/>
               </a:rPr>
               <a:t></a:t>
             </a:r>
             <a:r>
-              <a:rPr lang="en-US" altLang="zh-CN" dirty="0" smtClean="0"/>
+              <a:rPr lang="en-US" altLang="zh-CN" dirty="0"/>
               <a:t> IR</a:t>
             </a:r>
             <a:endParaRPr lang="zh-CN" altLang="en-US" dirty="0"/>
@@ -3886,17 +3851,17 @@
           <a:p>
             <a:pPr algn="ctr"/>
             <a:r>
-              <a:rPr lang="en-US" altLang="zh-CN" dirty="0" smtClean="0"/>
+              <a:rPr lang="en-US" altLang="zh-CN" dirty="0"/>
               <a:t>d) SAR </a:t>
             </a:r>
             <a:r>
-              <a:rPr lang="en-US" altLang="zh-CN" dirty="0" smtClean="0">
+              <a:rPr lang="en-US" altLang="zh-CN" dirty="0">
                 <a:sym typeface="Wingdings" panose="05000000000000000000" pitchFamily="2" charset="2"/>
               </a:rPr>
               <a:t></a:t>
             </a:r>
             <a:r>
-              <a:rPr lang="en-US" altLang="zh-CN" dirty="0" smtClean="0"/>
+              <a:rPr lang="en-US" altLang="zh-CN" dirty="0"/>
               <a:t> RGB</a:t>
             </a:r>
             <a:endParaRPr lang="zh-CN" altLang="en-US" dirty="0"/>
@@ -3978,7 +3943,7 @@
             <a:p>
               <a:pPr algn="ctr"/>
               <a:r>
-                <a:rPr lang="en-US" altLang="zh-CN" dirty="0" smtClean="0"/>
+                <a:rPr lang="en-US" altLang="zh-CN" dirty="0"/>
                 <a:t>Placeholder</a:t>
               </a:r>
               <a:endParaRPr lang="zh-CN" altLang="en-US" dirty="0"/>
@@ -4046,7 +4011,7 @@
             <a:p>
               <a:pPr algn="ctr"/>
               <a:r>
-                <a:rPr lang="en-US" altLang="zh-CN" dirty="0" smtClean="0"/>
+                <a:rPr lang="en-US" altLang="zh-CN" dirty="0"/>
                 <a:t>Placeholder</a:t>
               </a:r>
               <a:endParaRPr lang="zh-CN" altLang="en-US" dirty="0"/>
@@ -4114,7 +4079,7 @@
             <a:p>
               <a:pPr algn="ctr"/>
               <a:r>
-                <a:rPr lang="en-US" altLang="zh-CN" dirty="0" smtClean="0"/>
+                <a:rPr lang="en-US" altLang="zh-CN" dirty="0"/>
                 <a:t>Placeholder</a:t>
               </a:r>
               <a:endParaRPr lang="zh-CN" altLang="en-US" dirty="0"/>
@@ -4197,7 +4162,7 @@
             <a:p>
               <a:pPr algn="ctr"/>
               <a:r>
-                <a:rPr lang="en-US" altLang="zh-CN" dirty="0" smtClean="0"/>
+                <a:rPr lang="en-US" altLang="zh-CN" dirty="0"/>
                 <a:t>Placeholder</a:t>
               </a:r>
               <a:endParaRPr lang="zh-CN" altLang="en-US" dirty="0"/>
@@ -4265,7 +4230,7 @@
             <a:p>
               <a:pPr algn="ctr"/>
               <a:r>
-                <a:rPr lang="en-US" altLang="zh-CN" dirty="0" smtClean="0"/>
+                <a:rPr lang="en-US" altLang="zh-CN" dirty="0"/>
                 <a:t>Placeholder</a:t>
               </a:r>
               <a:endParaRPr lang="zh-CN" altLang="en-US" dirty="0"/>
@@ -4333,7 +4298,7 @@
             <a:p>
               <a:pPr algn="ctr"/>
               <a:r>
-                <a:rPr lang="en-US" altLang="zh-CN" dirty="0" smtClean="0"/>
+                <a:rPr lang="en-US" altLang="zh-CN" dirty="0"/>
                 <a:t>Placeholder</a:t>
               </a:r>
               <a:endParaRPr lang="zh-CN" altLang="en-US" dirty="0"/>
@@ -4416,7 +4381,7 @@
             <a:p>
               <a:pPr algn="ctr"/>
               <a:r>
-                <a:rPr lang="en-US" altLang="zh-CN" dirty="0" smtClean="0"/>
+                <a:rPr lang="en-US" altLang="zh-CN" dirty="0"/>
                 <a:t>Placeholder</a:t>
               </a:r>
               <a:endParaRPr lang="zh-CN" altLang="en-US" dirty="0"/>
@@ -4484,7 +4449,7 @@
             <a:p>
               <a:pPr algn="ctr"/>
               <a:r>
-                <a:rPr lang="en-US" altLang="zh-CN" dirty="0" smtClean="0"/>
+                <a:rPr lang="en-US" altLang="zh-CN" dirty="0"/>
                 <a:t>Placeholder</a:t>
               </a:r>
               <a:endParaRPr lang="zh-CN" altLang="en-US" dirty="0"/>
@@ -4552,7 +4517,7 @@
             <a:p>
               <a:pPr algn="ctr"/>
               <a:r>
-                <a:rPr lang="en-US" altLang="zh-CN" dirty="0" smtClean="0"/>
+                <a:rPr lang="en-US" altLang="zh-CN" dirty="0"/>
                 <a:t>Placeholder</a:t>
               </a:r>
               <a:endParaRPr lang="zh-CN" altLang="en-US" dirty="0"/>
@@ -4635,7 +4600,7 @@
             <a:p>
               <a:pPr algn="ctr"/>
               <a:r>
-                <a:rPr lang="en-US" altLang="zh-CN" dirty="0" smtClean="0"/>
+                <a:rPr lang="en-US" altLang="zh-CN" dirty="0"/>
                 <a:t>Placeholder</a:t>
               </a:r>
               <a:endParaRPr lang="zh-CN" altLang="en-US" dirty="0"/>
@@ -4703,7 +4668,7 @@
             <a:p>
               <a:pPr algn="ctr"/>
               <a:r>
-                <a:rPr lang="en-US" altLang="zh-CN" dirty="0" smtClean="0"/>
+                <a:rPr lang="en-US" altLang="zh-CN" dirty="0"/>
                 <a:t>Placeholder</a:t>
               </a:r>
               <a:endParaRPr lang="zh-CN" altLang="en-US" dirty="0"/>
@@ -4771,7 +4736,7 @@
             <a:p>
               <a:pPr algn="ctr"/>
               <a:r>
-                <a:rPr lang="en-US" altLang="zh-CN" dirty="0" smtClean="0"/>
+                <a:rPr lang="en-US" altLang="zh-CN" dirty="0"/>
                 <a:t>Placeholder</a:t>
               </a:r>
               <a:endParaRPr lang="zh-CN" altLang="en-US" dirty="0"/>
@@ -4817,7 +4782,7 @@
             <a:p>
               <a:pPr algn="ctr"/>
               <a:r>
-                <a:rPr lang="en-US" altLang="zh-CN" dirty="0" smtClean="0"/>
+                <a:rPr lang="en-US" altLang="zh-CN" dirty="0"/>
                 <a:t>Input</a:t>
               </a:r>
               <a:endParaRPr lang="zh-CN" altLang="en-US" dirty="0"/>
@@ -4848,7 +4813,7 @@
             <a:p>
               <a:pPr algn="ctr"/>
               <a:r>
-                <a:rPr lang="en-US" altLang="zh-CN" dirty="0" smtClean="0"/>
+                <a:rPr lang="en-US" altLang="zh-CN" dirty="0"/>
                 <a:t>Generated</a:t>
               </a:r>
               <a:endParaRPr lang="zh-CN" altLang="en-US" dirty="0"/>
@@ -4879,7 +4844,7 @@
             <a:p>
               <a:pPr algn="ctr"/>
               <a:r>
-                <a:rPr lang="en-US" altLang="zh-CN" dirty="0" smtClean="0"/>
+                <a:rPr lang="en-US" altLang="zh-CN" dirty="0"/>
                 <a:t>Ground Truth</a:t>
               </a:r>
               <a:endParaRPr lang="zh-CN" altLang="en-US" dirty="0"/>
@@ -4925,7 +4890,7 @@
             <a:p>
               <a:pPr algn="ctr"/>
               <a:r>
-                <a:rPr lang="en-US" altLang="zh-CN" dirty="0" smtClean="0"/>
+                <a:rPr lang="en-US" altLang="zh-CN" dirty="0"/>
                 <a:t>Input</a:t>
               </a:r>
               <a:endParaRPr lang="zh-CN" altLang="en-US" dirty="0"/>
@@ -4956,7 +4921,7 @@
             <a:p>
               <a:pPr algn="ctr"/>
               <a:r>
-                <a:rPr lang="en-US" altLang="zh-CN" dirty="0" smtClean="0"/>
+                <a:rPr lang="en-US" altLang="zh-CN" dirty="0"/>
                 <a:t>Generated</a:t>
               </a:r>
               <a:endParaRPr lang="zh-CN" altLang="en-US" dirty="0"/>
@@ -4987,7 +4952,7 @@
             <a:p>
               <a:pPr algn="ctr"/>
               <a:r>
-                <a:rPr lang="en-US" altLang="zh-CN" dirty="0" smtClean="0"/>
+                <a:rPr lang="en-US" altLang="zh-CN" dirty="0"/>
                 <a:t>Ground Truth</a:t>
               </a:r>
               <a:endParaRPr lang="zh-CN" altLang="en-US" dirty="0"/>
@@ -5033,7 +4998,7 @@
             <a:p>
               <a:pPr algn="ctr"/>
               <a:r>
-                <a:rPr lang="en-US" altLang="zh-CN" dirty="0" smtClean="0"/>
+                <a:rPr lang="en-US" altLang="zh-CN" dirty="0"/>
                 <a:t>Input</a:t>
               </a:r>
               <a:endParaRPr lang="zh-CN" altLang="en-US" dirty="0"/>
@@ -5064,7 +5029,7 @@
             <a:p>
               <a:pPr algn="ctr"/>
               <a:r>
-                <a:rPr lang="en-US" altLang="zh-CN" dirty="0" smtClean="0"/>
+                <a:rPr lang="en-US" altLang="zh-CN" dirty="0"/>
                 <a:t>Generated</a:t>
               </a:r>
               <a:endParaRPr lang="zh-CN" altLang="en-US" dirty="0"/>
@@ -5095,7 +5060,7 @@
             <a:p>
               <a:pPr algn="ctr"/>
               <a:r>
-                <a:rPr lang="en-US" altLang="zh-CN" dirty="0" smtClean="0"/>
+                <a:rPr lang="en-US" altLang="zh-CN" dirty="0"/>
                 <a:t>Ground Truth</a:t>
               </a:r>
               <a:endParaRPr lang="zh-CN" altLang="en-US" dirty="0"/>
@@ -5211,36 +5176,6 @@
           <a:chExt cx="0" cy="0"/>
         </a:xfrm>
       </p:grpSpPr>
-      <p:pic>
-        <p:nvPicPr>
-          <p:cNvPr id="4" name="图片 3"/>
-          <p:cNvPicPr>
-            <a:picLocks noChangeAspect="1"/>
-          </p:cNvPicPr>
-          <p:nvPr/>
-        </p:nvPicPr>
-        <p:blipFill>
-          <a:blip r:embed="rId3">
-            <a:extLst>
-              <a:ext uri="{28A0092B-C50C-407E-A947-70E740481C1C}">
-                <a14:useLocalDpi xmlns:a14="http://schemas.microsoft.com/office/drawing/2010/main" val="0"/>
-              </a:ext>
-            </a:extLst>
-          </a:blip>
-          <a:stretch>
-            <a:fillRect/>
-          </a:stretch>
-        </p:blipFill>
-        <p:spPr>
-          <a:xfrm>
-            <a:off x="1048215" y="8054"/>
-            <a:ext cx="10274920" cy="6849946"/>
-          </a:xfrm>
-          <a:prstGeom prst="rect">
-            <a:avLst/>
-          </a:prstGeom>
-        </p:spPr>
-      </p:pic>
       <p:sp>
         <p:nvSpPr>
           <p:cNvPr id="6" name="矩形 5"/>
@@ -5302,7 +5237,7 @@
           <a:p>
             <a:pPr algn="ctr"/>
             <a:r>
-              <a:rPr lang="en-US" altLang="zh-CN" sz="1200" dirty="0" smtClean="0"/>
+              <a:rPr lang="en-US" altLang="zh-CN" sz="1200" dirty="0"/>
               <a:t>Place-holder</a:t>
             </a:r>
             <a:endParaRPr lang="zh-CN" altLang="en-US" sz="1200" dirty="0"/>
@@ -5370,7 +5305,7 @@
           <a:p>
             <a:pPr algn="ctr"/>
             <a:r>
-              <a:rPr lang="en-US" altLang="zh-CN" sz="1200" dirty="0" smtClean="0"/>
+              <a:rPr lang="en-US" altLang="zh-CN" sz="1200" dirty="0"/>
               <a:t>Place-holder</a:t>
             </a:r>
             <a:endParaRPr lang="zh-CN" altLang="en-US" sz="1200" dirty="0"/>
@@ -5438,7 +5373,7 @@
           <a:p>
             <a:pPr algn="ctr"/>
             <a:r>
-              <a:rPr lang="en-US" altLang="zh-CN" sz="1200" dirty="0" smtClean="0"/>
+              <a:rPr lang="en-US" altLang="zh-CN" sz="1200" dirty="0"/>
               <a:t>Place-holder</a:t>
             </a:r>
             <a:endParaRPr lang="zh-CN" altLang="en-US" sz="1200" dirty="0"/>
@@ -5506,10 +5441,118 @@
           <a:p>
             <a:pPr algn="ctr"/>
             <a:r>
-              <a:rPr lang="en-US" altLang="zh-CN" sz="1200" dirty="0" smtClean="0"/>
+              <a:rPr lang="en-US" altLang="zh-CN" sz="1200" dirty="0"/>
               <a:t>Place-holder</a:t>
             </a:r>
             <a:endParaRPr lang="zh-CN" altLang="en-US" sz="1200" dirty="0"/>
+          </a:p>
+        </p:txBody>
+      </p:sp>
+      <p:pic>
+        <p:nvPicPr>
+          <p:cNvPr id="12" name="图片 11" descr="图片包含 图形用户界面&#10;&#10;AI 生成的内容可能不正确。">
+            <a:extLst>
+              <a:ext uri="{FF2B5EF4-FFF2-40B4-BE49-F238E27FC236}">
+                <a16:creationId xmlns:a16="http://schemas.microsoft.com/office/drawing/2014/main" id="{80DF902C-DD25-5911-E687-B71CCAA96219}"/>
+              </a:ext>
+            </a:extLst>
+          </p:cNvPr>
+          <p:cNvPicPr>
+            <a:picLocks noChangeAspect="1"/>
+          </p:cNvPicPr>
+          <p:nvPr/>
+        </p:nvPicPr>
+        <p:blipFill>
+          <a:blip r:embed="rId3">
+            <a:extLst>
+              <a:ext uri="{28A0092B-C50C-407E-A947-70E740481C1C}">
+                <a14:useLocalDpi xmlns:a14="http://schemas.microsoft.com/office/drawing/2010/main" val="0"/>
+              </a:ext>
+            </a:extLst>
+          </a:blip>
+          <a:stretch>
+            <a:fillRect/>
+          </a:stretch>
+        </p:blipFill>
+        <p:spPr>
+          <a:xfrm>
+            <a:off x="952500" y="0"/>
+            <a:ext cx="10287000" cy="6858000"/>
+          </a:xfrm>
+          <a:prstGeom prst="rect">
+            <a:avLst/>
+          </a:prstGeom>
+        </p:spPr>
+      </p:pic>
+      <p:sp>
+        <p:nvSpPr>
+          <p:cNvPr id="3" name="文本框 2">
+            <a:extLst>
+              <a:ext uri="{FF2B5EF4-FFF2-40B4-BE49-F238E27FC236}">
+                <a16:creationId xmlns:a16="http://schemas.microsoft.com/office/drawing/2014/main" id="{DB73E07C-F6D7-6551-EAB9-33B487781F1A}"/>
+              </a:ext>
+            </a:extLst>
+          </p:cNvPr>
+          <p:cNvSpPr txBox="1"/>
+          <p:nvPr/>
+        </p:nvSpPr>
+        <p:spPr>
+          <a:xfrm>
+            <a:off x="10673405" y="712706"/>
+            <a:ext cx="1584176" cy="646331"/>
+          </a:xfrm>
+          <a:prstGeom prst="rect">
+            <a:avLst/>
+          </a:prstGeom>
+          <a:noFill/>
+        </p:spPr>
+        <p:txBody>
+          <a:bodyPr wrap="square" rtlCol="0">
+            <a:spAutoFit/>
+          </a:bodyPr>
+          <a:lstStyle/>
+          <a:p>
+            <a:r>
+              <a:rPr lang="en-US" altLang="zh-CN" dirty="0"/>
+              <a:t>Target distribution</a:t>
+            </a:r>
+            <a:endParaRPr lang="zh-CN" altLang="en-US" dirty="0"/>
+          </a:p>
+        </p:txBody>
+      </p:sp>
+      <p:sp>
+        <p:nvSpPr>
+          <p:cNvPr id="2" name="文本框 1">
+            <a:extLst>
+              <a:ext uri="{FF2B5EF4-FFF2-40B4-BE49-F238E27FC236}">
+                <a16:creationId xmlns:a16="http://schemas.microsoft.com/office/drawing/2014/main" id="{0F1885E6-8974-DAA1-946D-0187B103D3F1}"/>
+              </a:ext>
+            </a:extLst>
+          </p:cNvPr>
+          <p:cNvSpPr txBox="1"/>
+          <p:nvPr/>
+        </p:nvSpPr>
+        <p:spPr>
+          <a:xfrm>
+            <a:off x="82928" y="642315"/>
+            <a:ext cx="1584176" cy="646331"/>
+          </a:xfrm>
+          <a:prstGeom prst="rect">
+            <a:avLst/>
+          </a:prstGeom>
+          <a:noFill/>
+        </p:spPr>
+        <p:txBody>
+          <a:bodyPr wrap="square" rtlCol="0">
+            <a:spAutoFit/>
+          </a:bodyPr>
+          <a:lstStyle/>
+          <a:p>
+            <a:r>
+              <a:rPr lang="en-US" altLang="zh-CN" dirty="0"/>
+              <a:t>Source distribution</a:t>
+            </a:r>
+            <a:endParaRPr lang="zh-CN" altLang="en-US" dirty="0"/>
           </a:p>
         </p:txBody>
       </p:sp>
@@ -5543,6 +5586,4710 @@
           <a:chExt cx="0" cy="0"/>
         </a:xfrm>
       </p:grpSpPr>
+      <p:grpSp>
+        <p:nvGrpSpPr>
+          <p:cNvPr id="63" name="组合 62">
+            <a:extLst>
+              <a:ext uri="{FF2B5EF4-FFF2-40B4-BE49-F238E27FC236}">
+                <a16:creationId xmlns:a16="http://schemas.microsoft.com/office/drawing/2014/main" id="{7E196BC9-6FAC-E4C8-C5C6-737E9745025A}"/>
+              </a:ext>
+            </a:extLst>
+          </p:cNvPr>
+          <p:cNvGrpSpPr/>
+          <p:nvPr/>
+        </p:nvGrpSpPr>
+        <p:grpSpPr>
+          <a:xfrm>
+            <a:off x="0" y="-28609"/>
+            <a:ext cx="9810707" cy="3430026"/>
+            <a:chOff x="86022" y="969099"/>
+            <a:chExt cx="9810707" cy="3430026"/>
+          </a:xfrm>
+        </p:grpSpPr>
+        <p:sp>
+          <p:nvSpPr>
+            <p:cNvPr id="5" name="矩形: 圆角 4">
+              <a:extLst>
+                <a:ext uri="{FF2B5EF4-FFF2-40B4-BE49-F238E27FC236}">
+                  <a16:creationId xmlns:a16="http://schemas.microsoft.com/office/drawing/2014/main" id="{C63BF428-7C1A-4575-F351-ABD6FD5C339D}"/>
+                </a:ext>
+              </a:extLst>
+            </p:cNvPr>
+            <p:cNvSpPr/>
+            <p:nvPr/>
+          </p:nvSpPr>
+          <p:spPr>
+            <a:xfrm rot="10800000">
+              <a:off x="212272" y="1192401"/>
+              <a:ext cx="391885" cy="1153886"/>
+            </a:xfrm>
+            <a:prstGeom prst="roundRect">
+              <a:avLst/>
+            </a:prstGeom>
+            <a:solidFill>
+              <a:srgbClr val="EE964B"/>
+            </a:solidFill>
+            <a:ln w="19050">
+              <a:solidFill>
+                <a:schemeClr val="tx1"/>
+              </a:solidFill>
+            </a:ln>
+          </p:spPr>
+          <p:style>
+            <a:lnRef idx="2">
+              <a:schemeClr val="accent1">
+                <a:shade val="15000"/>
+              </a:schemeClr>
+            </a:lnRef>
+            <a:fillRef idx="1">
+              <a:schemeClr val="accent1"/>
+            </a:fillRef>
+            <a:effectRef idx="0">
+              <a:schemeClr val="accent1"/>
+            </a:effectRef>
+            <a:fontRef idx="minor">
+              <a:schemeClr val="lt1"/>
+            </a:fontRef>
+          </p:style>
+          <p:txBody>
+            <a:bodyPr vert="eaVert" rtlCol="0" anchor="ctr"/>
+            <a:lstStyle/>
+            <a:p>
+              <a:pPr algn="ctr"/>
+              <a:r>
+                <a:rPr lang="en-US" altLang="zh-CN" sz="1100" dirty="0">
+                  <a:solidFill>
+                    <a:schemeClr val="tx1"/>
+                  </a:solidFill>
+                </a:rPr>
+                <a:t>Embed Input</a:t>
+              </a:r>
+              <a:endParaRPr lang="zh-CN" altLang="en-US" sz="1100" dirty="0">
+                <a:solidFill>
+                  <a:schemeClr val="tx1"/>
+                </a:solidFill>
+              </a:endParaRPr>
+            </a:p>
+          </p:txBody>
+        </p:sp>
+        <p:sp>
+          <p:nvSpPr>
+            <p:cNvPr id="6" name="矩形: 圆角 5">
+              <a:extLst>
+                <a:ext uri="{FF2B5EF4-FFF2-40B4-BE49-F238E27FC236}">
+                  <a16:creationId xmlns:a16="http://schemas.microsoft.com/office/drawing/2014/main" id="{EBD0E459-098D-1702-B935-FEA8761AD37F}"/>
+                </a:ext>
+              </a:extLst>
+            </p:cNvPr>
+            <p:cNvSpPr/>
+            <p:nvPr/>
+          </p:nvSpPr>
+          <p:spPr>
+            <a:xfrm rot="10800000">
+              <a:off x="876300" y="1192401"/>
+              <a:ext cx="391885" cy="1153886"/>
+            </a:xfrm>
+            <a:prstGeom prst="roundRect">
+              <a:avLst/>
+            </a:prstGeom>
+            <a:solidFill>
+              <a:srgbClr val="FAF0CA"/>
+            </a:solidFill>
+            <a:ln w="19050">
+              <a:solidFill>
+                <a:schemeClr val="tx1"/>
+              </a:solidFill>
+            </a:ln>
+          </p:spPr>
+          <p:style>
+            <a:lnRef idx="2">
+              <a:schemeClr val="accent1">
+                <a:shade val="15000"/>
+              </a:schemeClr>
+            </a:lnRef>
+            <a:fillRef idx="1">
+              <a:schemeClr val="accent1"/>
+            </a:fillRef>
+            <a:effectRef idx="0">
+              <a:schemeClr val="accent1"/>
+            </a:effectRef>
+            <a:fontRef idx="minor">
+              <a:schemeClr val="lt1"/>
+            </a:fontRef>
+          </p:style>
+          <p:txBody>
+            <a:bodyPr vert="eaVert" rtlCol="0" anchor="ctr"/>
+            <a:lstStyle/>
+            <a:p>
+              <a:pPr algn="ctr"/>
+              <a:r>
+                <a:rPr lang="en-US" altLang="zh-CN" sz="1100" dirty="0">
+                  <a:solidFill>
+                    <a:schemeClr val="tx1"/>
+                  </a:solidFill>
+                </a:rPr>
+                <a:t>ResBlock</a:t>
+              </a:r>
+              <a:endParaRPr lang="zh-CN" altLang="en-US" sz="1100" dirty="0">
+                <a:solidFill>
+                  <a:schemeClr val="tx1"/>
+                </a:solidFill>
+              </a:endParaRPr>
+            </a:p>
+          </p:txBody>
+        </p:sp>
+        <p:cxnSp>
+          <p:nvCxnSpPr>
+            <p:cNvPr id="8" name="直接箭头连接符 7">
+              <a:extLst>
+                <a:ext uri="{FF2B5EF4-FFF2-40B4-BE49-F238E27FC236}">
+                  <a16:creationId xmlns:a16="http://schemas.microsoft.com/office/drawing/2014/main" id="{6472F286-F7AD-461B-A168-5FA4A7869D10}"/>
+                </a:ext>
+              </a:extLst>
+            </p:cNvPr>
+            <p:cNvCxnSpPr>
+              <a:cxnSpLocks/>
+              <a:stCxn id="5" idx="1"/>
+              <a:endCxn id="6" idx="3"/>
+            </p:cNvCxnSpPr>
+            <p:nvPr/>
+          </p:nvCxnSpPr>
+          <p:spPr>
+            <a:xfrm>
+              <a:off x="604157" y="1769344"/>
+              <a:ext cx="272143" cy="0"/>
+            </a:xfrm>
+            <a:prstGeom prst="straightConnector1">
+              <a:avLst/>
+            </a:prstGeom>
+            <a:ln w="19050">
+              <a:tailEnd type="triangle"/>
+            </a:ln>
+          </p:spPr>
+          <p:style>
+            <a:lnRef idx="1">
+              <a:schemeClr val="dk1"/>
+            </a:lnRef>
+            <a:fillRef idx="0">
+              <a:schemeClr val="dk1"/>
+            </a:fillRef>
+            <a:effectRef idx="0">
+              <a:schemeClr val="dk1"/>
+            </a:effectRef>
+            <a:fontRef idx="minor">
+              <a:schemeClr val="tx1"/>
+            </a:fontRef>
+          </p:style>
+        </p:cxnSp>
+        <p:sp>
+          <p:nvSpPr>
+            <p:cNvPr id="13" name="矩形: 圆角 12">
+              <a:extLst>
+                <a:ext uri="{FF2B5EF4-FFF2-40B4-BE49-F238E27FC236}">
+                  <a16:creationId xmlns:a16="http://schemas.microsoft.com/office/drawing/2014/main" id="{1AD97E56-1A89-AB8D-DE47-8375C56DB1BF}"/>
+                </a:ext>
+              </a:extLst>
+            </p:cNvPr>
+            <p:cNvSpPr/>
+            <p:nvPr/>
+          </p:nvSpPr>
+          <p:spPr>
+            <a:xfrm rot="10800000">
+              <a:off x="1611992" y="1468834"/>
+              <a:ext cx="391885" cy="1153886"/>
+            </a:xfrm>
+            <a:prstGeom prst="roundRect">
+              <a:avLst/>
+            </a:prstGeom>
+            <a:solidFill>
+              <a:srgbClr val="F4D35E"/>
+            </a:solidFill>
+            <a:ln w="19050">
+              <a:solidFill>
+                <a:schemeClr val="tx1"/>
+              </a:solidFill>
+            </a:ln>
+          </p:spPr>
+          <p:style>
+            <a:lnRef idx="2">
+              <a:schemeClr val="accent1">
+                <a:shade val="15000"/>
+              </a:schemeClr>
+            </a:lnRef>
+            <a:fillRef idx="1">
+              <a:schemeClr val="accent1"/>
+            </a:fillRef>
+            <a:effectRef idx="0">
+              <a:schemeClr val="accent1"/>
+            </a:effectRef>
+            <a:fontRef idx="minor">
+              <a:schemeClr val="lt1"/>
+            </a:fontRef>
+          </p:style>
+          <p:txBody>
+            <a:bodyPr vert="eaVert" rtlCol="0" anchor="ctr"/>
+            <a:lstStyle/>
+            <a:p>
+              <a:pPr algn="ctr"/>
+              <a:r>
+                <a:rPr lang="en-US" altLang="zh-CN" sz="1100" dirty="0">
+                  <a:solidFill>
+                    <a:schemeClr val="tx1"/>
+                  </a:solidFill>
+                </a:rPr>
+                <a:t>Average Pool</a:t>
+              </a:r>
+              <a:endParaRPr lang="zh-CN" altLang="en-US" sz="1100" dirty="0">
+                <a:solidFill>
+                  <a:schemeClr val="tx1"/>
+                </a:solidFill>
+              </a:endParaRPr>
+            </a:p>
+          </p:txBody>
+        </p:sp>
+        <p:sp>
+          <p:nvSpPr>
+            <p:cNvPr id="19" name="文本框 18">
+              <a:extLst>
+                <a:ext uri="{FF2B5EF4-FFF2-40B4-BE49-F238E27FC236}">
+                  <a16:creationId xmlns:a16="http://schemas.microsoft.com/office/drawing/2014/main" id="{24F99E2C-1FC1-BC3D-00A7-0149DCFDBD00}"/>
+                </a:ext>
+              </a:extLst>
+            </p:cNvPr>
+            <p:cNvSpPr txBox="1"/>
+            <p:nvPr/>
+          </p:nvSpPr>
+          <p:spPr>
+            <a:xfrm>
+              <a:off x="86022" y="2406612"/>
+              <a:ext cx="1079500" cy="430887"/>
+            </a:xfrm>
+            <a:prstGeom prst="rect">
+              <a:avLst/>
+            </a:prstGeom>
+            <a:noFill/>
+          </p:spPr>
+          <p:txBody>
+            <a:bodyPr wrap="square" rtlCol="0">
+              <a:spAutoFit/>
+            </a:bodyPr>
+            <a:lstStyle/>
+            <a:p>
+              <a:pPr algn="ctr"/>
+              <a:r>
+                <a:rPr lang="en-US" altLang="zh-CN" sz="1100" dirty="0"/>
+                <a:t>Down 0</a:t>
+              </a:r>
+            </a:p>
+            <a:p>
+              <a:pPr algn="ctr"/>
+              <a:r>
+                <a:rPr lang="en-US" altLang="zh-CN" sz="1100" dirty="0"/>
+                <a:t>(512 × 512)</a:t>
+              </a:r>
+              <a:endParaRPr lang="zh-CN" altLang="en-US" sz="1100" dirty="0"/>
+            </a:p>
+          </p:txBody>
+        </p:sp>
+        <p:cxnSp>
+          <p:nvCxnSpPr>
+            <p:cNvPr id="20" name="直接箭头连接符 19">
+              <a:extLst>
+                <a:ext uri="{FF2B5EF4-FFF2-40B4-BE49-F238E27FC236}">
+                  <a16:creationId xmlns:a16="http://schemas.microsoft.com/office/drawing/2014/main" id="{574D2722-AE72-D0AF-5E87-93AAA074CC00}"/>
+                </a:ext>
+              </a:extLst>
+            </p:cNvPr>
+            <p:cNvCxnSpPr>
+              <a:cxnSpLocks/>
+            </p:cNvCxnSpPr>
+            <p:nvPr/>
+          </p:nvCxnSpPr>
+          <p:spPr>
+            <a:xfrm>
+              <a:off x="1268185" y="1880677"/>
+              <a:ext cx="343807" cy="0"/>
+            </a:xfrm>
+            <a:prstGeom prst="straightConnector1">
+              <a:avLst/>
+            </a:prstGeom>
+            <a:ln w="19050">
+              <a:tailEnd type="triangle"/>
+            </a:ln>
+          </p:spPr>
+          <p:style>
+            <a:lnRef idx="1">
+              <a:schemeClr val="dk1"/>
+            </a:lnRef>
+            <a:fillRef idx="0">
+              <a:schemeClr val="dk1"/>
+            </a:fillRef>
+            <a:effectRef idx="0">
+              <a:schemeClr val="dk1"/>
+            </a:effectRef>
+            <a:fontRef idx="minor">
+              <a:schemeClr val="tx1"/>
+            </a:fontRef>
+          </p:style>
+        </p:cxnSp>
+        <p:sp>
+          <p:nvSpPr>
+            <p:cNvPr id="23" name="矩形: 圆角 22">
+              <a:extLst>
+                <a:ext uri="{FF2B5EF4-FFF2-40B4-BE49-F238E27FC236}">
+                  <a16:creationId xmlns:a16="http://schemas.microsoft.com/office/drawing/2014/main" id="{C6C2A46D-6D51-D8B0-6948-3A37EEFA74FA}"/>
+                </a:ext>
+              </a:extLst>
+            </p:cNvPr>
+            <p:cNvSpPr/>
+            <p:nvPr/>
+          </p:nvSpPr>
+          <p:spPr>
+            <a:xfrm rot="10800000">
+              <a:off x="2276018" y="1468170"/>
+              <a:ext cx="391885" cy="1153886"/>
+            </a:xfrm>
+            <a:prstGeom prst="roundRect">
+              <a:avLst/>
+            </a:prstGeom>
+            <a:solidFill>
+              <a:srgbClr val="FAF0CA"/>
+            </a:solidFill>
+            <a:ln w="19050">
+              <a:solidFill>
+                <a:schemeClr val="tx1"/>
+              </a:solidFill>
+            </a:ln>
+          </p:spPr>
+          <p:style>
+            <a:lnRef idx="2">
+              <a:schemeClr val="accent1">
+                <a:shade val="15000"/>
+              </a:schemeClr>
+            </a:lnRef>
+            <a:fillRef idx="1">
+              <a:schemeClr val="accent1"/>
+            </a:fillRef>
+            <a:effectRef idx="0">
+              <a:schemeClr val="accent1"/>
+            </a:effectRef>
+            <a:fontRef idx="minor">
+              <a:schemeClr val="lt1"/>
+            </a:fontRef>
+          </p:style>
+          <p:txBody>
+            <a:bodyPr vert="eaVert" rtlCol="0" anchor="ctr"/>
+            <a:lstStyle/>
+            <a:p>
+              <a:pPr algn="ctr"/>
+              <a:r>
+                <a:rPr lang="en-US" altLang="zh-CN" sz="1100" dirty="0">
+                  <a:solidFill>
+                    <a:schemeClr val="tx1"/>
+                  </a:solidFill>
+                </a:rPr>
+                <a:t>ResBlock</a:t>
+              </a:r>
+              <a:endParaRPr lang="zh-CN" altLang="en-US" sz="1100" dirty="0">
+                <a:solidFill>
+                  <a:schemeClr val="tx1"/>
+                </a:solidFill>
+              </a:endParaRPr>
+            </a:p>
+          </p:txBody>
+        </p:sp>
+        <p:cxnSp>
+          <p:nvCxnSpPr>
+            <p:cNvPr id="24" name="直接箭头连接符 23">
+              <a:extLst>
+                <a:ext uri="{FF2B5EF4-FFF2-40B4-BE49-F238E27FC236}">
+                  <a16:creationId xmlns:a16="http://schemas.microsoft.com/office/drawing/2014/main" id="{9D6DB174-7476-DDE1-117F-6D219790E532}"/>
+                </a:ext>
+              </a:extLst>
+            </p:cNvPr>
+            <p:cNvCxnSpPr>
+              <a:cxnSpLocks/>
+              <a:stCxn id="13" idx="1"/>
+              <a:endCxn id="23" idx="3"/>
+            </p:cNvCxnSpPr>
+            <p:nvPr/>
+          </p:nvCxnSpPr>
+          <p:spPr>
+            <a:xfrm flipV="1">
+              <a:off x="2003877" y="2045113"/>
+              <a:ext cx="272141" cy="664"/>
+            </a:xfrm>
+            <a:prstGeom prst="straightConnector1">
+              <a:avLst/>
+            </a:prstGeom>
+            <a:ln w="19050">
+              <a:tailEnd type="triangle"/>
+            </a:ln>
+          </p:spPr>
+          <p:style>
+            <a:lnRef idx="1">
+              <a:schemeClr val="dk1"/>
+            </a:lnRef>
+            <a:fillRef idx="0">
+              <a:schemeClr val="dk1"/>
+            </a:fillRef>
+            <a:effectRef idx="0">
+              <a:schemeClr val="dk1"/>
+            </a:effectRef>
+            <a:fontRef idx="minor">
+              <a:schemeClr val="tx1"/>
+            </a:fontRef>
+          </p:style>
+        </p:cxnSp>
+        <p:sp>
+          <p:nvSpPr>
+            <p:cNvPr id="27" name="文本框 26">
+              <a:extLst>
+                <a:ext uri="{FF2B5EF4-FFF2-40B4-BE49-F238E27FC236}">
+                  <a16:creationId xmlns:a16="http://schemas.microsoft.com/office/drawing/2014/main" id="{7DB8042C-61CA-8DCC-0A29-477C5A022E11}"/>
+                </a:ext>
+              </a:extLst>
+            </p:cNvPr>
+            <p:cNvSpPr txBox="1"/>
+            <p:nvPr/>
+          </p:nvSpPr>
+          <p:spPr>
+            <a:xfrm>
+              <a:off x="1070425" y="969099"/>
+              <a:ext cx="391886" cy="261610"/>
+            </a:xfrm>
+            <a:prstGeom prst="rect">
+              <a:avLst/>
+            </a:prstGeom>
+            <a:noFill/>
+          </p:spPr>
+          <p:txBody>
+            <a:bodyPr wrap="square" rtlCol="0">
+              <a:spAutoFit/>
+            </a:bodyPr>
+            <a:lstStyle/>
+            <a:p>
+              <a:pPr algn="ctr"/>
+              <a:r>
+                <a:rPr lang="en-US" altLang="zh-CN" sz="1100" b="1" dirty="0"/>
+                <a:t>×2</a:t>
+              </a:r>
+              <a:endParaRPr lang="zh-CN" altLang="en-US" sz="1100" b="1" dirty="0"/>
+            </a:p>
+          </p:txBody>
+        </p:sp>
+        <p:cxnSp>
+          <p:nvCxnSpPr>
+            <p:cNvPr id="28" name="直接箭头连接符 27">
+              <a:extLst>
+                <a:ext uri="{FF2B5EF4-FFF2-40B4-BE49-F238E27FC236}">
+                  <a16:creationId xmlns:a16="http://schemas.microsoft.com/office/drawing/2014/main" id="{E48280DB-18DB-2581-50C2-1D34A4A80413}"/>
+                </a:ext>
+              </a:extLst>
+            </p:cNvPr>
+            <p:cNvCxnSpPr>
+              <a:cxnSpLocks/>
+              <a:stCxn id="29" idx="1"/>
+              <a:endCxn id="30" idx="3"/>
+            </p:cNvCxnSpPr>
+            <p:nvPr/>
+          </p:nvCxnSpPr>
+          <p:spPr>
+            <a:xfrm>
+              <a:off x="3331928" y="2271164"/>
+              <a:ext cx="272139" cy="0"/>
+            </a:xfrm>
+            <a:prstGeom prst="straightConnector1">
+              <a:avLst/>
+            </a:prstGeom>
+            <a:ln w="19050">
+              <a:tailEnd type="triangle"/>
+            </a:ln>
+          </p:spPr>
+          <p:style>
+            <a:lnRef idx="1">
+              <a:schemeClr val="dk1"/>
+            </a:lnRef>
+            <a:fillRef idx="0">
+              <a:schemeClr val="dk1"/>
+            </a:fillRef>
+            <a:effectRef idx="0">
+              <a:schemeClr val="dk1"/>
+            </a:effectRef>
+            <a:fontRef idx="minor">
+              <a:schemeClr val="tx1"/>
+            </a:fontRef>
+          </p:style>
+        </p:cxnSp>
+        <p:sp>
+          <p:nvSpPr>
+            <p:cNvPr id="29" name="矩形: 圆角 28">
+              <a:extLst>
+                <a:ext uri="{FF2B5EF4-FFF2-40B4-BE49-F238E27FC236}">
+                  <a16:creationId xmlns:a16="http://schemas.microsoft.com/office/drawing/2014/main" id="{E498CBF1-6DD5-278F-927F-38B4294910C4}"/>
+                </a:ext>
+              </a:extLst>
+            </p:cNvPr>
+            <p:cNvSpPr/>
+            <p:nvPr/>
+          </p:nvSpPr>
+          <p:spPr>
+            <a:xfrm rot="10800000">
+              <a:off x="2940043" y="1694221"/>
+              <a:ext cx="391885" cy="1153886"/>
+            </a:xfrm>
+            <a:prstGeom prst="roundRect">
+              <a:avLst/>
+            </a:prstGeom>
+            <a:solidFill>
+              <a:srgbClr val="F4D35E"/>
+            </a:solidFill>
+            <a:ln w="19050">
+              <a:solidFill>
+                <a:schemeClr val="tx1"/>
+              </a:solidFill>
+            </a:ln>
+          </p:spPr>
+          <p:style>
+            <a:lnRef idx="2">
+              <a:schemeClr val="accent1">
+                <a:shade val="15000"/>
+              </a:schemeClr>
+            </a:lnRef>
+            <a:fillRef idx="1">
+              <a:schemeClr val="accent1"/>
+            </a:fillRef>
+            <a:effectRef idx="0">
+              <a:schemeClr val="accent1"/>
+            </a:effectRef>
+            <a:fontRef idx="minor">
+              <a:schemeClr val="lt1"/>
+            </a:fontRef>
+          </p:style>
+          <p:txBody>
+            <a:bodyPr vert="eaVert" rtlCol="0" anchor="ctr"/>
+            <a:lstStyle/>
+            <a:p>
+              <a:pPr algn="ctr"/>
+              <a:r>
+                <a:rPr lang="en-US" altLang="zh-CN" sz="1100" dirty="0">
+                  <a:solidFill>
+                    <a:schemeClr val="tx1"/>
+                  </a:solidFill>
+                </a:rPr>
+                <a:t>Average Pool</a:t>
+              </a:r>
+              <a:endParaRPr lang="zh-CN" altLang="en-US" sz="1100" dirty="0">
+                <a:solidFill>
+                  <a:schemeClr val="tx1"/>
+                </a:solidFill>
+              </a:endParaRPr>
+            </a:p>
+          </p:txBody>
+        </p:sp>
+        <p:sp>
+          <p:nvSpPr>
+            <p:cNvPr id="30" name="矩形: 圆角 29">
+              <a:extLst>
+                <a:ext uri="{FF2B5EF4-FFF2-40B4-BE49-F238E27FC236}">
+                  <a16:creationId xmlns:a16="http://schemas.microsoft.com/office/drawing/2014/main" id="{DA6C8794-2E4F-45C6-6153-80761D0DBD5B}"/>
+                </a:ext>
+              </a:extLst>
+            </p:cNvPr>
+            <p:cNvSpPr/>
+            <p:nvPr/>
+          </p:nvSpPr>
+          <p:spPr>
+            <a:xfrm rot="10800000">
+              <a:off x="3604067" y="1694221"/>
+              <a:ext cx="391885" cy="1153886"/>
+            </a:xfrm>
+            <a:prstGeom prst="roundRect">
+              <a:avLst/>
+            </a:prstGeom>
+            <a:solidFill>
+              <a:srgbClr val="FAF0CA"/>
+            </a:solidFill>
+            <a:ln w="19050">
+              <a:solidFill>
+                <a:schemeClr val="tx1"/>
+              </a:solidFill>
+            </a:ln>
+          </p:spPr>
+          <p:style>
+            <a:lnRef idx="2">
+              <a:schemeClr val="accent1">
+                <a:shade val="15000"/>
+              </a:schemeClr>
+            </a:lnRef>
+            <a:fillRef idx="1">
+              <a:schemeClr val="accent1"/>
+            </a:fillRef>
+            <a:effectRef idx="0">
+              <a:schemeClr val="accent1"/>
+            </a:effectRef>
+            <a:fontRef idx="minor">
+              <a:schemeClr val="lt1"/>
+            </a:fontRef>
+          </p:style>
+          <p:txBody>
+            <a:bodyPr vert="eaVert" rtlCol="0" anchor="ctr"/>
+            <a:lstStyle/>
+            <a:p>
+              <a:pPr algn="ctr"/>
+              <a:r>
+                <a:rPr lang="en-US" altLang="zh-CN" sz="1100" dirty="0">
+                  <a:solidFill>
+                    <a:schemeClr val="tx1"/>
+                  </a:solidFill>
+                </a:rPr>
+                <a:t>ResBlock</a:t>
+              </a:r>
+              <a:endParaRPr lang="zh-CN" altLang="en-US" sz="1100" dirty="0">
+                <a:solidFill>
+                  <a:schemeClr val="tx1"/>
+                </a:solidFill>
+              </a:endParaRPr>
+            </a:p>
+          </p:txBody>
+        </p:sp>
+        <p:sp>
+          <p:nvSpPr>
+            <p:cNvPr id="33" name="文本框 32">
+              <a:extLst>
+                <a:ext uri="{FF2B5EF4-FFF2-40B4-BE49-F238E27FC236}">
+                  <a16:creationId xmlns:a16="http://schemas.microsoft.com/office/drawing/2014/main" id="{361FF1C4-04D0-DB48-5897-B66D7E05D67C}"/>
+                </a:ext>
+              </a:extLst>
+            </p:cNvPr>
+            <p:cNvSpPr txBox="1"/>
+            <p:nvPr/>
+          </p:nvSpPr>
+          <p:spPr>
+            <a:xfrm>
+              <a:off x="1415970" y="2632663"/>
+              <a:ext cx="1079500" cy="430887"/>
+            </a:xfrm>
+            <a:prstGeom prst="rect">
+              <a:avLst/>
+            </a:prstGeom>
+            <a:noFill/>
+          </p:spPr>
+          <p:txBody>
+            <a:bodyPr wrap="square" rtlCol="0">
+              <a:spAutoFit/>
+            </a:bodyPr>
+            <a:lstStyle/>
+            <a:p>
+              <a:pPr algn="ctr"/>
+              <a:r>
+                <a:rPr lang="en-US" altLang="zh-CN" sz="1100" dirty="0"/>
+                <a:t>Down 1</a:t>
+              </a:r>
+            </a:p>
+            <a:p>
+              <a:pPr algn="ctr"/>
+              <a:r>
+                <a:rPr lang="en-US" altLang="zh-CN" sz="1100" dirty="0"/>
+                <a:t>(256 × 256)</a:t>
+              </a:r>
+              <a:endParaRPr lang="zh-CN" altLang="en-US" sz="1100" dirty="0"/>
+            </a:p>
+          </p:txBody>
+        </p:sp>
+        <p:sp>
+          <p:nvSpPr>
+            <p:cNvPr id="34" name="文本框 33">
+              <a:extLst>
+                <a:ext uri="{FF2B5EF4-FFF2-40B4-BE49-F238E27FC236}">
+                  <a16:creationId xmlns:a16="http://schemas.microsoft.com/office/drawing/2014/main" id="{D2299801-1977-4B4F-716B-7DBF6374D643}"/>
+                </a:ext>
+              </a:extLst>
+            </p:cNvPr>
+            <p:cNvSpPr txBox="1"/>
+            <p:nvPr/>
+          </p:nvSpPr>
+          <p:spPr>
+            <a:xfrm>
+              <a:off x="2817734" y="2887381"/>
+              <a:ext cx="1079500" cy="430887"/>
+            </a:xfrm>
+            <a:prstGeom prst="rect">
+              <a:avLst/>
+            </a:prstGeom>
+            <a:noFill/>
+          </p:spPr>
+          <p:txBody>
+            <a:bodyPr wrap="square" rtlCol="0">
+              <a:spAutoFit/>
+            </a:bodyPr>
+            <a:lstStyle/>
+            <a:p>
+              <a:pPr algn="ctr"/>
+              <a:r>
+                <a:rPr lang="en-US" altLang="zh-CN" sz="1100" dirty="0"/>
+                <a:t>Down 2</a:t>
+              </a:r>
+            </a:p>
+            <a:p>
+              <a:pPr algn="ctr"/>
+              <a:r>
+                <a:rPr lang="en-US" altLang="zh-CN" sz="1100" dirty="0"/>
+                <a:t>(128 × 128)</a:t>
+              </a:r>
+              <a:endParaRPr lang="zh-CN" altLang="en-US" sz="1100" dirty="0"/>
+            </a:p>
+          </p:txBody>
+        </p:sp>
+        <p:cxnSp>
+          <p:nvCxnSpPr>
+            <p:cNvPr id="35" name="直接箭头连接符 34">
+              <a:extLst>
+                <a:ext uri="{FF2B5EF4-FFF2-40B4-BE49-F238E27FC236}">
+                  <a16:creationId xmlns:a16="http://schemas.microsoft.com/office/drawing/2014/main" id="{207FCF83-E873-79EF-7E5D-3659AD6E8D98}"/>
+                </a:ext>
+              </a:extLst>
+            </p:cNvPr>
+            <p:cNvCxnSpPr>
+              <a:cxnSpLocks/>
+            </p:cNvCxnSpPr>
+            <p:nvPr/>
+          </p:nvCxnSpPr>
+          <p:spPr>
+            <a:xfrm>
+              <a:off x="2667899" y="2160491"/>
+              <a:ext cx="272143" cy="0"/>
+            </a:xfrm>
+            <a:prstGeom prst="straightConnector1">
+              <a:avLst/>
+            </a:prstGeom>
+            <a:ln w="19050">
+              <a:tailEnd type="triangle"/>
+            </a:ln>
+          </p:spPr>
+          <p:style>
+            <a:lnRef idx="1">
+              <a:schemeClr val="dk1"/>
+            </a:lnRef>
+            <a:fillRef idx="0">
+              <a:schemeClr val="dk1"/>
+            </a:fillRef>
+            <a:effectRef idx="0">
+              <a:schemeClr val="dk1"/>
+            </a:effectRef>
+            <a:fontRef idx="minor">
+              <a:schemeClr val="tx1"/>
+            </a:fontRef>
+          </p:style>
+        </p:cxnSp>
+        <p:sp>
+          <p:nvSpPr>
+            <p:cNvPr id="36" name="文本框 35">
+              <a:extLst>
+                <a:ext uri="{FF2B5EF4-FFF2-40B4-BE49-F238E27FC236}">
+                  <a16:creationId xmlns:a16="http://schemas.microsoft.com/office/drawing/2014/main" id="{137CCCC6-CAC8-D4D5-9165-CE5766D14608}"/>
+                </a:ext>
+              </a:extLst>
+            </p:cNvPr>
+            <p:cNvSpPr txBox="1"/>
+            <p:nvPr/>
+          </p:nvSpPr>
+          <p:spPr>
+            <a:xfrm>
+              <a:off x="2412084" y="1200105"/>
+              <a:ext cx="391886" cy="261610"/>
+            </a:xfrm>
+            <a:prstGeom prst="rect">
+              <a:avLst/>
+            </a:prstGeom>
+            <a:noFill/>
+          </p:spPr>
+          <p:txBody>
+            <a:bodyPr wrap="square" rtlCol="0">
+              <a:spAutoFit/>
+            </a:bodyPr>
+            <a:lstStyle/>
+            <a:p>
+              <a:pPr algn="ctr"/>
+              <a:r>
+                <a:rPr lang="en-US" altLang="zh-CN" sz="1100" b="1" dirty="0"/>
+                <a:t>×2</a:t>
+              </a:r>
+              <a:endParaRPr lang="zh-CN" altLang="en-US" sz="1100" b="1" dirty="0"/>
+            </a:p>
+          </p:txBody>
+        </p:sp>
+        <p:sp>
+          <p:nvSpPr>
+            <p:cNvPr id="37" name="文本框 36">
+              <a:extLst>
+                <a:ext uri="{FF2B5EF4-FFF2-40B4-BE49-F238E27FC236}">
+                  <a16:creationId xmlns:a16="http://schemas.microsoft.com/office/drawing/2014/main" id="{EA94359A-F348-DD7F-66A5-BD2435C73303}"/>
+                </a:ext>
+              </a:extLst>
+            </p:cNvPr>
+            <p:cNvSpPr txBox="1"/>
+            <p:nvPr/>
+          </p:nvSpPr>
+          <p:spPr>
+            <a:xfrm>
+              <a:off x="3763720" y="1438054"/>
+              <a:ext cx="391886" cy="261610"/>
+            </a:xfrm>
+            <a:prstGeom prst="rect">
+              <a:avLst/>
+            </a:prstGeom>
+            <a:noFill/>
+          </p:spPr>
+          <p:txBody>
+            <a:bodyPr wrap="square" rtlCol="0">
+              <a:spAutoFit/>
+            </a:bodyPr>
+            <a:lstStyle/>
+            <a:p>
+              <a:pPr algn="ctr"/>
+              <a:r>
+                <a:rPr lang="en-US" altLang="zh-CN" sz="1100" b="1" dirty="0"/>
+                <a:t>×2</a:t>
+              </a:r>
+              <a:endParaRPr lang="zh-CN" altLang="en-US" sz="1100" b="1" dirty="0"/>
+            </a:p>
+          </p:txBody>
+        </p:sp>
+        <p:cxnSp>
+          <p:nvCxnSpPr>
+            <p:cNvPr id="38" name="直接箭头连接符 37">
+              <a:extLst>
+                <a:ext uri="{FF2B5EF4-FFF2-40B4-BE49-F238E27FC236}">
+                  <a16:creationId xmlns:a16="http://schemas.microsoft.com/office/drawing/2014/main" id="{AACEC884-B474-A205-7B73-D0C340081828}"/>
+                </a:ext>
+              </a:extLst>
+            </p:cNvPr>
+            <p:cNvCxnSpPr>
+              <a:cxnSpLocks/>
+              <a:stCxn id="39" idx="1"/>
+              <a:endCxn id="40" idx="3"/>
+            </p:cNvCxnSpPr>
+            <p:nvPr/>
+          </p:nvCxnSpPr>
+          <p:spPr>
+            <a:xfrm>
+              <a:off x="4659978" y="2591866"/>
+              <a:ext cx="272139" cy="0"/>
+            </a:xfrm>
+            <a:prstGeom prst="straightConnector1">
+              <a:avLst/>
+            </a:prstGeom>
+            <a:ln w="19050">
+              <a:tailEnd type="triangle"/>
+            </a:ln>
+          </p:spPr>
+          <p:style>
+            <a:lnRef idx="1">
+              <a:schemeClr val="dk1"/>
+            </a:lnRef>
+            <a:fillRef idx="0">
+              <a:schemeClr val="dk1"/>
+            </a:fillRef>
+            <a:effectRef idx="0">
+              <a:schemeClr val="dk1"/>
+            </a:effectRef>
+            <a:fontRef idx="minor">
+              <a:schemeClr val="tx1"/>
+            </a:fontRef>
+          </p:style>
+        </p:cxnSp>
+        <p:sp>
+          <p:nvSpPr>
+            <p:cNvPr id="39" name="矩形: 圆角 38">
+              <a:extLst>
+                <a:ext uri="{FF2B5EF4-FFF2-40B4-BE49-F238E27FC236}">
+                  <a16:creationId xmlns:a16="http://schemas.microsoft.com/office/drawing/2014/main" id="{D9B7ED35-30B6-56DF-CFBA-B7DA55D4428A}"/>
+                </a:ext>
+              </a:extLst>
+            </p:cNvPr>
+            <p:cNvSpPr/>
+            <p:nvPr/>
+          </p:nvSpPr>
+          <p:spPr>
+            <a:xfrm rot="10800000">
+              <a:off x="4268093" y="2014923"/>
+              <a:ext cx="391885" cy="1153886"/>
+            </a:xfrm>
+            <a:prstGeom prst="roundRect">
+              <a:avLst/>
+            </a:prstGeom>
+            <a:solidFill>
+              <a:srgbClr val="F4D35E"/>
+            </a:solidFill>
+            <a:ln w="19050">
+              <a:solidFill>
+                <a:schemeClr val="tx1"/>
+              </a:solidFill>
+            </a:ln>
+          </p:spPr>
+          <p:style>
+            <a:lnRef idx="2">
+              <a:schemeClr val="accent1">
+                <a:shade val="15000"/>
+              </a:schemeClr>
+            </a:lnRef>
+            <a:fillRef idx="1">
+              <a:schemeClr val="accent1"/>
+            </a:fillRef>
+            <a:effectRef idx="0">
+              <a:schemeClr val="accent1"/>
+            </a:effectRef>
+            <a:fontRef idx="minor">
+              <a:schemeClr val="lt1"/>
+            </a:fontRef>
+          </p:style>
+          <p:txBody>
+            <a:bodyPr vert="eaVert" rtlCol="0" anchor="ctr"/>
+            <a:lstStyle/>
+            <a:p>
+              <a:pPr algn="ctr"/>
+              <a:r>
+                <a:rPr lang="en-US" altLang="zh-CN" sz="1100" dirty="0">
+                  <a:solidFill>
+                    <a:schemeClr val="tx1"/>
+                  </a:solidFill>
+                </a:rPr>
+                <a:t>Average Pool</a:t>
+              </a:r>
+              <a:endParaRPr lang="zh-CN" altLang="en-US" sz="1100" dirty="0">
+                <a:solidFill>
+                  <a:schemeClr val="tx1"/>
+                </a:solidFill>
+              </a:endParaRPr>
+            </a:p>
+          </p:txBody>
+        </p:sp>
+        <p:sp>
+          <p:nvSpPr>
+            <p:cNvPr id="40" name="矩形: 圆角 39">
+              <a:extLst>
+                <a:ext uri="{FF2B5EF4-FFF2-40B4-BE49-F238E27FC236}">
+                  <a16:creationId xmlns:a16="http://schemas.microsoft.com/office/drawing/2014/main" id="{B808BBCD-0737-191B-F393-3F4D83B5CA62}"/>
+                </a:ext>
+              </a:extLst>
+            </p:cNvPr>
+            <p:cNvSpPr/>
+            <p:nvPr/>
+          </p:nvSpPr>
+          <p:spPr>
+            <a:xfrm rot="10800000">
+              <a:off x="4932117" y="2014923"/>
+              <a:ext cx="391885" cy="1153886"/>
+            </a:xfrm>
+            <a:prstGeom prst="roundRect">
+              <a:avLst/>
+            </a:prstGeom>
+            <a:solidFill>
+              <a:srgbClr val="FAF0CA"/>
+            </a:solidFill>
+            <a:ln w="19050">
+              <a:solidFill>
+                <a:schemeClr val="tx1"/>
+              </a:solidFill>
+            </a:ln>
+          </p:spPr>
+          <p:style>
+            <a:lnRef idx="2">
+              <a:schemeClr val="accent1">
+                <a:shade val="15000"/>
+              </a:schemeClr>
+            </a:lnRef>
+            <a:fillRef idx="1">
+              <a:schemeClr val="accent1"/>
+            </a:fillRef>
+            <a:effectRef idx="0">
+              <a:schemeClr val="accent1"/>
+            </a:effectRef>
+            <a:fontRef idx="minor">
+              <a:schemeClr val="lt1"/>
+            </a:fontRef>
+          </p:style>
+          <p:txBody>
+            <a:bodyPr vert="eaVert" rtlCol="0" anchor="ctr"/>
+            <a:lstStyle/>
+            <a:p>
+              <a:pPr algn="ctr"/>
+              <a:r>
+                <a:rPr lang="en-US" altLang="zh-CN" sz="1100" dirty="0">
+                  <a:solidFill>
+                    <a:schemeClr val="tx1"/>
+                  </a:solidFill>
+                </a:rPr>
+                <a:t>ResBlock</a:t>
+              </a:r>
+              <a:endParaRPr lang="zh-CN" altLang="en-US" sz="1100" dirty="0">
+                <a:solidFill>
+                  <a:schemeClr val="tx1"/>
+                </a:solidFill>
+              </a:endParaRPr>
+            </a:p>
+          </p:txBody>
+        </p:sp>
+        <p:cxnSp>
+          <p:nvCxnSpPr>
+            <p:cNvPr id="41" name="直接箭头连接符 40">
+              <a:extLst>
+                <a:ext uri="{FF2B5EF4-FFF2-40B4-BE49-F238E27FC236}">
+                  <a16:creationId xmlns:a16="http://schemas.microsoft.com/office/drawing/2014/main" id="{EF3F04CB-5BF9-631A-6C40-E1E3BEAE0E8F}"/>
+                </a:ext>
+              </a:extLst>
+            </p:cNvPr>
+            <p:cNvCxnSpPr>
+              <a:cxnSpLocks/>
+              <a:stCxn id="42" idx="1"/>
+              <a:endCxn id="43" idx="3"/>
+            </p:cNvCxnSpPr>
+            <p:nvPr/>
+          </p:nvCxnSpPr>
+          <p:spPr>
+            <a:xfrm>
+              <a:off x="5976235" y="2848107"/>
+              <a:ext cx="272138" cy="0"/>
+            </a:xfrm>
+            <a:prstGeom prst="straightConnector1">
+              <a:avLst/>
+            </a:prstGeom>
+            <a:ln w="19050">
+              <a:tailEnd type="triangle"/>
+            </a:ln>
+          </p:spPr>
+          <p:style>
+            <a:lnRef idx="1">
+              <a:schemeClr val="dk1"/>
+            </a:lnRef>
+            <a:fillRef idx="0">
+              <a:schemeClr val="dk1"/>
+            </a:fillRef>
+            <a:effectRef idx="0">
+              <a:schemeClr val="dk1"/>
+            </a:effectRef>
+            <a:fontRef idx="minor">
+              <a:schemeClr val="tx1"/>
+            </a:fontRef>
+          </p:style>
+        </p:cxnSp>
+        <p:sp>
+          <p:nvSpPr>
+            <p:cNvPr id="42" name="矩形: 圆角 41">
+              <a:extLst>
+                <a:ext uri="{FF2B5EF4-FFF2-40B4-BE49-F238E27FC236}">
+                  <a16:creationId xmlns:a16="http://schemas.microsoft.com/office/drawing/2014/main" id="{33F1DBD0-B93B-C994-D1CE-D6CB7CE73BB5}"/>
+                </a:ext>
+              </a:extLst>
+            </p:cNvPr>
+            <p:cNvSpPr/>
+            <p:nvPr/>
+          </p:nvSpPr>
+          <p:spPr>
+            <a:xfrm rot="10800000">
+              <a:off x="5584350" y="2271164"/>
+              <a:ext cx="391885" cy="1153886"/>
+            </a:xfrm>
+            <a:prstGeom prst="roundRect">
+              <a:avLst/>
+            </a:prstGeom>
+            <a:solidFill>
+              <a:srgbClr val="F4D35E"/>
+            </a:solidFill>
+            <a:ln w="19050">
+              <a:solidFill>
+                <a:schemeClr val="tx1"/>
+              </a:solidFill>
+            </a:ln>
+          </p:spPr>
+          <p:style>
+            <a:lnRef idx="2">
+              <a:schemeClr val="accent1">
+                <a:shade val="15000"/>
+              </a:schemeClr>
+            </a:lnRef>
+            <a:fillRef idx="1">
+              <a:schemeClr val="accent1"/>
+            </a:fillRef>
+            <a:effectRef idx="0">
+              <a:schemeClr val="accent1"/>
+            </a:effectRef>
+            <a:fontRef idx="minor">
+              <a:schemeClr val="lt1"/>
+            </a:fontRef>
+          </p:style>
+          <p:txBody>
+            <a:bodyPr vert="eaVert" rtlCol="0" anchor="ctr"/>
+            <a:lstStyle/>
+            <a:p>
+              <a:pPr algn="ctr"/>
+              <a:r>
+                <a:rPr lang="en-US" altLang="zh-CN" sz="1100" dirty="0">
+                  <a:solidFill>
+                    <a:schemeClr val="tx1"/>
+                  </a:solidFill>
+                </a:rPr>
+                <a:t>Average Pool</a:t>
+              </a:r>
+              <a:endParaRPr lang="zh-CN" altLang="en-US" sz="1100" dirty="0">
+                <a:solidFill>
+                  <a:schemeClr val="tx1"/>
+                </a:solidFill>
+              </a:endParaRPr>
+            </a:p>
+          </p:txBody>
+        </p:sp>
+        <p:sp>
+          <p:nvSpPr>
+            <p:cNvPr id="43" name="矩形: 圆角 42">
+              <a:extLst>
+                <a:ext uri="{FF2B5EF4-FFF2-40B4-BE49-F238E27FC236}">
+                  <a16:creationId xmlns:a16="http://schemas.microsoft.com/office/drawing/2014/main" id="{6DD81077-838F-00E4-FB09-EA112306A912}"/>
+                </a:ext>
+              </a:extLst>
+            </p:cNvPr>
+            <p:cNvSpPr/>
+            <p:nvPr/>
+          </p:nvSpPr>
+          <p:spPr>
+            <a:xfrm rot="10800000">
+              <a:off x="6248373" y="2271164"/>
+              <a:ext cx="550159" cy="1153886"/>
+            </a:xfrm>
+            <a:prstGeom prst="roundRect">
+              <a:avLst/>
+            </a:prstGeom>
+            <a:solidFill>
+              <a:srgbClr val="FAF0CA"/>
+            </a:solidFill>
+            <a:ln w="19050">
+              <a:solidFill>
+                <a:schemeClr val="tx1"/>
+              </a:solidFill>
+            </a:ln>
+          </p:spPr>
+          <p:style>
+            <a:lnRef idx="2">
+              <a:schemeClr val="accent1">
+                <a:shade val="15000"/>
+              </a:schemeClr>
+            </a:lnRef>
+            <a:fillRef idx="1">
+              <a:schemeClr val="accent1"/>
+            </a:fillRef>
+            <a:effectRef idx="0">
+              <a:schemeClr val="accent1"/>
+            </a:effectRef>
+            <a:fontRef idx="minor">
+              <a:schemeClr val="lt1"/>
+            </a:fontRef>
+          </p:style>
+          <p:txBody>
+            <a:bodyPr vert="eaVert" rtlCol="0" anchor="ctr"/>
+            <a:lstStyle/>
+            <a:p>
+              <a:pPr algn="ctr"/>
+              <a:r>
+                <a:rPr lang="en-US" altLang="zh-CN" sz="1100" dirty="0">
+                  <a:solidFill>
+                    <a:schemeClr val="tx1"/>
+                  </a:solidFill>
+                </a:rPr>
+                <a:t>ResBlock</a:t>
+              </a:r>
+            </a:p>
+            <a:p>
+              <a:pPr algn="ctr"/>
+              <a:r>
+                <a:rPr lang="en-US" altLang="zh-CN" sz="1100" dirty="0">
+                  <a:solidFill>
+                    <a:schemeClr val="tx1"/>
+                  </a:solidFill>
+                </a:rPr>
+                <a:t>SelfAttention</a:t>
+              </a:r>
+              <a:endParaRPr lang="zh-CN" altLang="en-US" sz="1100" dirty="0">
+                <a:solidFill>
+                  <a:schemeClr val="tx1"/>
+                </a:solidFill>
+              </a:endParaRPr>
+            </a:p>
+          </p:txBody>
+        </p:sp>
+        <p:sp>
+          <p:nvSpPr>
+            <p:cNvPr id="44" name="文本框 43">
+              <a:extLst>
+                <a:ext uri="{FF2B5EF4-FFF2-40B4-BE49-F238E27FC236}">
+                  <a16:creationId xmlns:a16="http://schemas.microsoft.com/office/drawing/2014/main" id="{50CB4056-5C0C-3307-3639-01CB18CA3F87}"/>
+                </a:ext>
+              </a:extLst>
+            </p:cNvPr>
+            <p:cNvSpPr txBox="1"/>
+            <p:nvPr/>
+          </p:nvSpPr>
+          <p:spPr>
+            <a:xfrm>
+              <a:off x="4232707" y="3194804"/>
+              <a:ext cx="1079500" cy="430887"/>
+            </a:xfrm>
+            <a:prstGeom prst="rect">
+              <a:avLst/>
+            </a:prstGeom>
+            <a:noFill/>
+          </p:spPr>
+          <p:txBody>
+            <a:bodyPr wrap="square" rtlCol="0">
+              <a:spAutoFit/>
+            </a:bodyPr>
+            <a:lstStyle/>
+            <a:p>
+              <a:pPr algn="ctr"/>
+              <a:r>
+                <a:rPr lang="en-US" altLang="zh-CN" sz="1100" dirty="0"/>
+                <a:t>Down 3</a:t>
+              </a:r>
+            </a:p>
+            <a:p>
+              <a:pPr algn="ctr"/>
+              <a:r>
+                <a:rPr lang="en-US" altLang="zh-CN" sz="1100" dirty="0"/>
+                <a:t>(64 × 64)</a:t>
+              </a:r>
+              <a:endParaRPr lang="zh-CN" altLang="en-US" sz="1100" dirty="0"/>
+            </a:p>
+          </p:txBody>
+        </p:sp>
+        <p:sp>
+          <p:nvSpPr>
+            <p:cNvPr id="45" name="文本框 44">
+              <a:extLst>
+                <a:ext uri="{FF2B5EF4-FFF2-40B4-BE49-F238E27FC236}">
+                  <a16:creationId xmlns:a16="http://schemas.microsoft.com/office/drawing/2014/main" id="{D8170A3B-EE96-DB3A-5C1C-AAA4268027ED}"/>
+                </a:ext>
+              </a:extLst>
+            </p:cNvPr>
+            <p:cNvSpPr txBox="1"/>
+            <p:nvPr/>
+          </p:nvSpPr>
+          <p:spPr>
+            <a:xfrm>
+              <a:off x="5548962" y="3571106"/>
+              <a:ext cx="1079500" cy="430887"/>
+            </a:xfrm>
+            <a:prstGeom prst="rect">
+              <a:avLst/>
+            </a:prstGeom>
+            <a:noFill/>
+          </p:spPr>
+          <p:txBody>
+            <a:bodyPr wrap="square" rtlCol="0">
+              <a:spAutoFit/>
+            </a:bodyPr>
+            <a:lstStyle/>
+            <a:p>
+              <a:pPr algn="ctr"/>
+              <a:r>
+                <a:rPr lang="en-US" altLang="zh-CN" sz="1100" dirty="0"/>
+                <a:t>Down 4</a:t>
+              </a:r>
+            </a:p>
+            <a:p>
+              <a:pPr algn="ctr"/>
+              <a:r>
+                <a:rPr lang="en-US" altLang="zh-CN" sz="1100" dirty="0"/>
+                <a:t>(32 × 32)</a:t>
+              </a:r>
+              <a:endParaRPr lang="zh-CN" altLang="en-US" sz="1100" dirty="0"/>
+            </a:p>
+          </p:txBody>
+        </p:sp>
+        <p:sp>
+          <p:nvSpPr>
+            <p:cNvPr id="46" name="文本框 45">
+              <a:extLst>
+                <a:ext uri="{FF2B5EF4-FFF2-40B4-BE49-F238E27FC236}">
+                  <a16:creationId xmlns:a16="http://schemas.microsoft.com/office/drawing/2014/main" id="{2EA4F35F-D1BC-A59C-A406-85725145C5DE}"/>
+                </a:ext>
+              </a:extLst>
+            </p:cNvPr>
+            <p:cNvSpPr txBox="1"/>
+            <p:nvPr/>
+          </p:nvSpPr>
+          <p:spPr>
+            <a:xfrm>
+              <a:off x="5062290" y="1769344"/>
+              <a:ext cx="391886" cy="261610"/>
+            </a:xfrm>
+            <a:prstGeom prst="rect">
+              <a:avLst/>
+            </a:prstGeom>
+            <a:noFill/>
+          </p:spPr>
+          <p:txBody>
+            <a:bodyPr wrap="square" rtlCol="0">
+              <a:spAutoFit/>
+            </a:bodyPr>
+            <a:lstStyle/>
+            <a:p>
+              <a:pPr algn="ctr"/>
+              <a:r>
+                <a:rPr lang="en-US" altLang="zh-CN" sz="1100" b="1" dirty="0"/>
+                <a:t>×2</a:t>
+              </a:r>
+              <a:endParaRPr lang="zh-CN" altLang="en-US" sz="1100" b="1" dirty="0"/>
+            </a:p>
+          </p:txBody>
+        </p:sp>
+        <p:sp>
+          <p:nvSpPr>
+            <p:cNvPr id="47" name="文本框 46">
+              <a:extLst>
+                <a:ext uri="{FF2B5EF4-FFF2-40B4-BE49-F238E27FC236}">
+                  <a16:creationId xmlns:a16="http://schemas.microsoft.com/office/drawing/2014/main" id="{1773BFD5-5DD3-5ED4-FC0D-20CCF3077348}"/>
+                </a:ext>
+              </a:extLst>
+            </p:cNvPr>
+            <p:cNvSpPr txBox="1"/>
+            <p:nvPr/>
+          </p:nvSpPr>
+          <p:spPr>
+            <a:xfrm>
+              <a:off x="6564024" y="2009553"/>
+              <a:ext cx="391886" cy="261610"/>
+            </a:xfrm>
+            <a:prstGeom prst="rect">
+              <a:avLst/>
+            </a:prstGeom>
+            <a:noFill/>
+          </p:spPr>
+          <p:txBody>
+            <a:bodyPr wrap="square" rtlCol="0">
+              <a:spAutoFit/>
+            </a:bodyPr>
+            <a:lstStyle/>
+            <a:p>
+              <a:pPr algn="ctr"/>
+              <a:r>
+                <a:rPr lang="en-US" altLang="zh-CN" sz="1100" b="1" dirty="0"/>
+                <a:t>×2</a:t>
+              </a:r>
+              <a:endParaRPr lang="zh-CN" altLang="en-US" sz="1100" b="1" dirty="0"/>
+            </a:p>
+          </p:txBody>
+        </p:sp>
+        <p:cxnSp>
+          <p:nvCxnSpPr>
+            <p:cNvPr id="48" name="直接箭头连接符 47">
+              <a:extLst>
+                <a:ext uri="{FF2B5EF4-FFF2-40B4-BE49-F238E27FC236}">
+                  <a16:creationId xmlns:a16="http://schemas.microsoft.com/office/drawing/2014/main" id="{56720C96-B4EF-970E-4CA1-9D5858E73AA2}"/>
+                </a:ext>
+              </a:extLst>
+            </p:cNvPr>
+            <p:cNvCxnSpPr>
+              <a:cxnSpLocks/>
+            </p:cNvCxnSpPr>
+            <p:nvPr/>
+          </p:nvCxnSpPr>
+          <p:spPr>
+            <a:xfrm>
+              <a:off x="3995950" y="2422940"/>
+              <a:ext cx="272143" cy="0"/>
+            </a:xfrm>
+            <a:prstGeom prst="straightConnector1">
+              <a:avLst/>
+            </a:prstGeom>
+            <a:ln w="19050">
+              <a:tailEnd type="triangle"/>
+            </a:ln>
+          </p:spPr>
+          <p:style>
+            <a:lnRef idx="1">
+              <a:schemeClr val="dk1"/>
+            </a:lnRef>
+            <a:fillRef idx="0">
+              <a:schemeClr val="dk1"/>
+            </a:fillRef>
+            <a:effectRef idx="0">
+              <a:schemeClr val="dk1"/>
+            </a:effectRef>
+            <a:fontRef idx="minor">
+              <a:schemeClr val="tx1"/>
+            </a:fontRef>
+          </p:style>
+        </p:cxnSp>
+        <p:cxnSp>
+          <p:nvCxnSpPr>
+            <p:cNvPr id="49" name="直接箭头连接符 48">
+              <a:extLst>
+                <a:ext uri="{FF2B5EF4-FFF2-40B4-BE49-F238E27FC236}">
+                  <a16:creationId xmlns:a16="http://schemas.microsoft.com/office/drawing/2014/main" id="{9EDD2077-4946-934C-8A02-488B2B5E84A0}"/>
+                </a:ext>
+              </a:extLst>
+            </p:cNvPr>
+            <p:cNvCxnSpPr>
+              <a:cxnSpLocks/>
+            </p:cNvCxnSpPr>
+            <p:nvPr/>
+          </p:nvCxnSpPr>
+          <p:spPr>
+            <a:xfrm>
+              <a:off x="5324002" y="2703937"/>
+              <a:ext cx="272143" cy="0"/>
+            </a:xfrm>
+            <a:prstGeom prst="straightConnector1">
+              <a:avLst/>
+            </a:prstGeom>
+            <a:ln w="19050">
+              <a:tailEnd type="triangle"/>
+            </a:ln>
+          </p:spPr>
+          <p:style>
+            <a:lnRef idx="1">
+              <a:schemeClr val="dk1"/>
+            </a:lnRef>
+            <a:fillRef idx="0">
+              <a:schemeClr val="dk1"/>
+            </a:fillRef>
+            <a:effectRef idx="0">
+              <a:schemeClr val="dk1"/>
+            </a:effectRef>
+            <a:fontRef idx="minor">
+              <a:schemeClr val="tx1"/>
+            </a:fontRef>
+          </p:style>
+        </p:cxnSp>
+        <p:cxnSp>
+          <p:nvCxnSpPr>
+            <p:cNvPr id="51" name="直接箭头连接符 50">
+              <a:extLst>
+                <a:ext uri="{FF2B5EF4-FFF2-40B4-BE49-F238E27FC236}">
+                  <a16:creationId xmlns:a16="http://schemas.microsoft.com/office/drawing/2014/main" id="{E55C9414-D4C4-54A1-C0CE-6D01E1218001}"/>
+                </a:ext>
+              </a:extLst>
+            </p:cNvPr>
+            <p:cNvCxnSpPr>
+              <a:cxnSpLocks/>
+              <a:stCxn id="52" idx="1"/>
+              <a:endCxn id="53" idx="3"/>
+            </p:cNvCxnSpPr>
+            <p:nvPr/>
+          </p:nvCxnSpPr>
+          <p:spPr>
+            <a:xfrm>
+              <a:off x="7446642" y="3048748"/>
+              <a:ext cx="272138" cy="0"/>
+            </a:xfrm>
+            <a:prstGeom prst="straightConnector1">
+              <a:avLst/>
+            </a:prstGeom>
+            <a:ln w="19050">
+              <a:tailEnd type="triangle"/>
+            </a:ln>
+          </p:spPr>
+          <p:style>
+            <a:lnRef idx="1">
+              <a:schemeClr val="dk1"/>
+            </a:lnRef>
+            <a:fillRef idx="0">
+              <a:schemeClr val="dk1"/>
+            </a:fillRef>
+            <a:effectRef idx="0">
+              <a:schemeClr val="dk1"/>
+            </a:effectRef>
+            <a:fontRef idx="minor">
+              <a:schemeClr val="tx1"/>
+            </a:fontRef>
+          </p:style>
+        </p:cxnSp>
+        <p:sp>
+          <p:nvSpPr>
+            <p:cNvPr id="52" name="矩形: 圆角 51">
+              <a:extLst>
+                <a:ext uri="{FF2B5EF4-FFF2-40B4-BE49-F238E27FC236}">
+                  <a16:creationId xmlns:a16="http://schemas.microsoft.com/office/drawing/2014/main" id="{E74B277A-69EC-3E2D-6DB7-54FABA607CF3}"/>
+                </a:ext>
+              </a:extLst>
+            </p:cNvPr>
+            <p:cNvSpPr/>
+            <p:nvPr/>
+          </p:nvSpPr>
+          <p:spPr>
+            <a:xfrm rot="10800000">
+              <a:off x="7054757" y="2471805"/>
+              <a:ext cx="391885" cy="1153886"/>
+            </a:xfrm>
+            <a:prstGeom prst="roundRect">
+              <a:avLst/>
+            </a:prstGeom>
+            <a:solidFill>
+              <a:srgbClr val="F4D35E"/>
+            </a:solidFill>
+            <a:ln w="19050">
+              <a:solidFill>
+                <a:schemeClr val="tx1"/>
+              </a:solidFill>
+            </a:ln>
+          </p:spPr>
+          <p:style>
+            <a:lnRef idx="2">
+              <a:schemeClr val="accent1">
+                <a:shade val="15000"/>
+              </a:schemeClr>
+            </a:lnRef>
+            <a:fillRef idx="1">
+              <a:schemeClr val="accent1"/>
+            </a:fillRef>
+            <a:effectRef idx="0">
+              <a:schemeClr val="accent1"/>
+            </a:effectRef>
+            <a:fontRef idx="minor">
+              <a:schemeClr val="lt1"/>
+            </a:fontRef>
+          </p:style>
+          <p:txBody>
+            <a:bodyPr vert="eaVert" rtlCol="0" anchor="ctr"/>
+            <a:lstStyle/>
+            <a:p>
+              <a:pPr algn="ctr"/>
+              <a:r>
+                <a:rPr lang="en-US" altLang="zh-CN" sz="1100" dirty="0">
+                  <a:solidFill>
+                    <a:schemeClr val="tx1"/>
+                  </a:solidFill>
+                </a:rPr>
+                <a:t>Average Pool</a:t>
+              </a:r>
+              <a:endParaRPr lang="zh-CN" altLang="en-US" sz="1100" dirty="0">
+                <a:solidFill>
+                  <a:schemeClr val="tx1"/>
+                </a:solidFill>
+              </a:endParaRPr>
+            </a:p>
+          </p:txBody>
+        </p:sp>
+        <p:sp>
+          <p:nvSpPr>
+            <p:cNvPr id="53" name="矩形: 圆角 52">
+              <a:extLst>
+                <a:ext uri="{FF2B5EF4-FFF2-40B4-BE49-F238E27FC236}">
+                  <a16:creationId xmlns:a16="http://schemas.microsoft.com/office/drawing/2014/main" id="{9E92D5F7-81C0-D7DF-22B3-7B834845F433}"/>
+                </a:ext>
+              </a:extLst>
+            </p:cNvPr>
+            <p:cNvSpPr/>
+            <p:nvPr/>
+          </p:nvSpPr>
+          <p:spPr>
+            <a:xfrm rot="10800000">
+              <a:off x="7718780" y="2471805"/>
+              <a:ext cx="550159" cy="1153886"/>
+            </a:xfrm>
+            <a:prstGeom prst="roundRect">
+              <a:avLst/>
+            </a:prstGeom>
+            <a:solidFill>
+              <a:srgbClr val="FAF0CA"/>
+            </a:solidFill>
+            <a:ln w="19050">
+              <a:solidFill>
+                <a:schemeClr val="tx1"/>
+              </a:solidFill>
+            </a:ln>
+          </p:spPr>
+          <p:style>
+            <a:lnRef idx="2">
+              <a:schemeClr val="accent1">
+                <a:shade val="15000"/>
+              </a:schemeClr>
+            </a:lnRef>
+            <a:fillRef idx="1">
+              <a:schemeClr val="accent1"/>
+            </a:fillRef>
+            <a:effectRef idx="0">
+              <a:schemeClr val="accent1"/>
+            </a:effectRef>
+            <a:fontRef idx="minor">
+              <a:schemeClr val="lt1"/>
+            </a:fontRef>
+          </p:style>
+          <p:txBody>
+            <a:bodyPr vert="eaVert" rtlCol="0" anchor="ctr"/>
+            <a:lstStyle/>
+            <a:p>
+              <a:pPr algn="ctr"/>
+              <a:r>
+                <a:rPr lang="en-US" altLang="zh-CN" sz="1100" dirty="0">
+                  <a:solidFill>
+                    <a:schemeClr val="tx1"/>
+                  </a:solidFill>
+                </a:rPr>
+                <a:t>ResBlock</a:t>
+              </a:r>
+            </a:p>
+            <a:p>
+              <a:pPr algn="ctr"/>
+              <a:r>
+                <a:rPr lang="en-US" altLang="zh-CN" sz="1100" dirty="0">
+                  <a:solidFill>
+                    <a:schemeClr val="tx1"/>
+                  </a:solidFill>
+                </a:rPr>
+                <a:t>SelfAttention</a:t>
+              </a:r>
+              <a:endParaRPr lang="zh-CN" altLang="en-US" sz="1100" dirty="0">
+                <a:solidFill>
+                  <a:schemeClr val="tx1"/>
+                </a:solidFill>
+              </a:endParaRPr>
+            </a:p>
+          </p:txBody>
+        </p:sp>
+        <p:sp>
+          <p:nvSpPr>
+            <p:cNvPr id="54" name="文本框 53">
+              <a:extLst>
+                <a:ext uri="{FF2B5EF4-FFF2-40B4-BE49-F238E27FC236}">
+                  <a16:creationId xmlns:a16="http://schemas.microsoft.com/office/drawing/2014/main" id="{103868A1-A9A1-EBDE-7517-64CD55CF577E}"/>
+                </a:ext>
+              </a:extLst>
+            </p:cNvPr>
+            <p:cNvSpPr txBox="1"/>
+            <p:nvPr/>
+          </p:nvSpPr>
+          <p:spPr>
+            <a:xfrm>
+              <a:off x="8034431" y="2210194"/>
+              <a:ext cx="391886" cy="261610"/>
+            </a:xfrm>
+            <a:prstGeom prst="rect">
+              <a:avLst/>
+            </a:prstGeom>
+            <a:noFill/>
+          </p:spPr>
+          <p:txBody>
+            <a:bodyPr wrap="square" rtlCol="0">
+              <a:spAutoFit/>
+            </a:bodyPr>
+            <a:lstStyle/>
+            <a:p>
+              <a:pPr algn="ctr"/>
+              <a:r>
+                <a:rPr lang="en-US" altLang="zh-CN" sz="1100" b="1" dirty="0"/>
+                <a:t>×2</a:t>
+              </a:r>
+              <a:endParaRPr lang="zh-CN" altLang="en-US" sz="1100" b="1" dirty="0"/>
+            </a:p>
+          </p:txBody>
+        </p:sp>
+        <p:cxnSp>
+          <p:nvCxnSpPr>
+            <p:cNvPr id="55" name="直接箭头连接符 54">
+              <a:extLst>
+                <a:ext uri="{FF2B5EF4-FFF2-40B4-BE49-F238E27FC236}">
+                  <a16:creationId xmlns:a16="http://schemas.microsoft.com/office/drawing/2014/main" id="{CEE110B6-8FDA-888E-C505-8274DD0EDEDD}"/>
+                </a:ext>
+              </a:extLst>
+            </p:cNvPr>
+            <p:cNvCxnSpPr>
+              <a:cxnSpLocks/>
+              <a:stCxn id="56" idx="1"/>
+              <a:endCxn id="57" idx="3"/>
+            </p:cNvCxnSpPr>
+            <p:nvPr/>
+          </p:nvCxnSpPr>
+          <p:spPr>
+            <a:xfrm>
+              <a:off x="8917054" y="3318268"/>
+              <a:ext cx="272138" cy="0"/>
+            </a:xfrm>
+            <a:prstGeom prst="straightConnector1">
+              <a:avLst/>
+            </a:prstGeom>
+            <a:ln w="19050">
+              <a:tailEnd type="triangle"/>
+            </a:ln>
+          </p:spPr>
+          <p:style>
+            <a:lnRef idx="1">
+              <a:schemeClr val="dk1"/>
+            </a:lnRef>
+            <a:fillRef idx="0">
+              <a:schemeClr val="dk1"/>
+            </a:fillRef>
+            <a:effectRef idx="0">
+              <a:schemeClr val="dk1"/>
+            </a:effectRef>
+            <a:fontRef idx="minor">
+              <a:schemeClr val="tx1"/>
+            </a:fontRef>
+          </p:style>
+        </p:cxnSp>
+        <p:sp>
+          <p:nvSpPr>
+            <p:cNvPr id="56" name="矩形: 圆角 55">
+              <a:extLst>
+                <a:ext uri="{FF2B5EF4-FFF2-40B4-BE49-F238E27FC236}">
+                  <a16:creationId xmlns:a16="http://schemas.microsoft.com/office/drawing/2014/main" id="{08EA992A-059A-0CD3-F54E-65BAAF813FF7}"/>
+                </a:ext>
+              </a:extLst>
+            </p:cNvPr>
+            <p:cNvSpPr/>
+            <p:nvPr/>
+          </p:nvSpPr>
+          <p:spPr>
+            <a:xfrm rot="10800000">
+              <a:off x="8525169" y="2741325"/>
+              <a:ext cx="391885" cy="1153886"/>
+            </a:xfrm>
+            <a:prstGeom prst="roundRect">
+              <a:avLst/>
+            </a:prstGeom>
+            <a:solidFill>
+              <a:srgbClr val="F4D35E"/>
+            </a:solidFill>
+            <a:ln w="19050">
+              <a:solidFill>
+                <a:schemeClr val="tx1"/>
+              </a:solidFill>
+            </a:ln>
+          </p:spPr>
+          <p:style>
+            <a:lnRef idx="2">
+              <a:schemeClr val="accent1">
+                <a:shade val="15000"/>
+              </a:schemeClr>
+            </a:lnRef>
+            <a:fillRef idx="1">
+              <a:schemeClr val="accent1"/>
+            </a:fillRef>
+            <a:effectRef idx="0">
+              <a:schemeClr val="accent1"/>
+            </a:effectRef>
+            <a:fontRef idx="minor">
+              <a:schemeClr val="lt1"/>
+            </a:fontRef>
+          </p:style>
+          <p:txBody>
+            <a:bodyPr vert="eaVert" rtlCol="0" anchor="ctr"/>
+            <a:lstStyle/>
+            <a:p>
+              <a:pPr algn="ctr"/>
+              <a:r>
+                <a:rPr lang="en-US" altLang="zh-CN" sz="1100" dirty="0">
+                  <a:solidFill>
+                    <a:schemeClr val="tx1"/>
+                  </a:solidFill>
+                </a:rPr>
+                <a:t>Average Pool</a:t>
+              </a:r>
+              <a:endParaRPr lang="zh-CN" altLang="en-US" sz="1100" dirty="0">
+                <a:solidFill>
+                  <a:schemeClr val="tx1"/>
+                </a:solidFill>
+              </a:endParaRPr>
+            </a:p>
+          </p:txBody>
+        </p:sp>
+        <p:sp>
+          <p:nvSpPr>
+            <p:cNvPr id="57" name="矩形: 圆角 56">
+              <a:extLst>
+                <a:ext uri="{FF2B5EF4-FFF2-40B4-BE49-F238E27FC236}">
+                  <a16:creationId xmlns:a16="http://schemas.microsoft.com/office/drawing/2014/main" id="{A6ADC732-837A-0900-8575-F3FBFA34FF29}"/>
+                </a:ext>
+              </a:extLst>
+            </p:cNvPr>
+            <p:cNvSpPr/>
+            <p:nvPr/>
+          </p:nvSpPr>
+          <p:spPr>
+            <a:xfrm rot="10800000">
+              <a:off x="9189192" y="2741325"/>
+              <a:ext cx="550159" cy="1153886"/>
+            </a:xfrm>
+            <a:prstGeom prst="roundRect">
+              <a:avLst/>
+            </a:prstGeom>
+            <a:solidFill>
+              <a:srgbClr val="FAF0CA"/>
+            </a:solidFill>
+            <a:ln w="19050">
+              <a:solidFill>
+                <a:schemeClr val="tx1"/>
+              </a:solidFill>
+            </a:ln>
+          </p:spPr>
+          <p:style>
+            <a:lnRef idx="2">
+              <a:schemeClr val="accent1">
+                <a:shade val="15000"/>
+              </a:schemeClr>
+            </a:lnRef>
+            <a:fillRef idx="1">
+              <a:schemeClr val="accent1"/>
+            </a:fillRef>
+            <a:effectRef idx="0">
+              <a:schemeClr val="accent1"/>
+            </a:effectRef>
+            <a:fontRef idx="minor">
+              <a:schemeClr val="lt1"/>
+            </a:fontRef>
+          </p:style>
+          <p:txBody>
+            <a:bodyPr vert="eaVert" rtlCol="0" anchor="ctr"/>
+            <a:lstStyle/>
+            <a:p>
+              <a:pPr algn="ctr"/>
+              <a:r>
+                <a:rPr lang="en-US" altLang="zh-CN" sz="1100" dirty="0">
+                  <a:solidFill>
+                    <a:schemeClr val="tx1"/>
+                  </a:solidFill>
+                </a:rPr>
+                <a:t>ResBlock</a:t>
+              </a:r>
+            </a:p>
+            <a:p>
+              <a:pPr algn="ctr"/>
+              <a:r>
+                <a:rPr lang="en-US" altLang="zh-CN" sz="1100" dirty="0">
+                  <a:solidFill>
+                    <a:schemeClr val="tx1"/>
+                  </a:solidFill>
+                </a:rPr>
+                <a:t>SelfAttention</a:t>
+              </a:r>
+              <a:endParaRPr lang="zh-CN" altLang="en-US" sz="1100" dirty="0">
+                <a:solidFill>
+                  <a:schemeClr val="tx1"/>
+                </a:solidFill>
+              </a:endParaRPr>
+            </a:p>
+          </p:txBody>
+        </p:sp>
+        <p:sp>
+          <p:nvSpPr>
+            <p:cNvPr id="58" name="文本框 57">
+              <a:extLst>
+                <a:ext uri="{FF2B5EF4-FFF2-40B4-BE49-F238E27FC236}">
+                  <a16:creationId xmlns:a16="http://schemas.microsoft.com/office/drawing/2014/main" id="{7DE8C306-550C-A113-AE86-49A72E433B6B}"/>
+                </a:ext>
+              </a:extLst>
+            </p:cNvPr>
+            <p:cNvSpPr txBox="1"/>
+            <p:nvPr/>
+          </p:nvSpPr>
+          <p:spPr>
+            <a:xfrm>
+              <a:off x="9504843" y="2479714"/>
+              <a:ext cx="391886" cy="261610"/>
+            </a:xfrm>
+            <a:prstGeom prst="rect">
+              <a:avLst/>
+            </a:prstGeom>
+            <a:noFill/>
+          </p:spPr>
+          <p:txBody>
+            <a:bodyPr wrap="square" rtlCol="0">
+              <a:spAutoFit/>
+            </a:bodyPr>
+            <a:lstStyle/>
+            <a:p>
+              <a:pPr algn="ctr"/>
+              <a:r>
+                <a:rPr lang="en-US" altLang="zh-CN" sz="1100" b="1" dirty="0"/>
+                <a:t>×2</a:t>
+              </a:r>
+              <a:endParaRPr lang="zh-CN" altLang="en-US" sz="1100" b="1" dirty="0"/>
+            </a:p>
+          </p:txBody>
+        </p:sp>
+        <p:sp>
+          <p:nvSpPr>
+            <p:cNvPr id="59" name="文本框 58">
+              <a:extLst>
+                <a:ext uri="{FF2B5EF4-FFF2-40B4-BE49-F238E27FC236}">
+                  <a16:creationId xmlns:a16="http://schemas.microsoft.com/office/drawing/2014/main" id="{403CFA62-1D48-5D23-5300-67C07182DE90}"/>
+                </a:ext>
+              </a:extLst>
+            </p:cNvPr>
+            <p:cNvSpPr txBox="1"/>
+            <p:nvPr/>
+          </p:nvSpPr>
+          <p:spPr>
+            <a:xfrm>
+              <a:off x="7031170" y="3679767"/>
+              <a:ext cx="1079500" cy="430887"/>
+            </a:xfrm>
+            <a:prstGeom prst="rect">
+              <a:avLst/>
+            </a:prstGeom>
+            <a:noFill/>
+          </p:spPr>
+          <p:txBody>
+            <a:bodyPr wrap="square" rtlCol="0">
+              <a:spAutoFit/>
+            </a:bodyPr>
+            <a:lstStyle/>
+            <a:p>
+              <a:pPr algn="ctr"/>
+              <a:r>
+                <a:rPr lang="en-US" altLang="zh-CN" sz="1100" dirty="0"/>
+                <a:t>Down 5</a:t>
+              </a:r>
+            </a:p>
+            <a:p>
+              <a:pPr algn="ctr"/>
+              <a:r>
+                <a:rPr lang="en-US" altLang="zh-CN" sz="1100" dirty="0"/>
+                <a:t>(16 × 16)</a:t>
+              </a:r>
+              <a:endParaRPr lang="zh-CN" altLang="en-US" sz="1100" dirty="0"/>
+            </a:p>
+          </p:txBody>
+        </p:sp>
+        <p:sp>
+          <p:nvSpPr>
+            <p:cNvPr id="60" name="文本框 59">
+              <a:extLst>
+                <a:ext uri="{FF2B5EF4-FFF2-40B4-BE49-F238E27FC236}">
+                  <a16:creationId xmlns:a16="http://schemas.microsoft.com/office/drawing/2014/main" id="{A4F61F37-48AE-E5AE-E2D3-431E298FC901}"/>
+                </a:ext>
+              </a:extLst>
+            </p:cNvPr>
+            <p:cNvSpPr txBox="1"/>
+            <p:nvPr/>
+          </p:nvSpPr>
+          <p:spPr>
+            <a:xfrm>
+              <a:off x="8525169" y="3968238"/>
+              <a:ext cx="1079500" cy="430887"/>
+            </a:xfrm>
+            <a:prstGeom prst="rect">
+              <a:avLst/>
+            </a:prstGeom>
+            <a:noFill/>
+          </p:spPr>
+          <p:txBody>
+            <a:bodyPr wrap="square" rtlCol="0">
+              <a:spAutoFit/>
+            </a:bodyPr>
+            <a:lstStyle/>
+            <a:p>
+              <a:pPr algn="ctr"/>
+              <a:r>
+                <a:rPr lang="en-US" altLang="zh-CN" sz="1100" dirty="0"/>
+                <a:t>Down 6</a:t>
+              </a:r>
+            </a:p>
+            <a:p>
+              <a:pPr algn="ctr"/>
+              <a:r>
+                <a:rPr lang="en-US" altLang="zh-CN" sz="1100" dirty="0"/>
+                <a:t>(8 × 8)</a:t>
+              </a:r>
+              <a:endParaRPr lang="zh-CN" altLang="en-US" sz="1100" dirty="0"/>
+            </a:p>
+          </p:txBody>
+        </p:sp>
+        <p:cxnSp>
+          <p:nvCxnSpPr>
+            <p:cNvPr id="61" name="直接箭头连接符 60">
+              <a:extLst>
+                <a:ext uri="{FF2B5EF4-FFF2-40B4-BE49-F238E27FC236}">
+                  <a16:creationId xmlns:a16="http://schemas.microsoft.com/office/drawing/2014/main" id="{81CFFBE0-E93A-2D2D-9FDD-0EFB99218B82}"/>
+                </a:ext>
+              </a:extLst>
+            </p:cNvPr>
+            <p:cNvCxnSpPr>
+              <a:cxnSpLocks/>
+            </p:cNvCxnSpPr>
+            <p:nvPr/>
+          </p:nvCxnSpPr>
+          <p:spPr>
+            <a:xfrm>
+              <a:off x="6798532" y="2959848"/>
+              <a:ext cx="272143" cy="0"/>
+            </a:xfrm>
+            <a:prstGeom prst="straightConnector1">
+              <a:avLst/>
+            </a:prstGeom>
+            <a:ln w="19050">
+              <a:tailEnd type="triangle"/>
+            </a:ln>
+          </p:spPr>
+          <p:style>
+            <a:lnRef idx="1">
+              <a:schemeClr val="dk1"/>
+            </a:lnRef>
+            <a:fillRef idx="0">
+              <a:schemeClr val="dk1"/>
+            </a:fillRef>
+            <a:effectRef idx="0">
+              <a:schemeClr val="dk1"/>
+            </a:effectRef>
+            <a:fontRef idx="minor">
+              <a:schemeClr val="tx1"/>
+            </a:fontRef>
+          </p:style>
+        </p:cxnSp>
+        <p:cxnSp>
+          <p:nvCxnSpPr>
+            <p:cNvPr id="62" name="直接箭头连接符 61">
+              <a:extLst>
+                <a:ext uri="{FF2B5EF4-FFF2-40B4-BE49-F238E27FC236}">
+                  <a16:creationId xmlns:a16="http://schemas.microsoft.com/office/drawing/2014/main" id="{3FCBB183-AA2C-1904-B892-B5A4F795C53C}"/>
+                </a:ext>
+              </a:extLst>
+            </p:cNvPr>
+            <p:cNvCxnSpPr>
+              <a:cxnSpLocks/>
+            </p:cNvCxnSpPr>
+            <p:nvPr/>
+          </p:nvCxnSpPr>
+          <p:spPr>
+            <a:xfrm>
+              <a:off x="8268473" y="3173031"/>
+              <a:ext cx="272143" cy="0"/>
+            </a:xfrm>
+            <a:prstGeom prst="straightConnector1">
+              <a:avLst/>
+            </a:prstGeom>
+            <a:ln w="19050">
+              <a:tailEnd type="triangle"/>
+            </a:ln>
+          </p:spPr>
+          <p:style>
+            <a:lnRef idx="1">
+              <a:schemeClr val="dk1"/>
+            </a:lnRef>
+            <a:fillRef idx="0">
+              <a:schemeClr val="dk1"/>
+            </a:fillRef>
+            <a:effectRef idx="0">
+              <a:schemeClr val="dk1"/>
+            </a:effectRef>
+            <a:fontRef idx="minor">
+              <a:schemeClr val="tx1"/>
+            </a:fontRef>
+          </p:style>
+        </p:cxnSp>
+      </p:grpSp>
+      <p:grpSp>
+        <p:nvGrpSpPr>
+          <p:cNvPr id="106" name="组合 105">
+            <a:extLst>
+              <a:ext uri="{FF2B5EF4-FFF2-40B4-BE49-F238E27FC236}">
+                <a16:creationId xmlns:a16="http://schemas.microsoft.com/office/drawing/2014/main" id="{C8173D4F-78BD-72C5-CAE3-A648C1D9B747}"/>
+              </a:ext>
+            </a:extLst>
+          </p:cNvPr>
+          <p:cNvGrpSpPr/>
+          <p:nvPr/>
+        </p:nvGrpSpPr>
+        <p:grpSpPr>
+          <a:xfrm>
+            <a:off x="-14012" y="3459448"/>
+            <a:ext cx="9832319" cy="3430026"/>
+            <a:chOff x="-29401" y="3529930"/>
+            <a:chExt cx="9832319" cy="3430026"/>
+          </a:xfrm>
+        </p:grpSpPr>
+        <p:sp>
+          <p:nvSpPr>
+            <p:cNvPr id="65" name="矩形: 圆角 64">
+              <a:extLst>
+                <a:ext uri="{FF2B5EF4-FFF2-40B4-BE49-F238E27FC236}">
+                  <a16:creationId xmlns:a16="http://schemas.microsoft.com/office/drawing/2014/main" id="{87C4E90B-6856-A81C-BA95-5B6757DC9E47}"/>
+                </a:ext>
+              </a:extLst>
+            </p:cNvPr>
+            <p:cNvSpPr/>
+            <p:nvPr/>
+          </p:nvSpPr>
+          <p:spPr>
+            <a:xfrm rot="10800000">
+              <a:off x="118461" y="5582768"/>
+              <a:ext cx="391885" cy="1153886"/>
+            </a:xfrm>
+            <a:prstGeom prst="roundRect">
+              <a:avLst/>
+            </a:prstGeom>
+            <a:solidFill>
+              <a:srgbClr val="EE964B"/>
+            </a:solidFill>
+            <a:ln w="19050">
+              <a:solidFill>
+                <a:schemeClr val="tx1"/>
+              </a:solidFill>
+            </a:ln>
+          </p:spPr>
+          <p:style>
+            <a:lnRef idx="2">
+              <a:schemeClr val="accent1">
+                <a:shade val="15000"/>
+              </a:schemeClr>
+            </a:lnRef>
+            <a:fillRef idx="1">
+              <a:schemeClr val="accent1"/>
+            </a:fillRef>
+            <a:effectRef idx="0">
+              <a:schemeClr val="accent1"/>
+            </a:effectRef>
+            <a:fontRef idx="minor">
+              <a:schemeClr val="lt1"/>
+            </a:fontRef>
+          </p:style>
+          <p:txBody>
+            <a:bodyPr vert="eaVert" rtlCol="0" anchor="ctr"/>
+            <a:lstStyle/>
+            <a:p>
+              <a:pPr algn="ctr"/>
+              <a:r>
+                <a:rPr lang="en-US" altLang="zh-CN" sz="1100" dirty="0">
+                  <a:solidFill>
+                    <a:schemeClr val="tx1"/>
+                  </a:solidFill>
+                </a:rPr>
+                <a:t>Embed Input</a:t>
+              </a:r>
+              <a:endParaRPr lang="zh-CN" altLang="en-US" sz="1100" dirty="0">
+                <a:solidFill>
+                  <a:schemeClr val="tx1"/>
+                </a:solidFill>
+              </a:endParaRPr>
+            </a:p>
+          </p:txBody>
+        </p:sp>
+        <p:sp>
+          <p:nvSpPr>
+            <p:cNvPr id="66" name="矩形: 圆角 65">
+              <a:extLst>
+                <a:ext uri="{FF2B5EF4-FFF2-40B4-BE49-F238E27FC236}">
+                  <a16:creationId xmlns:a16="http://schemas.microsoft.com/office/drawing/2014/main" id="{D997584C-C578-AA31-D9C5-28A5A064582A}"/>
+                </a:ext>
+              </a:extLst>
+            </p:cNvPr>
+            <p:cNvSpPr/>
+            <p:nvPr/>
+          </p:nvSpPr>
+          <p:spPr>
+            <a:xfrm rot="10800000">
+              <a:off x="782489" y="5582768"/>
+              <a:ext cx="391885" cy="1153886"/>
+            </a:xfrm>
+            <a:prstGeom prst="roundRect">
+              <a:avLst/>
+            </a:prstGeom>
+            <a:solidFill>
+              <a:srgbClr val="FAF0CA"/>
+            </a:solidFill>
+            <a:ln w="19050">
+              <a:solidFill>
+                <a:schemeClr val="tx1"/>
+              </a:solidFill>
+            </a:ln>
+          </p:spPr>
+          <p:style>
+            <a:lnRef idx="2">
+              <a:schemeClr val="accent1">
+                <a:shade val="15000"/>
+              </a:schemeClr>
+            </a:lnRef>
+            <a:fillRef idx="1">
+              <a:schemeClr val="accent1"/>
+            </a:fillRef>
+            <a:effectRef idx="0">
+              <a:schemeClr val="accent1"/>
+            </a:effectRef>
+            <a:fontRef idx="minor">
+              <a:schemeClr val="lt1"/>
+            </a:fontRef>
+          </p:style>
+          <p:txBody>
+            <a:bodyPr vert="eaVert" rtlCol="0" anchor="ctr"/>
+            <a:lstStyle/>
+            <a:p>
+              <a:pPr algn="ctr"/>
+              <a:r>
+                <a:rPr lang="en-US" altLang="zh-CN" sz="1100" dirty="0">
+                  <a:solidFill>
+                    <a:schemeClr val="tx1"/>
+                  </a:solidFill>
+                </a:rPr>
+                <a:t>ResBlock</a:t>
+              </a:r>
+              <a:endParaRPr lang="zh-CN" altLang="en-US" sz="1100" dirty="0">
+                <a:solidFill>
+                  <a:schemeClr val="tx1"/>
+                </a:solidFill>
+              </a:endParaRPr>
+            </a:p>
+          </p:txBody>
+        </p:sp>
+        <p:cxnSp>
+          <p:nvCxnSpPr>
+            <p:cNvPr id="67" name="直接箭头连接符 66">
+              <a:extLst>
+                <a:ext uri="{FF2B5EF4-FFF2-40B4-BE49-F238E27FC236}">
+                  <a16:creationId xmlns:a16="http://schemas.microsoft.com/office/drawing/2014/main" id="{43DCEDBB-0E6E-5BE3-C94E-04D26189AE47}"/>
+                </a:ext>
+              </a:extLst>
+            </p:cNvPr>
+            <p:cNvCxnSpPr>
+              <a:cxnSpLocks/>
+            </p:cNvCxnSpPr>
+            <p:nvPr/>
+          </p:nvCxnSpPr>
+          <p:spPr>
+            <a:xfrm flipH="1">
+              <a:off x="510346" y="6159711"/>
+              <a:ext cx="272143" cy="0"/>
+            </a:xfrm>
+            <a:prstGeom prst="straightConnector1">
+              <a:avLst/>
+            </a:prstGeom>
+            <a:ln w="19050">
+              <a:tailEnd type="triangle"/>
+            </a:ln>
+          </p:spPr>
+          <p:style>
+            <a:lnRef idx="1">
+              <a:schemeClr val="dk1"/>
+            </a:lnRef>
+            <a:fillRef idx="0">
+              <a:schemeClr val="dk1"/>
+            </a:fillRef>
+            <a:effectRef idx="0">
+              <a:schemeClr val="dk1"/>
+            </a:effectRef>
+            <a:fontRef idx="minor">
+              <a:schemeClr val="tx1"/>
+            </a:fontRef>
+          </p:style>
+        </p:cxnSp>
+        <p:sp>
+          <p:nvSpPr>
+            <p:cNvPr id="68" name="矩形: 圆角 67">
+              <a:extLst>
+                <a:ext uri="{FF2B5EF4-FFF2-40B4-BE49-F238E27FC236}">
+                  <a16:creationId xmlns:a16="http://schemas.microsoft.com/office/drawing/2014/main" id="{E7E21891-7EB6-A2B4-BA41-0DB6B6520BB3}"/>
+                </a:ext>
+              </a:extLst>
+            </p:cNvPr>
+            <p:cNvSpPr/>
+            <p:nvPr/>
+          </p:nvSpPr>
+          <p:spPr>
+            <a:xfrm rot="10800000">
+              <a:off x="1518181" y="5306335"/>
+              <a:ext cx="391885" cy="1153886"/>
+            </a:xfrm>
+            <a:prstGeom prst="roundRect">
+              <a:avLst/>
+            </a:prstGeom>
+            <a:solidFill>
+              <a:srgbClr val="F4D35E"/>
+            </a:solidFill>
+            <a:ln w="19050">
+              <a:solidFill>
+                <a:schemeClr val="tx1"/>
+              </a:solidFill>
+            </a:ln>
+          </p:spPr>
+          <p:style>
+            <a:lnRef idx="2">
+              <a:schemeClr val="accent1">
+                <a:shade val="15000"/>
+              </a:schemeClr>
+            </a:lnRef>
+            <a:fillRef idx="1">
+              <a:schemeClr val="accent1"/>
+            </a:fillRef>
+            <a:effectRef idx="0">
+              <a:schemeClr val="accent1"/>
+            </a:effectRef>
+            <a:fontRef idx="minor">
+              <a:schemeClr val="lt1"/>
+            </a:fontRef>
+          </p:style>
+          <p:txBody>
+            <a:bodyPr vert="eaVert" rtlCol="0" anchor="ctr"/>
+            <a:lstStyle/>
+            <a:p>
+              <a:pPr algn="ctr"/>
+              <a:r>
+                <a:rPr lang="en-US" altLang="zh-CN" sz="1100" dirty="0">
+                  <a:solidFill>
+                    <a:schemeClr val="tx1"/>
+                  </a:solidFill>
+                </a:rPr>
+                <a:t>Average Pool</a:t>
+              </a:r>
+              <a:endParaRPr lang="zh-CN" altLang="en-US" sz="1100" dirty="0">
+                <a:solidFill>
+                  <a:schemeClr val="tx1"/>
+                </a:solidFill>
+              </a:endParaRPr>
+            </a:p>
+          </p:txBody>
+        </p:sp>
+        <p:sp>
+          <p:nvSpPr>
+            <p:cNvPr id="69" name="文本框 68">
+              <a:extLst>
+                <a:ext uri="{FF2B5EF4-FFF2-40B4-BE49-F238E27FC236}">
+                  <a16:creationId xmlns:a16="http://schemas.microsoft.com/office/drawing/2014/main" id="{F0DDC0E6-A1D1-3352-AE0B-CDFF5BE5523E}"/>
+                </a:ext>
+              </a:extLst>
+            </p:cNvPr>
+            <p:cNvSpPr txBox="1"/>
+            <p:nvPr/>
+          </p:nvSpPr>
+          <p:spPr>
+            <a:xfrm>
+              <a:off x="-29401" y="5091555"/>
+              <a:ext cx="1079500" cy="430887"/>
+            </a:xfrm>
+            <a:prstGeom prst="rect">
+              <a:avLst/>
+            </a:prstGeom>
+            <a:noFill/>
+          </p:spPr>
+          <p:txBody>
+            <a:bodyPr wrap="square" rtlCol="0">
+              <a:spAutoFit/>
+            </a:bodyPr>
+            <a:lstStyle/>
+            <a:p>
+              <a:pPr algn="ctr"/>
+              <a:r>
+                <a:rPr lang="en-US" altLang="zh-CN" sz="1100" dirty="0"/>
+                <a:t>Up 0</a:t>
+              </a:r>
+            </a:p>
+            <a:p>
+              <a:pPr algn="ctr"/>
+              <a:r>
+                <a:rPr lang="en-US" altLang="zh-CN" sz="1100" dirty="0"/>
+                <a:t>(512 × 512)</a:t>
+              </a:r>
+              <a:endParaRPr lang="zh-CN" altLang="en-US" sz="1100" dirty="0"/>
+            </a:p>
+          </p:txBody>
+        </p:sp>
+        <p:cxnSp>
+          <p:nvCxnSpPr>
+            <p:cNvPr id="70" name="直接箭头连接符 69">
+              <a:extLst>
+                <a:ext uri="{FF2B5EF4-FFF2-40B4-BE49-F238E27FC236}">
+                  <a16:creationId xmlns:a16="http://schemas.microsoft.com/office/drawing/2014/main" id="{0E6947C5-1DBD-56D5-19F0-DA23174D500B}"/>
+                </a:ext>
+              </a:extLst>
+            </p:cNvPr>
+            <p:cNvCxnSpPr>
+              <a:cxnSpLocks/>
+            </p:cNvCxnSpPr>
+            <p:nvPr/>
+          </p:nvCxnSpPr>
+          <p:spPr>
+            <a:xfrm flipH="1">
+              <a:off x="1174374" y="6048378"/>
+              <a:ext cx="343807" cy="0"/>
+            </a:xfrm>
+            <a:prstGeom prst="straightConnector1">
+              <a:avLst/>
+            </a:prstGeom>
+            <a:ln w="19050">
+              <a:tailEnd type="triangle"/>
+            </a:ln>
+          </p:spPr>
+          <p:style>
+            <a:lnRef idx="1">
+              <a:schemeClr val="dk1"/>
+            </a:lnRef>
+            <a:fillRef idx="0">
+              <a:schemeClr val="dk1"/>
+            </a:fillRef>
+            <a:effectRef idx="0">
+              <a:schemeClr val="dk1"/>
+            </a:effectRef>
+            <a:fontRef idx="minor">
+              <a:schemeClr val="tx1"/>
+            </a:fontRef>
+          </p:style>
+        </p:cxnSp>
+        <p:sp>
+          <p:nvSpPr>
+            <p:cNvPr id="71" name="矩形: 圆角 70">
+              <a:extLst>
+                <a:ext uri="{FF2B5EF4-FFF2-40B4-BE49-F238E27FC236}">
+                  <a16:creationId xmlns:a16="http://schemas.microsoft.com/office/drawing/2014/main" id="{E6573FD9-2AB4-B07B-962D-D60C27073B53}"/>
+                </a:ext>
+              </a:extLst>
+            </p:cNvPr>
+            <p:cNvSpPr/>
+            <p:nvPr/>
+          </p:nvSpPr>
+          <p:spPr>
+            <a:xfrm rot="10800000">
+              <a:off x="2182207" y="5306999"/>
+              <a:ext cx="391885" cy="1153886"/>
+            </a:xfrm>
+            <a:prstGeom prst="roundRect">
+              <a:avLst/>
+            </a:prstGeom>
+            <a:solidFill>
+              <a:srgbClr val="FAF0CA"/>
+            </a:solidFill>
+            <a:ln w="19050">
+              <a:solidFill>
+                <a:schemeClr val="tx1"/>
+              </a:solidFill>
+            </a:ln>
+          </p:spPr>
+          <p:style>
+            <a:lnRef idx="2">
+              <a:schemeClr val="accent1">
+                <a:shade val="15000"/>
+              </a:schemeClr>
+            </a:lnRef>
+            <a:fillRef idx="1">
+              <a:schemeClr val="accent1"/>
+            </a:fillRef>
+            <a:effectRef idx="0">
+              <a:schemeClr val="accent1"/>
+            </a:effectRef>
+            <a:fontRef idx="minor">
+              <a:schemeClr val="lt1"/>
+            </a:fontRef>
+          </p:style>
+          <p:txBody>
+            <a:bodyPr vert="eaVert" rtlCol="0" anchor="ctr"/>
+            <a:lstStyle/>
+            <a:p>
+              <a:pPr algn="ctr"/>
+              <a:r>
+                <a:rPr lang="en-US" altLang="zh-CN" sz="1100" dirty="0">
+                  <a:solidFill>
+                    <a:schemeClr val="tx1"/>
+                  </a:solidFill>
+                </a:rPr>
+                <a:t>ResBlock</a:t>
+              </a:r>
+              <a:endParaRPr lang="zh-CN" altLang="en-US" sz="1100" dirty="0">
+                <a:solidFill>
+                  <a:schemeClr val="tx1"/>
+                </a:solidFill>
+              </a:endParaRPr>
+            </a:p>
+          </p:txBody>
+        </p:sp>
+        <p:cxnSp>
+          <p:nvCxnSpPr>
+            <p:cNvPr id="72" name="直接箭头连接符 71">
+              <a:extLst>
+                <a:ext uri="{FF2B5EF4-FFF2-40B4-BE49-F238E27FC236}">
+                  <a16:creationId xmlns:a16="http://schemas.microsoft.com/office/drawing/2014/main" id="{49A13593-0EEF-C5ED-9F2B-F6128EE71433}"/>
+                </a:ext>
+              </a:extLst>
+            </p:cNvPr>
+            <p:cNvCxnSpPr>
+              <a:cxnSpLocks/>
+            </p:cNvCxnSpPr>
+            <p:nvPr/>
+          </p:nvCxnSpPr>
+          <p:spPr>
+            <a:xfrm flipH="1" flipV="1">
+              <a:off x="1910066" y="5883278"/>
+              <a:ext cx="272141" cy="664"/>
+            </a:xfrm>
+            <a:prstGeom prst="straightConnector1">
+              <a:avLst/>
+            </a:prstGeom>
+            <a:ln w="19050">
+              <a:tailEnd type="triangle"/>
+            </a:ln>
+          </p:spPr>
+          <p:style>
+            <a:lnRef idx="1">
+              <a:schemeClr val="dk1"/>
+            </a:lnRef>
+            <a:fillRef idx="0">
+              <a:schemeClr val="dk1"/>
+            </a:fillRef>
+            <a:effectRef idx="0">
+              <a:schemeClr val="dk1"/>
+            </a:effectRef>
+            <a:fontRef idx="minor">
+              <a:schemeClr val="tx1"/>
+            </a:fontRef>
+          </p:style>
+        </p:cxnSp>
+        <p:sp>
+          <p:nvSpPr>
+            <p:cNvPr id="73" name="文本框 72">
+              <a:extLst>
+                <a:ext uri="{FF2B5EF4-FFF2-40B4-BE49-F238E27FC236}">
+                  <a16:creationId xmlns:a16="http://schemas.microsoft.com/office/drawing/2014/main" id="{FD30F14E-B448-DD4F-5DF3-46BC84845C50}"/>
+                </a:ext>
+              </a:extLst>
+            </p:cNvPr>
+            <p:cNvSpPr txBox="1"/>
+            <p:nvPr/>
+          </p:nvSpPr>
+          <p:spPr>
+            <a:xfrm>
+              <a:off x="976614" y="6698346"/>
+              <a:ext cx="391886" cy="261610"/>
+            </a:xfrm>
+            <a:prstGeom prst="rect">
+              <a:avLst/>
+            </a:prstGeom>
+            <a:noFill/>
+          </p:spPr>
+          <p:txBody>
+            <a:bodyPr wrap="square" rtlCol="0">
+              <a:spAutoFit/>
+            </a:bodyPr>
+            <a:lstStyle/>
+            <a:p>
+              <a:pPr algn="ctr"/>
+              <a:r>
+                <a:rPr lang="en-US" altLang="zh-CN" sz="1100" b="1" dirty="0"/>
+                <a:t>×2</a:t>
+              </a:r>
+              <a:endParaRPr lang="zh-CN" altLang="en-US" sz="1100" b="1" dirty="0"/>
+            </a:p>
+          </p:txBody>
+        </p:sp>
+        <p:cxnSp>
+          <p:nvCxnSpPr>
+            <p:cNvPr id="74" name="直接箭头连接符 73">
+              <a:extLst>
+                <a:ext uri="{FF2B5EF4-FFF2-40B4-BE49-F238E27FC236}">
+                  <a16:creationId xmlns:a16="http://schemas.microsoft.com/office/drawing/2014/main" id="{7062341E-6189-F943-973D-24F3F0E6BC09}"/>
+                </a:ext>
+              </a:extLst>
+            </p:cNvPr>
+            <p:cNvCxnSpPr>
+              <a:cxnSpLocks/>
+            </p:cNvCxnSpPr>
+            <p:nvPr/>
+          </p:nvCxnSpPr>
+          <p:spPr>
+            <a:xfrm flipH="1">
+              <a:off x="3238117" y="5657891"/>
+              <a:ext cx="272139" cy="0"/>
+            </a:xfrm>
+            <a:prstGeom prst="straightConnector1">
+              <a:avLst/>
+            </a:prstGeom>
+            <a:ln w="19050">
+              <a:tailEnd type="triangle"/>
+            </a:ln>
+          </p:spPr>
+          <p:style>
+            <a:lnRef idx="1">
+              <a:schemeClr val="dk1"/>
+            </a:lnRef>
+            <a:fillRef idx="0">
+              <a:schemeClr val="dk1"/>
+            </a:fillRef>
+            <a:effectRef idx="0">
+              <a:schemeClr val="dk1"/>
+            </a:effectRef>
+            <a:fontRef idx="minor">
+              <a:schemeClr val="tx1"/>
+            </a:fontRef>
+          </p:style>
+        </p:cxnSp>
+        <p:sp>
+          <p:nvSpPr>
+            <p:cNvPr id="75" name="矩形: 圆角 74">
+              <a:extLst>
+                <a:ext uri="{FF2B5EF4-FFF2-40B4-BE49-F238E27FC236}">
+                  <a16:creationId xmlns:a16="http://schemas.microsoft.com/office/drawing/2014/main" id="{6963E99A-55FD-C627-2763-862B18565C04}"/>
+                </a:ext>
+              </a:extLst>
+            </p:cNvPr>
+            <p:cNvSpPr/>
+            <p:nvPr/>
+          </p:nvSpPr>
+          <p:spPr>
+            <a:xfrm rot="10800000">
+              <a:off x="2846232" y="5080948"/>
+              <a:ext cx="391885" cy="1153886"/>
+            </a:xfrm>
+            <a:prstGeom prst="roundRect">
+              <a:avLst/>
+            </a:prstGeom>
+            <a:solidFill>
+              <a:srgbClr val="F4D35E"/>
+            </a:solidFill>
+            <a:ln w="19050">
+              <a:solidFill>
+                <a:schemeClr val="tx1"/>
+              </a:solidFill>
+            </a:ln>
+          </p:spPr>
+          <p:style>
+            <a:lnRef idx="2">
+              <a:schemeClr val="accent1">
+                <a:shade val="15000"/>
+              </a:schemeClr>
+            </a:lnRef>
+            <a:fillRef idx="1">
+              <a:schemeClr val="accent1"/>
+            </a:fillRef>
+            <a:effectRef idx="0">
+              <a:schemeClr val="accent1"/>
+            </a:effectRef>
+            <a:fontRef idx="minor">
+              <a:schemeClr val="lt1"/>
+            </a:fontRef>
+          </p:style>
+          <p:txBody>
+            <a:bodyPr vert="eaVert" rtlCol="0" anchor="ctr"/>
+            <a:lstStyle/>
+            <a:p>
+              <a:pPr algn="ctr"/>
+              <a:r>
+                <a:rPr lang="en-US" altLang="zh-CN" sz="1100" dirty="0">
+                  <a:solidFill>
+                    <a:schemeClr val="tx1"/>
+                  </a:solidFill>
+                </a:rPr>
+                <a:t>Average Pool</a:t>
+              </a:r>
+              <a:endParaRPr lang="zh-CN" altLang="en-US" sz="1100" dirty="0">
+                <a:solidFill>
+                  <a:schemeClr val="tx1"/>
+                </a:solidFill>
+              </a:endParaRPr>
+            </a:p>
+          </p:txBody>
+        </p:sp>
+        <p:sp>
+          <p:nvSpPr>
+            <p:cNvPr id="76" name="矩形: 圆角 75">
+              <a:extLst>
+                <a:ext uri="{FF2B5EF4-FFF2-40B4-BE49-F238E27FC236}">
+                  <a16:creationId xmlns:a16="http://schemas.microsoft.com/office/drawing/2014/main" id="{FDC0F9EC-6092-12F2-AA5C-019AA6CBAEB5}"/>
+                </a:ext>
+              </a:extLst>
+            </p:cNvPr>
+            <p:cNvSpPr/>
+            <p:nvPr/>
+          </p:nvSpPr>
+          <p:spPr>
+            <a:xfrm rot="10800000">
+              <a:off x="3510256" y="5080948"/>
+              <a:ext cx="391885" cy="1153886"/>
+            </a:xfrm>
+            <a:prstGeom prst="roundRect">
+              <a:avLst/>
+            </a:prstGeom>
+            <a:solidFill>
+              <a:srgbClr val="FAF0CA"/>
+            </a:solidFill>
+            <a:ln w="19050">
+              <a:solidFill>
+                <a:schemeClr val="tx1"/>
+              </a:solidFill>
+            </a:ln>
+          </p:spPr>
+          <p:style>
+            <a:lnRef idx="2">
+              <a:schemeClr val="accent1">
+                <a:shade val="15000"/>
+              </a:schemeClr>
+            </a:lnRef>
+            <a:fillRef idx="1">
+              <a:schemeClr val="accent1"/>
+            </a:fillRef>
+            <a:effectRef idx="0">
+              <a:schemeClr val="accent1"/>
+            </a:effectRef>
+            <a:fontRef idx="minor">
+              <a:schemeClr val="lt1"/>
+            </a:fontRef>
+          </p:style>
+          <p:txBody>
+            <a:bodyPr vert="eaVert" rtlCol="0" anchor="ctr"/>
+            <a:lstStyle/>
+            <a:p>
+              <a:pPr algn="ctr"/>
+              <a:r>
+                <a:rPr lang="en-US" altLang="zh-CN" sz="1100" dirty="0">
+                  <a:solidFill>
+                    <a:schemeClr val="tx1"/>
+                  </a:solidFill>
+                </a:rPr>
+                <a:t>ResBlock</a:t>
+              </a:r>
+              <a:endParaRPr lang="zh-CN" altLang="en-US" sz="1100" dirty="0">
+                <a:solidFill>
+                  <a:schemeClr val="tx1"/>
+                </a:solidFill>
+              </a:endParaRPr>
+            </a:p>
+          </p:txBody>
+        </p:sp>
+        <p:sp>
+          <p:nvSpPr>
+            <p:cNvPr id="77" name="文本框 76">
+              <a:extLst>
+                <a:ext uri="{FF2B5EF4-FFF2-40B4-BE49-F238E27FC236}">
+                  <a16:creationId xmlns:a16="http://schemas.microsoft.com/office/drawing/2014/main" id="{A75FDC10-DEBB-862A-643C-66D329AC91FF}"/>
+                </a:ext>
+              </a:extLst>
+            </p:cNvPr>
+            <p:cNvSpPr txBox="1"/>
+            <p:nvPr/>
+          </p:nvSpPr>
+          <p:spPr>
+            <a:xfrm>
+              <a:off x="1299481" y="4865504"/>
+              <a:ext cx="1079500" cy="430887"/>
+            </a:xfrm>
+            <a:prstGeom prst="rect">
+              <a:avLst/>
+            </a:prstGeom>
+            <a:noFill/>
+          </p:spPr>
+          <p:txBody>
+            <a:bodyPr wrap="square" rtlCol="0">
+              <a:spAutoFit/>
+            </a:bodyPr>
+            <a:lstStyle/>
+            <a:p>
+              <a:pPr algn="ctr"/>
+              <a:r>
+                <a:rPr lang="en-US" altLang="zh-CN" sz="1100" dirty="0"/>
+                <a:t>Up 1</a:t>
+              </a:r>
+            </a:p>
+            <a:p>
+              <a:pPr algn="ctr"/>
+              <a:r>
+                <a:rPr lang="en-US" altLang="zh-CN" sz="1100" dirty="0"/>
+                <a:t>(256 × 256)</a:t>
+              </a:r>
+              <a:endParaRPr lang="zh-CN" altLang="en-US" sz="1100" dirty="0"/>
+            </a:p>
+          </p:txBody>
+        </p:sp>
+        <p:sp>
+          <p:nvSpPr>
+            <p:cNvPr id="78" name="文本框 77">
+              <a:extLst>
+                <a:ext uri="{FF2B5EF4-FFF2-40B4-BE49-F238E27FC236}">
+                  <a16:creationId xmlns:a16="http://schemas.microsoft.com/office/drawing/2014/main" id="{82AF0DC4-FF32-CA47-BC08-E6DD8B8A6C82}"/>
+                </a:ext>
+              </a:extLst>
+            </p:cNvPr>
+            <p:cNvSpPr txBox="1"/>
+            <p:nvPr/>
+          </p:nvSpPr>
+          <p:spPr>
+            <a:xfrm>
+              <a:off x="2723924" y="4610787"/>
+              <a:ext cx="1079500" cy="430887"/>
+            </a:xfrm>
+            <a:prstGeom prst="rect">
+              <a:avLst/>
+            </a:prstGeom>
+            <a:noFill/>
+          </p:spPr>
+          <p:txBody>
+            <a:bodyPr wrap="square" rtlCol="0">
+              <a:spAutoFit/>
+            </a:bodyPr>
+            <a:lstStyle/>
+            <a:p>
+              <a:pPr algn="ctr"/>
+              <a:r>
+                <a:rPr lang="en-US" altLang="zh-CN" sz="1100" dirty="0"/>
+                <a:t>Up 2</a:t>
+              </a:r>
+            </a:p>
+            <a:p>
+              <a:pPr algn="ctr"/>
+              <a:r>
+                <a:rPr lang="en-US" altLang="zh-CN" sz="1100" dirty="0"/>
+                <a:t>(128 × 128)</a:t>
+              </a:r>
+              <a:endParaRPr lang="zh-CN" altLang="en-US" sz="1100" dirty="0"/>
+            </a:p>
+          </p:txBody>
+        </p:sp>
+        <p:cxnSp>
+          <p:nvCxnSpPr>
+            <p:cNvPr id="79" name="直接箭头连接符 78">
+              <a:extLst>
+                <a:ext uri="{FF2B5EF4-FFF2-40B4-BE49-F238E27FC236}">
+                  <a16:creationId xmlns:a16="http://schemas.microsoft.com/office/drawing/2014/main" id="{B4F191B6-FEA9-0216-CA3B-4558310001A1}"/>
+                </a:ext>
+              </a:extLst>
+            </p:cNvPr>
+            <p:cNvCxnSpPr>
+              <a:cxnSpLocks/>
+            </p:cNvCxnSpPr>
+            <p:nvPr/>
+          </p:nvCxnSpPr>
+          <p:spPr>
+            <a:xfrm flipH="1">
+              <a:off x="2574088" y="5768564"/>
+              <a:ext cx="272143" cy="0"/>
+            </a:xfrm>
+            <a:prstGeom prst="straightConnector1">
+              <a:avLst/>
+            </a:prstGeom>
+            <a:ln w="19050">
+              <a:tailEnd type="triangle"/>
+            </a:ln>
+          </p:spPr>
+          <p:style>
+            <a:lnRef idx="1">
+              <a:schemeClr val="dk1"/>
+            </a:lnRef>
+            <a:fillRef idx="0">
+              <a:schemeClr val="dk1"/>
+            </a:fillRef>
+            <a:effectRef idx="0">
+              <a:schemeClr val="dk1"/>
+            </a:effectRef>
+            <a:fontRef idx="minor">
+              <a:schemeClr val="tx1"/>
+            </a:fontRef>
+          </p:style>
+        </p:cxnSp>
+        <p:sp>
+          <p:nvSpPr>
+            <p:cNvPr id="80" name="文本框 79">
+              <a:extLst>
+                <a:ext uri="{FF2B5EF4-FFF2-40B4-BE49-F238E27FC236}">
+                  <a16:creationId xmlns:a16="http://schemas.microsoft.com/office/drawing/2014/main" id="{A68F6436-B8DA-F80D-DB26-FB44A15D776C}"/>
+                </a:ext>
+              </a:extLst>
+            </p:cNvPr>
+            <p:cNvSpPr txBox="1"/>
+            <p:nvPr/>
+          </p:nvSpPr>
+          <p:spPr>
+            <a:xfrm>
+              <a:off x="2318273" y="6467340"/>
+              <a:ext cx="391886" cy="261610"/>
+            </a:xfrm>
+            <a:prstGeom prst="rect">
+              <a:avLst/>
+            </a:prstGeom>
+            <a:noFill/>
+          </p:spPr>
+          <p:txBody>
+            <a:bodyPr wrap="square" rtlCol="0">
+              <a:spAutoFit/>
+            </a:bodyPr>
+            <a:lstStyle/>
+            <a:p>
+              <a:pPr algn="ctr"/>
+              <a:r>
+                <a:rPr lang="en-US" altLang="zh-CN" sz="1100" b="1" dirty="0"/>
+                <a:t>×2</a:t>
+              </a:r>
+              <a:endParaRPr lang="zh-CN" altLang="en-US" sz="1100" b="1" dirty="0"/>
+            </a:p>
+          </p:txBody>
+        </p:sp>
+        <p:sp>
+          <p:nvSpPr>
+            <p:cNvPr id="81" name="文本框 80">
+              <a:extLst>
+                <a:ext uri="{FF2B5EF4-FFF2-40B4-BE49-F238E27FC236}">
+                  <a16:creationId xmlns:a16="http://schemas.microsoft.com/office/drawing/2014/main" id="{3F70A5B4-521C-FF48-A71E-8D8B6C3F3B98}"/>
+                </a:ext>
+              </a:extLst>
+            </p:cNvPr>
+            <p:cNvSpPr txBox="1"/>
+            <p:nvPr/>
+          </p:nvSpPr>
+          <p:spPr>
+            <a:xfrm>
+              <a:off x="3669909" y="6229391"/>
+              <a:ext cx="391886" cy="261610"/>
+            </a:xfrm>
+            <a:prstGeom prst="rect">
+              <a:avLst/>
+            </a:prstGeom>
+            <a:noFill/>
+          </p:spPr>
+          <p:txBody>
+            <a:bodyPr wrap="square" rtlCol="0">
+              <a:spAutoFit/>
+            </a:bodyPr>
+            <a:lstStyle/>
+            <a:p>
+              <a:pPr algn="ctr"/>
+              <a:r>
+                <a:rPr lang="en-US" altLang="zh-CN" sz="1100" b="1" dirty="0"/>
+                <a:t>×2</a:t>
+              </a:r>
+              <a:endParaRPr lang="zh-CN" altLang="en-US" sz="1100" b="1" dirty="0"/>
+            </a:p>
+          </p:txBody>
+        </p:sp>
+        <p:cxnSp>
+          <p:nvCxnSpPr>
+            <p:cNvPr id="82" name="直接箭头连接符 81">
+              <a:extLst>
+                <a:ext uri="{FF2B5EF4-FFF2-40B4-BE49-F238E27FC236}">
+                  <a16:creationId xmlns:a16="http://schemas.microsoft.com/office/drawing/2014/main" id="{4E771549-0366-FBAB-C195-5414080B7AF9}"/>
+                </a:ext>
+              </a:extLst>
+            </p:cNvPr>
+            <p:cNvCxnSpPr>
+              <a:cxnSpLocks/>
+            </p:cNvCxnSpPr>
+            <p:nvPr/>
+          </p:nvCxnSpPr>
+          <p:spPr>
+            <a:xfrm flipH="1">
+              <a:off x="4566167" y="5337189"/>
+              <a:ext cx="272139" cy="0"/>
+            </a:xfrm>
+            <a:prstGeom prst="straightConnector1">
+              <a:avLst/>
+            </a:prstGeom>
+            <a:ln w="19050">
+              <a:tailEnd type="triangle"/>
+            </a:ln>
+          </p:spPr>
+          <p:style>
+            <a:lnRef idx="1">
+              <a:schemeClr val="dk1"/>
+            </a:lnRef>
+            <a:fillRef idx="0">
+              <a:schemeClr val="dk1"/>
+            </a:fillRef>
+            <a:effectRef idx="0">
+              <a:schemeClr val="dk1"/>
+            </a:effectRef>
+            <a:fontRef idx="minor">
+              <a:schemeClr val="tx1"/>
+            </a:fontRef>
+          </p:style>
+        </p:cxnSp>
+        <p:sp>
+          <p:nvSpPr>
+            <p:cNvPr id="83" name="矩形: 圆角 82">
+              <a:extLst>
+                <a:ext uri="{FF2B5EF4-FFF2-40B4-BE49-F238E27FC236}">
+                  <a16:creationId xmlns:a16="http://schemas.microsoft.com/office/drawing/2014/main" id="{FA5ECD89-8994-29EC-0C26-75AAC29AB3AC}"/>
+                </a:ext>
+              </a:extLst>
+            </p:cNvPr>
+            <p:cNvSpPr/>
+            <p:nvPr/>
+          </p:nvSpPr>
+          <p:spPr>
+            <a:xfrm rot="10800000">
+              <a:off x="4174282" y="4760246"/>
+              <a:ext cx="391885" cy="1153886"/>
+            </a:xfrm>
+            <a:prstGeom prst="roundRect">
+              <a:avLst/>
+            </a:prstGeom>
+            <a:solidFill>
+              <a:srgbClr val="F4D35E"/>
+            </a:solidFill>
+            <a:ln w="19050">
+              <a:solidFill>
+                <a:schemeClr val="tx1"/>
+              </a:solidFill>
+            </a:ln>
+          </p:spPr>
+          <p:style>
+            <a:lnRef idx="2">
+              <a:schemeClr val="accent1">
+                <a:shade val="15000"/>
+              </a:schemeClr>
+            </a:lnRef>
+            <a:fillRef idx="1">
+              <a:schemeClr val="accent1"/>
+            </a:fillRef>
+            <a:effectRef idx="0">
+              <a:schemeClr val="accent1"/>
+            </a:effectRef>
+            <a:fontRef idx="minor">
+              <a:schemeClr val="lt1"/>
+            </a:fontRef>
+          </p:style>
+          <p:txBody>
+            <a:bodyPr vert="eaVert" rtlCol="0" anchor="ctr"/>
+            <a:lstStyle/>
+            <a:p>
+              <a:pPr algn="ctr"/>
+              <a:r>
+                <a:rPr lang="en-US" altLang="zh-CN" sz="1100" dirty="0">
+                  <a:solidFill>
+                    <a:schemeClr val="tx1"/>
+                  </a:solidFill>
+                </a:rPr>
+                <a:t>Average Pool</a:t>
+              </a:r>
+              <a:endParaRPr lang="zh-CN" altLang="en-US" sz="1100" dirty="0">
+                <a:solidFill>
+                  <a:schemeClr val="tx1"/>
+                </a:solidFill>
+              </a:endParaRPr>
+            </a:p>
+          </p:txBody>
+        </p:sp>
+        <p:sp>
+          <p:nvSpPr>
+            <p:cNvPr id="84" name="矩形: 圆角 83">
+              <a:extLst>
+                <a:ext uri="{FF2B5EF4-FFF2-40B4-BE49-F238E27FC236}">
+                  <a16:creationId xmlns:a16="http://schemas.microsoft.com/office/drawing/2014/main" id="{FE5EB63B-6D09-FCEF-BC82-E7B21C6286AE}"/>
+                </a:ext>
+              </a:extLst>
+            </p:cNvPr>
+            <p:cNvSpPr/>
+            <p:nvPr/>
+          </p:nvSpPr>
+          <p:spPr>
+            <a:xfrm rot="10800000">
+              <a:off x="4838306" y="4760246"/>
+              <a:ext cx="391885" cy="1153886"/>
+            </a:xfrm>
+            <a:prstGeom prst="roundRect">
+              <a:avLst/>
+            </a:prstGeom>
+            <a:solidFill>
+              <a:srgbClr val="FAF0CA"/>
+            </a:solidFill>
+            <a:ln w="19050">
+              <a:solidFill>
+                <a:schemeClr val="tx1"/>
+              </a:solidFill>
+            </a:ln>
+          </p:spPr>
+          <p:style>
+            <a:lnRef idx="2">
+              <a:schemeClr val="accent1">
+                <a:shade val="15000"/>
+              </a:schemeClr>
+            </a:lnRef>
+            <a:fillRef idx="1">
+              <a:schemeClr val="accent1"/>
+            </a:fillRef>
+            <a:effectRef idx="0">
+              <a:schemeClr val="accent1"/>
+            </a:effectRef>
+            <a:fontRef idx="minor">
+              <a:schemeClr val="lt1"/>
+            </a:fontRef>
+          </p:style>
+          <p:txBody>
+            <a:bodyPr vert="eaVert" rtlCol="0" anchor="ctr"/>
+            <a:lstStyle/>
+            <a:p>
+              <a:pPr algn="ctr"/>
+              <a:r>
+                <a:rPr lang="en-US" altLang="zh-CN" sz="1100" dirty="0">
+                  <a:solidFill>
+                    <a:schemeClr val="tx1"/>
+                  </a:solidFill>
+                </a:rPr>
+                <a:t>ResBlock</a:t>
+              </a:r>
+              <a:endParaRPr lang="zh-CN" altLang="en-US" sz="1100" dirty="0">
+                <a:solidFill>
+                  <a:schemeClr val="tx1"/>
+                </a:solidFill>
+              </a:endParaRPr>
+            </a:p>
+          </p:txBody>
+        </p:sp>
+        <p:cxnSp>
+          <p:nvCxnSpPr>
+            <p:cNvPr id="85" name="直接箭头连接符 84">
+              <a:extLst>
+                <a:ext uri="{FF2B5EF4-FFF2-40B4-BE49-F238E27FC236}">
+                  <a16:creationId xmlns:a16="http://schemas.microsoft.com/office/drawing/2014/main" id="{AE0CF87F-6DAF-665C-26A0-D756CBEEC328}"/>
+                </a:ext>
+              </a:extLst>
+            </p:cNvPr>
+            <p:cNvCxnSpPr>
+              <a:cxnSpLocks/>
+            </p:cNvCxnSpPr>
+            <p:nvPr/>
+          </p:nvCxnSpPr>
+          <p:spPr>
+            <a:xfrm flipH="1">
+              <a:off x="5882424" y="5080948"/>
+              <a:ext cx="272138" cy="0"/>
+            </a:xfrm>
+            <a:prstGeom prst="straightConnector1">
+              <a:avLst/>
+            </a:prstGeom>
+            <a:ln w="19050">
+              <a:tailEnd type="triangle"/>
+            </a:ln>
+          </p:spPr>
+          <p:style>
+            <a:lnRef idx="1">
+              <a:schemeClr val="dk1"/>
+            </a:lnRef>
+            <a:fillRef idx="0">
+              <a:schemeClr val="dk1"/>
+            </a:fillRef>
+            <a:effectRef idx="0">
+              <a:schemeClr val="dk1"/>
+            </a:effectRef>
+            <a:fontRef idx="minor">
+              <a:schemeClr val="tx1"/>
+            </a:fontRef>
+          </p:style>
+        </p:cxnSp>
+        <p:sp>
+          <p:nvSpPr>
+            <p:cNvPr id="86" name="矩形: 圆角 85">
+              <a:extLst>
+                <a:ext uri="{FF2B5EF4-FFF2-40B4-BE49-F238E27FC236}">
+                  <a16:creationId xmlns:a16="http://schemas.microsoft.com/office/drawing/2014/main" id="{93A3D01E-1F3C-5C02-77CB-5FC2F7C2EF4D}"/>
+                </a:ext>
+              </a:extLst>
+            </p:cNvPr>
+            <p:cNvSpPr/>
+            <p:nvPr/>
+          </p:nvSpPr>
+          <p:spPr>
+            <a:xfrm rot="10800000">
+              <a:off x="5490539" y="4504005"/>
+              <a:ext cx="391885" cy="1153886"/>
+            </a:xfrm>
+            <a:prstGeom prst="roundRect">
+              <a:avLst/>
+            </a:prstGeom>
+            <a:solidFill>
+              <a:srgbClr val="F4D35E"/>
+            </a:solidFill>
+            <a:ln w="19050">
+              <a:solidFill>
+                <a:schemeClr val="tx1"/>
+              </a:solidFill>
+            </a:ln>
+          </p:spPr>
+          <p:style>
+            <a:lnRef idx="2">
+              <a:schemeClr val="accent1">
+                <a:shade val="15000"/>
+              </a:schemeClr>
+            </a:lnRef>
+            <a:fillRef idx="1">
+              <a:schemeClr val="accent1"/>
+            </a:fillRef>
+            <a:effectRef idx="0">
+              <a:schemeClr val="accent1"/>
+            </a:effectRef>
+            <a:fontRef idx="minor">
+              <a:schemeClr val="lt1"/>
+            </a:fontRef>
+          </p:style>
+          <p:txBody>
+            <a:bodyPr vert="eaVert" rtlCol="0" anchor="ctr"/>
+            <a:lstStyle/>
+            <a:p>
+              <a:pPr algn="ctr"/>
+              <a:r>
+                <a:rPr lang="en-US" altLang="zh-CN" sz="1100" dirty="0">
+                  <a:solidFill>
+                    <a:schemeClr val="tx1"/>
+                  </a:solidFill>
+                </a:rPr>
+                <a:t>Average Pool</a:t>
+              </a:r>
+              <a:endParaRPr lang="zh-CN" altLang="en-US" sz="1100" dirty="0">
+                <a:solidFill>
+                  <a:schemeClr val="tx1"/>
+                </a:solidFill>
+              </a:endParaRPr>
+            </a:p>
+          </p:txBody>
+        </p:sp>
+        <p:sp>
+          <p:nvSpPr>
+            <p:cNvPr id="87" name="矩形: 圆角 86">
+              <a:extLst>
+                <a:ext uri="{FF2B5EF4-FFF2-40B4-BE49-F238E27FC236}">
+                  <a16:creationId xmlns:a16="http://schemas.microsoft.com/office/drawing/2014/main" id="{201EA8E1-61C9-8EB6-3EF4-857D7DE88175}"/>
+                </a:ext>
+              </a:extLst>
+            </p:cNvPr>
+            <p:cNvSpPr/>
+            <p:nvPr/>
+          </p:nvSpPr>
+          <p:spPr>
+            <a:xfrm rot="10800000">
+              <a:off x="6154562" y="4504005"/>
+              <a:ext cx="550159" cy="1153886"/>
+            </a:xfrm>
+            <a:prstGeom prst="roundRect">
+              <a:avLst/>
+            </a:prstGeom>
+            <a:solidFill>
+              <a:srgbClr val="FAF0CA"/>
+            </a:solidFill>
+            <a:ln w="19050">
+              <a:solidFill>
+                <a:schemeClr val="tx1"/>
+              </a:solidFill>
+            </a:ln>
+          </p:spPr>
+          <p:style>
+            <a:lnRef idx="2">
+              <a:schemeClr val="accent1">
+                <a:shade val="15000"/>
+              </a:schemeClr>
+            </a:lnRef>
+            <a:fillRef idx="1">
+              <a:schemeClr val="accent1"/>
+            </a:fillRef>
+            <a:effectRef idx="0">
+              <a:schemeClr val="accent1"/>
+            </a:effectRef>
+            <a:fontRef idx="minor">
+              <a:schemeClr val="lt1"/>
+            </a:fontRef>
+          </p:style>
+          <p:txBody>
+            <a:bodyPr vert="eaVert" rtlCol="0" anchor="ctr"/>
+            <a:lstStyle/>
+            <a:p>
+              <a:pPr algn="ctr"/>
+              <a:r>
+                <a:rPr lang="en-US" altLang="zh-CN" sz="1100" dirty="0">
+                  <a:solidFill>
+                    <a:schemeClr val="tx1"/>
+                  </a:solidFill>
+                </a:rPr>
+                <a:t>ResBlock</a:t>
+              </a:r>
+            </a:p>
+            <a:p>
+              <a:pPr algn="ctr"/>
+              <a:r>
+                <a:rPr lang="en-US" altLang="zh-CN" sz="1100" dirty="0">
+                  <a:solidFill>
+                    <a:schemeClr val="tx1"/>
+                  </a:solidFill>
+                </a:rPr>
+                <a:t>SelfAttention</a:t>
+              </a:r>
+              <a:endParaRPr lang="zh-CN" altLang="en-US" sz="1100" dirty="0">
+                <a:solidFill>
+                  <a:schemeClr val="tx1"/>
+                </a:solidFill>
+              </a:endParaRPr>
+            </a:p>
+          </p:txBody>
+        </p:sp>
+        <p:sp>
+          <p:nvSpPr>
+            <p:cNvPr id="88" name="文本框 87">
+              <a:extLst>
+                <a:ext uri="{FF2B5EF4-FFF2-40B4-BE49-F238E27FC236}">
+                  <a16:creationId xmlns:a16="http://schemas.microsoft.com/office/drawing/2014/main" id="{22367CED-5022-89EE-2089-8F0295229BE6}"/>
+                </a:ext>
+              </a:extLst>
+            </p:cNvPr>
+            <p:cNvSpPr txBox="1"/>
+            <p:nvPr/>
+          </p:nvSpPr>
+          <p:spPr>
+            <a:xfrm>
+              <a:off x="4138896" y="4303364"/>
+              <a:ext cx="1079500" cy="430887"/>
+            </a:xfrm>
+            <a:prstGeom prst="rect">
+              <a:avLst/>
+            </a:prstGeom>
+            <a:noFill/>
+          </p:spPr>
+          <p:txBody>
+            <a:bodyPr wrap="square" rtlCol="0">
+              <a:spAutoFit/>
+            </a:bodyPr>
+            <a:lstStyle/>
+            <a:p>
+              <a:pPr algn="ctr"/>
+              <a:r>
+                <a:rPr lang="en-US" altLang="zh-CN" sz="1100" dirty="0"/>
+                <a:t>Up 3</a:t>
+              </a:r>
+            </a:p>
+            <a:p>
+              <a:pPr algn="ctr"/>
+              <a:r>
+                <a:rPr lang="en-US" altLang="zh-CN" sz="1100" dirty="0"/>
+                <a:t>(64 × 64)</a:t>
+              </a:r>
+              <a:endParaRPr lang="zh-CN" altLang="en-US" sz="1100" dirty="0"/>
+            </a:p>
+          </p:txBody>
+        </p:sp>
+        <p:sp>
+          <p:nvSpPr>
+            <p:cNvPr id="89" name="文本框 88">
+              <a:extLst>
+                <a:ext uri="{FF2B5EF4-FFF2-40B4-BE49-F238E27FC236}">
+                  <a16:creationId xmlns:a16="http://schemas.microsoft.com/office/drawing/2014/main" id="{DB758398-3EF9-A5A0-6EBC-3BB39189CD35}"/>
+                </a:ext>
+              </a:extLst>
+            </p:cNvPr>
+            <p:cNvSpPr txBox="1"/>
+            <p:nvPr/>
+          </p:nvSpPr>
+          <p:spPr>
+            <a:xfrm>
+              <a:off x="5455151" y="3927062"/>
+              <a:ext cx="1079500" cy="430887"/>
+            </a:xfrm>
+            <a:prstGeom prst="rect">
+              <a:avLst/>
+            </a:prstGeom>
+            <a:noFill/>
+          </p:spPr>
+          <p:txBody>
+            <a:bodyPr wrap="square" rtlCol="0">
+              <a:spAutoFit/>
+            </a:bodyPr>
+            <a:lstStyle/>
+            <a:p>
+              <a:pPr algn="ctr"/>
+              <a:r>
+                <a:rPr lang="en-US" altLang="zh-CN" sz="1100" dirty="0"/>
+                <a:t>Up 4</a:t>
+              </a:r>
+            </a:p>
+            <a:p>
+              <a:pPr algn="ctr"/>
+              <a:r>
+                <a:rPr lang="en-US" altLang="zh-CN" sz="1100" dirty="0"/>
+                <a:t>(32 × 32)</a:t>
+              </a:r>
+              <a:endParaRPr lang="zh-CN" altLang="en-US" sz="1100" dirty="0"/>
+            </a:p>
+          </p:txBody>
+        </p:sp>
+        <p:sp>
+          <p:nvSpPr>
+            <p:cNvPr id="90" name="文本框 89">
+              <a:extLst>
+                <a:ext uri="{FF2B5EF4-FFF2-40B4-BE49-F238E27FC236}">
+                  <a16:creationId xmlns:a16="http://schemas.microsoft.com/office/drawing/2014/main" id="{EB32C817-17CF-A007-48A5-66488253F40B}"/>
+                </a:ext>
+              </a:extLst>
+            </p:cNvPr>
+            <p:cNvSpPr txBox="1"/>
+            <p:nvPr/>
+          </p:nvSpPr>
+          <p:spPr>
+            <a:xfrm>
+              <a:off x="4968479" y="5898101"/>
+              <a:ext cx="391886" cy="261610"/>
+            </a:xfrm>
+            <a:prstGeom prst="rect">
+              <a:avLst/>
+            </a:prstGeom>
+            <a:noFill/>
+          </p:spPr>
+          <p:txBody>
+            <a:bodyPr wrap="square" rtlCol="0">
+              <a:spAutoFit/>
+            </a:bodyPr>
+            <a:lstStyle/>
+            <a:p>
+              <a:pPr algn="ctr"/>
+              <a:r>
+                <a:rPr lang="en-US" altLang="zh-CN" sz="1100" b="1" dirty="0"/>
+                <a:t>×2</a:t>
+              </a:r>
+              <a:endParaRPr lang="zh-CN" altLang="en-US" sz="1100" b="1" dirty="0"/>
+            </a:p>
+          </p:txBody>
+        </p:sp>
+        <p:sp>
+          <p:nvSpPr>
+            <p:cNvPr id="91" name="文本框 90">
+              <a:extLst>
+                <a:ext uri="{FF2B5EF4-FFF2-40B4-BE49-F238E27FC236}">
+                  <a16:creationId xmlns:a16="http://schemas.microsoft.com/office/drawing/2014/main" id="{A63C444D-2F42-0522-DB2D-E0788E245096}"/>
+                </a:ext>
+              </a:extLst>
+            </p:cNvPr>
+            <p:cNvSpPr txBox="1"/>
+            <p:nvPr/>
+          </p:nvSpPr>
+          <p:spPr>
+            <a:xfrm>
+              <a:off x="6470213" y="5657892"/>
+              <a:ext cx="391886" cy="261610"/>
+            </a:xfrm>
+            <a:prstGeom prst="rect">
+              <a:avLst/>
+            </a:prstGeom>
+            <a:noFill/>
+          </p:spPr>
+          <p:txBody>
+            <a:bodyPr wrap="square" rtlCol="0">
+              <a:spAutoFit/>
+            </a:bodyPr>
+            <a:lstStyle/>
+            <a:p>
+              <a:pPr algn="ctr"/>
+              <a:r>
+                <a:rPr lang="en-US" altLang="zh-CN" sz="1100" b="1" dirty="0"/>
+                <a:t>×2</a:t>
+              </a:r>
+              <a:endParaRPr lang="zh-CN" altLang="en-US" sz="1100" b="1" dirty="0"/>
+            </a:p>
+          </p:txBody>
+        </p:sp>
+        <p:cxnSp>
+          <p:nvCxnSpPr>
+            <p:cNvPr id="92" name="直接箭头连接符 91">
+              <a:extLst>
+                <a:ext uri="{FF2B5EF4-FFF2-40B4-BE49-F238E27FC236}">
+                  <a16:creationId xmlns:a16="http://schemas.microsoft.com/office/drawing/2014/main" id="{EB7F8FC6-A5C7-E736-3EE9-79DAFE30EF15}"/>
+                </a:ext>
+              </a:extLst>
+            </p:cNvPr>
+            <p:cNvCxnSpPr>
+              <a:cxnSpLocks/>
+            </p:cNvCxnSpPr>
+            <p:nvPr/>
+          </p:nvCxnSpPr>
+          <p:spPr>
+            <a:xfrm flipH="1">
+              <a:off x="3902139" y="5506115"/>
+              <a:ext cx="272143" cy="0"/>
+            </a:xfrm>
+            <a:prstGeom prst="straightConnector1">
+              <a:avLst/>
+            </a:prstGeom>
+            <a:ln w="19050">
+              <a:tailEnd type="triangle"/>
+            </a:ln>
+          </p:spPr>
+          <p:style>
+            <a:lnRef idx="1">
+              <a:schemeClr val="dk1"/>
+            </a:lnRef>
+            <a:fillRef idx="0">
+              <a:schemeClr val="dk1"/>
+            </a:fillRef>
+            <a:effectRef idx="0">
+              <a:schemeClr val="dk1"/>
+            </a:effectRef>
+            <a:fontRef idx="minor">
+              <a:schemeClr val="tx1"/>
+            </a:fontRef>
+          </p:style>
+        </p:cxnSp>
+        <p:cxnSp>
+          <p:nvCxnSpPr>
+            <p:cNvPr id="93" name="直接箭头连接符 92">
+              <a:extLst>
+                <a:ext uri="{FF2B5EF4-FFF2-40B4-BE49-F238E27FC236}">
+                  <a16:creationId xmlns:a16="http://schemas.microsoft.com/office/drawing/2014/main" id="{3832176A-BF32-145E-66E8-7D04BDD4AEB2}"/>
+                </a:ext>
+              </a:extLst>
+            </p:cNvPr>
+            <p:cNvCxnSpPr>
+              <a:cxnSpLocks/>
+            </p:cNvCxnSpPr>
+            <p:nvPr/>
+          </p:nvCxnSpPr>
+          <p:spPr>
+            <a:xfrm flipH="1">
+              <a:off x="5230191" y="5225118"/>
+              <a:ext cx="272143" cy="0"/>
+            </a:xfrm>
+            <a:prstGeom prst="straightConnector1">
+              <a:avLst/>
+            </a:prstGeom>
+            <a:ln w="19050">
+              <a:tailEnd type="triangle"/>
+            </a:ln>
+          </p:spPr>
+          <p:style>
+            <a:lnRef idx="1">
+              <a:schemeClr val="dk1"/>
+            </a:lnRef>
+            <a:fillRef idx="0">
+              <a:schemeClr val="dk1"/>
+            </a:fillRef>
+            <a:effectRef idx="0">
+              <a:schemeClr val="dk1"/>
+            </a:effectRef>
+            <a:fontRef idx="minor">
+              <a:schemeClr val="tx1"/>
+            </a:fontRef>
+          </p:style>
+        </p:cxnSp>
+        <p:cxnSp>
+          <p:nvCxnSpPr>
+            <p:cNvPr id="94" name="直接箭头连接符 93">
+              <a:extLst>
+                <a:ext uri="{FF2B5EF4-FFF2-40B4-BE49-F238E27FC236}">
+                  <a16:creationId xmlns:a16="http://schemas.microsoft.com/office/drawing/2014/main" id="{1F3379E8-093D-A6F6-40D4-9BBAB8EEB09F}"/>
+                </a:ext>
+              </a:extLst>
+            </p:cNvPr>
+            <p:cNvCxnSpPr>
+              <a:cxnSpLocks/>
+            </p:cNvCxnSpPr>
+            <p:nvPr/>
+          </p:nvCxnSpPr>
+          <p:spPr>
+            <a:xfrm flipH="1">
+              <a:off x="7352831" y="4880307"/>
+              <a:ext cx="272138" cy="0"/>
+            </a:xfrm>
+            <a:prstGeom prst="straightConnector1">
+              <a:avLst/>
+            </a:prstGeom>
+            <a:ln w="19050">
+              <a:tailEnd type="triangle"/>
+            </a:ln>
+          </p:spPr>
+          <p:style>
+            <a:lnRef idx="1">
+              <a:schemeClr val="dk1"/>
+            </a:lnRef>
+            <a:fillRef idx="0">
+              <a:schemeClr val="dk1"/>
+            </a:fillRef>
+            <a:effectRef idx="0">
+              <a:schemeClr val="dk1"/>
+            </a:effectRef>
+            <a:fontRef idx="minor">
+              <a:schemeClr val="tx1"/>
+            </a:fontRef>
+          </p:style>
+        </p:cxnSp>
+        <p:sp>
+          <p:nvSpPr>
+            <p:cNvPr id="95" name="矩形: 圆角 94">
+              <a:extLst>
+                <a:ext uri="{FF2B5EF4-FFF2-40B4-BE49-F238E27FC236}">
+                  <a16:creationId xmlns:a16="http://schemas.microsoft.com/office/drawing/2014/main" id="{9DF5D192-8FA6-F2B8-8350-2B498CD4F7A2}"/>
+                </a:ext>
+              </a:extLst>
+            </p:cNvPr>
+            <p:cNvSpPr/>
+            <p:nvPr/>
+          </p:nvSpPr>
+          <p:spPr>
+            <a:xfrm rot="10800000">
+              <a:off x="6960946" y="4303364"/>
+              <a:ext cx="391885" cy="1153886"/>
+            </a:xfrm>
+            <a:prstGeom prst="roundRect">
+              <a:avLst/>
+            </a:prstGeom>
+            <a:solidFill>
+              <a:srgbClr val="F4D35E"/>
+            </a:solidFill>
+            <a:ln w="19050">
+              <a:solidFill>
+                <a:schemeClr val="tx1"/>
+              </a:solidFill>
+            </a:ln>
+          </p:spPr>
+          <p:style>
+            <a:lnRef idx="2">
+              <a:schemeClr val="accent1">
+                <a:shade val="15000"/>
+              </a:schemeClr>
+            </a:lnRef>
+            <a:fillRef idx="1">
+              <a:schemeClr val="accent1"/>
+            </a:fillRef>
+            <a:effectRef idx="0">
+              <a:schemeClr val="accent1"/>
+            </a:effectRef>
+            <a:fontRef idx="minor">
+              <a:schemeClr val="lt1"/>
+            </a:fontRef>
+          </p:style>
+          <p:txBody>
+            <a:bodyPr vert="eaVert" rtlCol="0" anchor="ctr"/>
+            <a:lstStyle/>
+            <a:p>
+              <a:pPr algn="ctr"/>
+              <a:r>
+                <a:rPr lang="en-US" altLang="zh-CN" sz="1100" dirty="0">
+                  <a:solidFill>
+                    <a:schemeClr val="tx1"/>
+                  </a:solidFill>
+                </a:rPr>
+                <a:t>Average Pool</a:t>
+              </a:r>
+              <a:endParaRPr lang="zh-CN" altLang="en-US" sz="1100" dirty="0">
+                <a:solidFill>
+                  <a:schemeClr val="tx1"/>
+                </a:solidFill>
+              </a:endParaRPr>
+            </a:p>
+          </p:txBody>
+        </p:sp>
+        <p:sp>
+          <p:nvSpPr>
+            <p:cNvPr id="96" name="矩形: 圆角 95">
+              <a:extLst>
+                <a:ext uri="{FF2B5EF4-FFF2-40B4-BE49-F238E27FC236}">
+                  <a16:creationId xmlns:a16="http://schemas.microsoft.com/office/drawing/2014/main" id="{632C8182-5270-B884-432F-A6E2C7B61C9A}"/>
+                </a:ext>
+              </a:extLst>
+            </p:cNvPr>
+            <p:cNvSpPr/>
+            <p:nvPr/>
+          </p:nvSpPr>
+          <p:spPr>
+            <a:xfrm rot="10800000">
+              <a:off x="7624969" y="4303364"/>
+              <a:ext cx="550159" cy="1153886"/>
+            </a:xfrm>
+            <a:prstGeom prst="roundRect">
+              <a:avLst/>
+            </a:prstGeom>
+            <a:solidFill>
+              <a:srgbClr val="FAF0CA"/>
+            </a:solidFill>
+            <a:ln w="19050">
+              <a:solidFill>
+                <a:schemeClr val="tx1"/>
+              </a:solidFill>
+            </a:ln>
+          </p:spPr>
+          <p:style>
+            <a:lnRef idx="2">
+              <a:schemeClr val="accent1">
+                <a:shade val="15000"/>
+              </a:schemeClr>
+            </a:lnRef>
+            <a:fillRef idx="1">
+              <a:schemeClr val="accent1"/>
+            </a:fillRef>
+            <a:effectRef idx="0">
+              <a:schemeClr val="accent1"/>
+            </a:effectRef>
+            <a:fontRef idx="minor">
+              <a:schemeClr val="lt1"/>
+            </a:fontRef>
+          </p:style>
+          <p:txBody>
+            <a:bodyPr vert="eaVert" rtlCol="0" anchor="ctr"/>
+            <a:lstStyle/>
+            <a:p>
+              <a:pPr algn="ctr"/>
+              <a:r>
+                <a:rPr lang="en-US" altLang="zh-CN" sz="1100" dirty="0">
+                  <a:solidFill>
+                    <a:schemeClr val="tx1"/>
+                  </a:solidFill>
+                </a:rPr>
+                <a:t>ResBlock</a:t>
+              </a:r>
+            </a:p>
+            <a:p>
+              <a:pPr algn="ctr"/>
+              <a:r>
+                <a:rPr lang="en-US" altLang="zh-CN" sz="1100" dirty="0">
+                  <a:solidFill>
+                    <a:schemeClr val="tx1"/>
+                  </a:solidFill>
+                </a:rPr>
+                <a:t>SelfAttention</a:t>
+              </a:r>
+              <a:endParaRPr lang="zh-CN" altLang="en-US" sz="1100" dirty="0">
+                <a:solidFill>
+                  <a:schemeClr val="tx1"/>
+                </a:solidFill>
+              </a:endParaRPr>
+            </a:p>
+          </p:txBody>
+        </p:sp>
+        <p:sp>
+          <p:nvSpPr>
+            <p:cNvPr id="97" name="文本框 96">
+              <a:extLst>
+                <a:ext uri="{FF2B5EF4-FFF2-40B4-BE49-F238E27FC236}">
+                  <a16:creationId xmlns:a16="http://schemas.microsoft.com/office/drawing/2014/main" id="{5AD819A0-F400-D598-CC37-3441FD16270F}"/>
+                </a:ext>
+              </a:extLst>
+            </p:cNvPr>
+            <p:cNvSpPr txBox="1"/>
+            <p:nvPr/>
+          </p:nvSpPr>
+          <p:spPr>
+            <a:xfrm>
+              <a:off x="7940620" y="5457251"/>
+              <a:ext cx="391886" cy="261610"/>
+            </a:xfrm>
+            <a:prstGeom prst="rect">
+              <a:avLst/>
+            </a:prstGeom>
+            <a:noFill/>
+          </p:spPr>
+          <p:txBody>
+            <a:bodyPr wrap="square" rtlCol="0">
+              <a:spAutoFit/>
+            </a:bodyPr>
+            <a:lstStyle/>
+            <a:p>
+              <a:pPr algn="ctr"/>
+              <a:r>
+                <a:rPr lang="en-US" altLang="zh-CN" sz="1100" b="1" dirty="0"/>
+                <a:t>×2</a:t>
+              </a:r>
+              <a:endParaRPr lang="zh-CN" altLang="en-US" sz="1100" b="1" dirty="0"/>
+            </a:p>
+          </p:txBody>
+        </p:sp>
+        <p:cxnSp>
+          <p:nvCxnSpPr>
+            <p:cNvPr id="98" name="直接箭头连接符 97">
+              <a:extLst>
+                <a:ext uri="{FF2B5EF4-FFF2-40B4-BE49-F238E27FC236}">
+                  <a16:creationId xmlns:a16="http://schemas.microsoft.com/office/drawing/2014/main" id="{A301BF13-A1CE-C35B-E883-39D2306A06B5}"/>
+                </a:ext>
+              </a:extLst>
+            </p:cNvPr>
+            <p:cNvCxnSpPr>
+              <a:cxnSpLocks/>
+            </p:cNvCxnSpPr>
+            <p:nvPr/>
+          </p:nvCxnSpPr>
+          <p:spPr>
+            <a:xfrm flipH="1">
+              <a:off x="8823243" y="4610787"/>
+              <a:ext cx="272138" cy="0"/>
+            </a:xfrm>
+            <a:prstGeom prst="straightConnector1">
+              <a:avLst/>
+            </a:prstGeom>
+            <a:ln w="19050">
+              <a:tailEnd type="triangle"/>
+            </a:ln>
+          </p:spPr>
+          <p:style>
+            <a:lnRef idx="1">
+              <a:schemeClr val="dk1"/>
+            </a:lnRef>
+            <a:fillRef idx="0">
+              <a:schemeClr val="dk1"/>
+            </a:fillRef>
+            <a:effectRef idx="0">
+              <a:schemeClr val="dk1"/>
+            </a:effectRef>
+            <a:fontRef idx="minor">
+              <a:schemeClr val="tx1"/>
+            </a:fontRef>
+          </p:style>
+        </p:cxnSp>
+        <p:sp>
+          <p:nvSpPr>
+            <p:cNvPr id="99" name="矩形: 圆角 98">
+              <a:extLst>
+                <a:ext uri="{FF2B5EF4-FFF2-40B4-BE49-F238E27FC236}">
+                  <a16:creationId xmlns:a16="http://schemas.microsoft.com/office/drawing/2014/main" id="{006101E7-B419-F972-7EDF-4515C8660C4A}"/>
+                </a:ext>
+              </a:extLst>
+            </p:cNvPr>
+            <p:cNvSpPr/>
+            <p:nvPr/>
+          </p:nvSpPr>
+          <p:spPr>
+            <a:xfrm rot="10800000">
+              <a:off x="8431358" y="4033844"/>
+              <a:ext cx="391885" cy="1153886"/>
+            </a:xfrm>
+            <a:prstGeom prst="roundRect">
+              <a:avLst/>
+            </a:prstGeom>
+            <a:solidFill>
+              <a:srgbClr val="F4D35E"/>
+            </a:solidFill>
+            <a:ln w="19050">
+              <a:solidFill>
+                <a:schemeClr val="tx1"/>
+              </a:solidFill>
+            </a:ln>
+          </p:spPr>
+          <p:style>
+            <a:lnRef idx="2">
+              <a:schemeClr val="accent1">
+                <a:shade val="15000"/>
+              </a:schemeClr>
+            </a:lnRef>
+            <a:fillRef idx="1">
+              <a:schemeClr val="accent1"/>
+            </a:fillRef>
+            <a:effectRef idx="0">
+              <a:schemeClr val="accent1"/>
+            </a:effectRef>
+            <a:fontRef idx="minor">
+              <a:schemeClr val="lt1"/>
+            </a:fontRef>
+          </p:style>
+          <p:txBody>
+            <a:bodyPr vert="eaVert" rtlCol="0" anchor="ctr"/>
+            <a:lstStyle/>
+            <a:p>
+              <a:pPr algn="ctr"/>
+              <a:r>
+                <a:rPr lang="en-US" altLang="zh-CN" sz="1100" dirty="0">
+                  <a:solidFill>
+                    <a:schemeClr val="tx1"/>
+                  </a:solidFill>
+                </a:rPr>
+                <a:t>Average Pool</a:t>
+              </a:r>
+              <a:endParaRPr lang="zh-CN" altLang="en-US" sz="1100" dirty="0">
+                <a:solidFill>
+                  <a:schemeClr val="tx1"/>
+                </a:solidFill>
+              </a:endParaRPr>
+            </a:p>
+          </p:txBody>
+        </p:sp>
+        <p:sp>
+          <p:nvSpPr>
+            <p:cNvPr id="100" name="矩形: 圆角 99">
+              <a:extLst>
+                <a:ext uri="{FF2B5EF4-FFF2-40B4-BE49-F238E27FC236}">
+                  <a16:creationId xmlns:a16="http://schemas.microsoft.com/office/drawing/2014/main" id="{6DCAE2E6-7362-3E71-6141-53BD5B4C1B7E}"/>
+                </a:ext>
+              </a:extLst>
+            </p:cNvPr>
+            <p:cNvSpPr/>
+            <p:nvPr/>
+          </p:nvSpPr>
+          <p:spPr>
+            <a:xfrm rot="10800000">
+              <a:off x="9095381" y="4033844"/>
+              <a:ext cx="550159" cy="1153886"/>
+            </a:xfrm>
+            <a:prstGeom prst="roundRect">
+              <a:avLst/>
+            </a:prstGeom>
+            <a:solidFill>
+              <a:srgbClr val="FAF0CA"/>
+            </a:solidFill>
+            <a:ln w="19050">
+              <a:solidFill>
+                <a:schemeClr val="tx1"/>
+              </a:solidFill>
+            </a:ln>
+          </p:spPr>
+          <p:style>
+            <a:lnRef idx="2">
+              <a:schemeClr val="accent1">
+                <a:shade val="15000"/>
+              </a:schemeClr>
+            </a:lnRef>
+            <a:fillRef idx="1">
+              <a:schemeClr val="accent1"/>
+            </a:fillRef>
+            <a:effectRef idx="0">
+              <a:schemeClr val="accent1"/>
+            </a:effectRef>
+            <a:fontRef idx="minor">
+              <a:schemeClr val="lt1"/>
+            </a:fontRef>
+          </p:style>
+          <p:txBody>
+            <a:bodyPr vert="eaVert" rtlCol="0" anchor="ctr"/>
+            <a:lstStyle/>
+            <a:p>
+              <a:pPr algn="ctr"/>
+              <a:r>
+                <a:rPr lang="en-US" altLang="zh-CN" sz="1100" dirty="0">
+                  <a:solidFill>
+                    <a:schemeClr val="tx1"/>
+                  </a:solidFill>
+                </a:rPr>
+                <a:t>ResBlock</a:t>
+              </a:r>
+            </a:p>
+            <a:p>
+              <a:pPr algn="ctr"/>
+              <a:r>
+                <a:rPr lang="en-US" altLang="zh-CN" sz="1100" dirty="0">
+                  <a:solidFill>
+                    <a:schemeClr val="tx1"/>
+                  </a:solidFill>
+                </a:rPr>
+                <a:t>SelfAttention</a:t>
+              </a:r>
+              <a:endParaRPr lang="zh-CN" altLang="en-US" sz="1100" dirty="0">
+                <a:solidFill>
+                  <a:schemeClr val="tx1"/>
+                </a:solidFill>
+              </a:endParaRPr>
+            </a:p>
+          </p:txBody>
+        </p:sp>
+        <p:sp>
+          <p:nvSpPr>
+            <p:cNvPr id="101" name="文本框 100">
+              <a:extLst>
+                <a:ext uri="{FF2B5EF4-FFF2-40B4-BE49-F238E27FC236}">
+                  <a16:creationId xmlns:a16="http://schemas.microsoft.com/office/drawing/2014/main" id="{7398FECF-9934-A97A-3436-76B4F856CC0B}"/>
+                </a:ext>
+              </a:extLst>
+            </p:cNvPr>
+            <p:cNvSpPr txBox="1"/>
+            <p:nvPr/>
+          </p:nvSpPr>
+          <p:spPr>
+            <a:xfrm>
+              <a:off x="9411032" y="5187731"/>
+              <a:ext cx="391886" cy="261610"/>
+            </a:xfrm>
+            <a:prstGeom prst="rect">
+              <a:avLst/>
+            </a:prstGeom>
+            <a:noFill/>
+          </p:spPr>
+          <p:txBody>
+            <a:bodyPr wrap="square" rtlCol="0">
+              <a:spAutoFit/>
+            </a:bodyPr>
+            <a:lstStyle/>
+            <a:p>
+              <a:pPr algn="ctr"/>
+              <a:r>
+                <a:rPr lang="en-US" altLang="zh-CN" sz="1100" b="1" dirty="0"/>
+                <a:t>×2</a:t>
+              </a:r>
+              <a:endParaRPr lang="zh-CN" altLang="en-US" sz="1100" b="1" dirty="0"/>
+            </a:p>
+          </p:txBody>
+        </p:sp>
+        <p:sp>
+          <p:nvSpPr>
+            <p:cNvPr id="102" name="文本框 101">
+              <a:extLst>
+                <a:ext uri="{FF2B5EF4-FFF2-40B4-BE49-F238E27FC236}">
+                  <a16:creationId xmlns:a16="http://schemas.microsoft.com/office/drawing/2014/main" id="{07B901B4-F745-9D43-B6C8-A0446F60459E}"/>
+                </a:ext>
+              </a:extLst>
+            </p:cNvPr>
+            <p:cNvSpPr txBox="1"/>
+            <p:nvPr/>
+          </p:nvSpPr>
+          <p:spPr>
+            <a:xfrm>
+              <a:off x="6937359" y="3818401"/>
+              <a:ext cx="1079500" cy="430887"/>
+            </a:xfrm>
+            <a:prstGeom prst="rect">
+              <a:avLst/>
+            </a:prstGeom>
+            <a:noFill/>
+          </p:spPr>
+          <p:txBody>
+            <a:bodyPr wrap="square" rtlCol="0">
+              <a:spAutoFit/>
+            </a:bodyPr>
+            <a:lstStyle/>
+            <a:p>
+              <a:pPr algn="ctr"/>
+              <a:r>
+                <a:rPr lang="en-US" altLang="zh-CN" sz="1100" dirty="0"/>
+                <a:t>Up 5</a:t>
+              </a:r>
+            </a:p>
+            <a:p>
+              <a:pPr algn="ctr"/>
+              <a:r>
+                <a:rPr lang="en-US" altLang="zh-CN" sz="1100" dirty="0"/>
+                <a:t>(16 × 16)</a:t>
+              </a:r>
+              <a:endParaRPr lang="zh-CN" altLang="en-US" sz="1100" dirty="0"/>
+            </a:p>
+          </p:txBody>
+        </p:sp>
+        <p:sp>
+          <p:nvSpPr>
+            <p:cNvPr id="103" name="文本框 102">
+              <a:extLst>
+                <a:ext uri="{FF2B5EF4-FFF2-40B4-BE49-F238E27FC236}">
+                  <a16:creationId xmlns:a16="http://schemas.microsoft.com/office/drawing/2014/main" id="{DE96EC09-D3E4-8735-A390-1BD7B7C050F5}"/>
+                </a:ext>
+              </a:extLst>
+            </p:cNvPr>
+            <p:cNvSpPr txBox="1"/>
+            <p:nvPr/>
+          </p:nvSpPr>
+          <p:spPr>
+            <a:xfrm>
+              <a:off x="8431358" y="3529930"/>
+              <a:ext cx="1079500" cy="430887"/>
+            </a:xfrm>
+            <a:prstGeom prst="rect">
+              <a:avLst/>
+            </a:prstGeom>
+            <a:noFill/>
+          </p:spPr>
+          <p:txBody>
+            <a:bodyPr wrap="square" rtlCol="0">
+              <a:spAutoFit/>
+            </a:bodyPr>
+            <a:lstStyle/>
+            <a:p>
+              <a:pPr algn="ctr"/>
+              <a:r>
+                <a:rPr lang="en-US" altLang="zh-CN" sz="1100" dirty="0"/>
+                <a:t>Up 6</a:t>
+              </a:r>
+            </a:p>
+            <a:p>
+              <a:pPr algn="ctr"/>
+              <a:r>
+                <a:rPr lang="en-US" altLang="zh-CN" sz="1100" dirty="0"/>
+                <a:t>(8 × 8)</a:t>
+              </a:r>
+              <a:endParaRPr lang="zh-CN" altLang="en-US" sz="1100" dirty="0"/>
+            </a:p>
+          </p:txBody>
+        </p:sp>
+        <p:cxnSp>
+          <p:nvCxnSpPr>
+            <p:cNvPr id="104" name="直接箭头连接符 103">
+              <a:extLst>
+                <a:ext uri="{FF2B5EF4-FFF2-40B4-BE49-F238E27FC236}">
+                  <a16:creationId xmlns:a16="http://schemas.microsoft.com/office/drawing/2014/main" id="{37BF312F-9632-228D-A7EF-585AC6DF872A}"/>
+                </a:ext>
+              </a:extLst>
+            </p:cNvPr>
+            <p:cNvCxnSpPr>
+              <a:cxnSpLocks/>
+            </p:cNvCxnSpPr>
+            <p:nvPr/>
+          </p:nvCxnSpPr>
+          <p:spPr>
+            <a:xfrm flipH="1">
+              <a:off x="6704721" y="4969207"/>
+              <a:ext cx="272143" cy="0"/>
+            </a:xfrm>
+            <a:prstGeom prst="straightConnector1">
+              <a:avLst/>
+            </a:prstGeom>
+            <a:ln w="19050">
+              <a:tailEnd type="triangle"/>
+            </a:ln>
+          </p:spPr>
+          <p:style>
+            <a:lnRef idx="1">
+              <a:schemeClr val="dk1"/>
+            </a:lnRef>
+            <a:fillRef idx="0">
+              <a:schemeClr val="dk1"/>
+            </a:fillRef>
+            <a:effectRef idx="0">
+              <a:schemeClr val="dk1"/>
+            </a:effectRef>
+            <a:fontRef idx="minor">
+              <a:schemeClr val="tx1"/>
+            </a:fontRef>
+          </p:style>
+        </p:cxnSp>
+        <p:cxnSp>
+          <p:nvCxnSpPr>
+            <p:cNvPr id="105" name="直接箭头连接符 104">
+              <a:extLst>
+                <a:ext uri="{FF2B5EF4-FFF2-40B4-BE49-F238E27FC236}">
+                  <a16:creationId xmlns:a16="http://schemas.microsoft.com/office/drawing/2014/main" id="{F725CEB9-8EC4-B11A-0721-D8F3FAD8A669}"/>
+                </a:ext>
+              </a:extLst>
+            </p:cNvPr>
+            <p:cNvCxnSpPr>
+              <a:cxnSpLocks/>
+            </p:cNvCxnSpPr>
+            <p:nvPr/>
+          </p:nvCxnSpPr>
+          <p:spPr>
+            <a:xfrm flipH="1">
+              <a:off x="8174662" y="4756024"/>
+              <a:ext cx="272143" cy="0"/>
+            </a:xfrm>
+            <a:prstGeom prst="straightConnector1">
+              <a:avLst/>
+            </a:prstGeom>
+            <a:ln w="19050">
+              <a:tailEnd type="triangle"/>
+            </a:ln>
+          </p:spPr>
+          <p:style>
+            <a:lnRef idx="1">
+              <a:schemeClr val="dk1"/>
+            </a:lnRef>
+            <a:fillRef idx="0">
+              <a:schemeClr val="dk1"/>
+            </a:fillRef>
+            <a:effectRef idx="0">
+              <a:schemeClr val="dk1"/>
+            </a:effectRef>
+            <a:fontRef idx="minor">
+              <a:schemeClr val="tx1"/>
+            </a:fontRef>
+          </p:style>
+        </p:cxnSp>
+      </p:grpSp>
+      <p:sp>
+        <p:nvSpPr>
+          <p:cNvPr id="107" name="矩形: 圆角 106">
+            <a:extLst>
+              <a:ext uri="{FF2B5EF4-FFF2-40B4-BE49-F238E27FC236}">
+                <a16:creationId xmlns:a16="http://schemas.microsoft.com/office/drawing/2014/main" id="{F2A38887-0E37-A80A-5367-B20D671E4300}"/>
+              </a:ext>
+            </a:extLst>
+          </p:cNvPr>
+          <p:cNvSpPr/>
+          <p:nvPr/>
+        </p:nvSpPr>
+        <p:spPr>
+          <a:xfrm rot="10800000">
+            <a:off x="10056440" y="2816498"/>
+            <a:ext cx="841289" cy="1225004"/>
+          </a:xfrm>
+          <a:prstGeom prst="roundRect">
+            <a:avLst/>
+          </a:prstGeom>
+          <a:solidFill>
+            <a:schemeClr val="accent2">
+              <a:lumMod val="20000"/>
+              <a:lumOff val="80000"/>
+            </a:schemeClr>
+          </a:solidFill>
+          <a:ln w="19050">
+            <a:solidFill>
+              <a:schemeClr val="tx1"/>
+            </a:solidFill>
+          </a:ln>
+        </p:spPr>
+        <p:style>
+          <a:lnRef idx="2">
+            <a:schemeClr val="accent1">
+              <a:shade val="15000"/>
+            </a:schemeClr>
+          </a:lnRef>
+          <a:fillRef idx="1">
+            <a:schemeClr val="accent1"/>
+          </a:fillRef>
+          <a:effectRef idx="0">
+            <a:schemeClr val="accent1"/>
+          </a:effectRef>
+          <a:fontRef idx="minor">
+            <a:schemeClr val="lt1"/>
+          </a:fontRef>
+        </p:style>
+        <p:txBody>
+          <a:bodyPr vert="eaVert" rtlCol="0" anchor="ctr"/>
+          <a:lstStyle/>
+          <a:p>
+            <a:pPr algn="ctr">
+              <a:lnSpc>
+                <a:spcPct val="150000"/>
+              </a:lnSpc>
+            </a:pPr>
+            <a:r>
+              <a:rPr lang="en-US" altLang="zh-CN" sz="1100" dirty="0">
+                <a:solidFill>
+                  <a:schemeClr val="tx1"/>
+                </a:solidFill>
+              </a:rPr>
+              <a:t>ResBlock</a:t>
+            </a:r>
+          </a:p>
+          <a:p>
+            <a:pPr algn="ctr">
+              <a:lnSpc>
+                <a:spcPct val="150000"/>
+              </a:lnSpc>
+            </a:pPr>
+            <a:r>
+              <a:rPr lang="en-US" altLang="zh-CN" sz="1100" dirty="0">
+                <a:solidFill>
+                  <a:schemeClr val="tx1"/>
+                </a:solidFill>
+              </a:rPr>
+              <a:t>SelfAttention</a:t>
+            </a:r>
+          </a:p>
+          <a:p>
+            <a:pPr algn="ctr">
+              <a:lnSpc>
+                <a:spcPct val="150000"/>
+              </a:lnSpc>
+            </a:pPr>
+            <a:r>
+              <a:rPr lang="en-US" altLang="zh-CN" sz="1100" dirty="0">
+                <a:solidFill>
+                  <a:schemeClr val="tx1"/>
+                </a:solidFill>
+              </a:rPr>
+              <a:t>ResBlock</a:t>
+            </a:r>
+          </a:p>
+        </p:txBody>
+      </p:sp>
+      <p:sp>
+        <p:nvSpPr>
+          <p:cNvPr id="108" name="文本框 107">
+            <a:extLst>
+              <a:ext uri="{FF2B5EF4-FFF2-40B4-BE49-F238E27FC236}">
+                <a16:creationId xmlns:a16="http://schemas.microsoft.com/office/drawing/2014/main" id="{39A7F582-E2FE-21F0-ABFB-96C15F76E697}"/>
+              </a:ext>
+            </a:extLst>
+          </p:cNvPr>
+          <p:cNvSpPr txBox="1"/>
+          <p:nvPr/>
+        </p:nvSpPr>
+        <p:spPr>
+          <a:xfrm>
+            <a:off x="10897729" y="3213555"/>
+            <a:ext cx="1079500" cy="430887"/>
+          </a:xfrm>
+          <a:prstGeom prst="rect">
+            <a:avLst/>
+          </a:prstGeom>
+          <a:noFill/>
+        </p:spPr>
+        <p:txBody>
+          <a:bodyPr wrap="square" rtlCol="0">
+            <a:spAutoFit/>
+          </a:bodyPr>
+          <a:lstStyle/>
+          <a:p>
+            <a:pPr algn="ctr"/>
+            <a:r>
+              <a:rPr lang="en-US" altLang="zh-CN" sz="1100" dirty="0"/>
+              <a:t>Mid </a:t>
+            </a:r>
+          </a:p>
+          <a:p>
+            <a:pPr algn="ctr"/>
+            <a:r>
+              <a:rPr lang="en-US" altLang="zh-CN" sz="1100" dirty="0"/>
+              <a:t>(8 × 8)</a:t>
+            </a:r>
+            <a:endParaRPr lang="zh-CN" altLang="en-US" sz="1100" dirty="0"/>
+          </a:p>
+        </p:txBody>
+      </p:sp>
+      <p:cxnSp>
+        <p:nvCxnSpPr>
+          <p:cNvPr id="110" name="连接符: 肘形 109">
+            <a:extLst>
+              <a:ext uri="{FF2B5EF4-FFF2-40B4-BE49-F238E27FC236}">
+                <a16:creationId xmlns:a16="http://schemas.microsoft.com/office/drawing/2014/main" id="{F0A8D578-CB5C-5B2D-3503-86E1725E0CD5}"/>
+              </a:ext>
+            </a:extLst>
+          </p:cNvPr>
+          <p:cNvCxnSpPr>
+            <a:stCxn id="57" idx="1"/>
+            <a:endCxn id="107" idx="2"/>
+          </p:cNvCxnSpPr>
+          <p:nvPr/>
+        </p:nvCxnSpPr>
+        <p:spPr>
+          <a:xfrm>
+            <a:off x="9653329" y="2320560"/>
+            <a:ext cx="823755" cy="495938"/>
+          </a:xfrm>
+          <a:prstGeom prst="bentConnector2">
+            <a:avLst/>
+          </a:prstGeom>
+          <a:ln>
+            <a:tailEnd type="triangle"/>
+          </a:ln>
+        </p:spPr>
+        <p:style>
+          <a:lnRef idx="1">
+            <a:schemeClr val="dk1"/>
+          </a:lnRef>
+          <a:fillRef idx="0">
+            <a:schemeClr val="dk1"/>
+          </a:fillRef>
+          <a:effectRef idx="0">
+            <a:schemeClr val="dk1"/>
+          </a:effectRef>
+          <a:fontRef idx="minor">
+            <a:schemeClr val="tx1"/>
+          </a:fontRef>
+        </p:style>
+      </p:cxnSp>
+      <p:cxnSp>
+        <p:nvCxnSpPr>
+          <p:cNvPr id="111" name="连接符: 肘形 110">
+            <a:extLst>
+              <a:ext uri="{FF2B5EF4-FFF2-40B4-BE49-F238E27FC236}">
+                <a16:creationId xmlns:a16="http://schemas.microsoft.com/office/drawing/2014/main" id="{CB605822-00E1-E922-75C4-AB59A31E9DC5}"/>
+              </a:ext>
+            </a:extLst>
+          </p:cNvPr>
+          <p:cNvCxnSpPr>
+            <a:cxnSpLocks/>
+            <a:stCxn id="107" idx="0"/>
+            <a:endCxn id="100" idx="1"/>
+          </p:cNvCxnSpPr>
+          <p:nvPr/>
+        </p:nvCxnSpPr>
+        <p:spPr>
+          <a:xfrm rot="5400000">
+            <a:off x="9819606" y="3882826"/>
+            <a:ext cx="498803" cy="816155"/>
+          </a:xfrm>
+          <a:prstGeom prst="bentConnector2">
+            <a:avLst/>
+          </a:prstGeom>
+          <a:ln>
+            <a:tailEnd type="triangle"/>
+          </a:ln>
+        </p:spPr>
+        <p:style>
+          <a:lnRef idx="1">
+            <a:schemeClr val="dk1"/>
+          </a:lnRef>
+          <a:fillRef idx="0">
+            <a:schemeClr val="dk1"/>
+          </a:fillRef>
+          <a:effectRef idx="0">
+            <a:schemeClr val="dk1"/>
+          </a:effectRef>
+          <a:fontRef idx="minor">
+            <a:schemeClr val="tx1"/>
+          </a:fontRef>
+        </p:style>
+      </p:cxnSp>
+      <p:cxnSp>
+        <p:nvCxnSpPr>
+          <p:cNvPr id="114" name="直接箭头连接符 113">
+            <a:extLst>
+              <a:ext uri="{FF2B5EF4-FFF2-40B4-BE49-F238E27FC236}">
+                <a16:creationId xmlns:a16="http://schemas.microsoft.com/office/drawing/2014/main" id="{823B72D4-7E3D-6986-A1E7-C81DBE796849}"/>
+              </a:ext>
+            </a:extLst>
+          </p:cNvPr>
+          <p:cNvCxnSpPr>
+            <a:cxnSpLocks/>
+            <a:stCxn id="57" idx="0"/>
+            <a:endCxn id="100" idx="2"/>
+          </p:cNvCxnSpPr>
+          <p:nvPr/>
+        </p:nvCxnSpPr>
+        <p:spPr>
+          <a:xfrm>
+            <a:off x="9378249" y="2897503"/>
+            <a:ext cx="7600" cy="1065859"/>
+          </a:xfrm>
+          <a:prstGeom prst="straightConnector1">
+            <a:avLst/>
+          </a:prstGeom>
+          <a:ln w="19050">
+            <a:prstDash val="sysDash"/>
+            <a:tailEnd type="triangle"/>
+          </a:ln>
+        </p:spPr>
+        <p:style>
+          <a:lnRef idx="1">
+            <a:schemeClr val="dk1"/>
+          </a:lnRef>
+          <a:fillRef idx="0">
+            <a:schemeClr val="dk1"/>
+          </a:fillRef>
+          <a:effectRef idx="0">
+            <a:schemeClr val="dk1"/>
+          </a:effectRef>
+          <a:fontRef idx="minor">
+            <a:schemeClr val="tx1"/>
+          </a:fontRef>
+        </p:style>
+      </p:cxnSp>
+      <p:cxnSp>
+        <p:nvCxnSpPr>
+          <p:cNvPr id="118" name="直接箭头连接符 117">
+            <a:extLst>
+              <a:ext uri="{FF2B5EF4-FFF2-40B4-BE49-F238E27FC236}">
+                <a16:creationId xmlns:a16="http://schemas.microsoft.com/office/drawing/2014/main" id="{21E11A29-5635-2229-7B8D-986A08E1C018}"/>
+              </a:ext>
+            </a:extLst>
+          </p:cNvPr>
+          <p:cNvCxnSpPr>
+            <a:cxnSpLocks/>
+            <a:stCxn id="53" idx="0"/>
+            <a:endCxn id="96" idx="2"/>
+          </p:cNvCxnSpPr>
+          <p:nvPr/>
+        </p:nvCxnSpPr>
+        <p:spPr>
+          <a:xfrm>
+            <a:off x="7907837" y="2627983"/>
+            <a:ext cx="7600" cy="1604899"/>
+          </a:xfrm>
+          <a:prstGeom prst="straightConnector1">
+            <a:avLst/>
+          </a:prstGeom>
+          <a:ln w="19050">
+            <a:prstDash val="sysDash"/>
+            <a:tailEnd type="triangle"/>
+          </a:ln>
+        </p:spPr>
+        <p:style>
+          <a:lnRef idx="1">
+            <a:schemeClr val="dk1"/>
+          </a:lnRef>
+          <a:fillRef idx="0">
+            <a:schemeClr val="dk1"/>
+          </a:fillRef>
+          <a:effectRef idx="0">
+            <a:schemeClr val="dk1"/>
+          </a:effectRef>
+          <a:fontRef idx="minor">
+            <a:schemeClr val="tx1"/>
+          </a:fontRef>
+        </p:style>
+      </p:cxnSp>
+      <p:cxnSp>
+        <p:nvCxnSpPr>
+          <p:cNvPr id="121" name="直接箭头连接符 120">
+            <a:extLst>
+              <a:ext uri="{FF2B5EF4-FFF2-40B4-BE49-F238E27FC236}">
+                <a16:creationId xmlns:a16="http://schemas.microsoft.com/office/drawing/2014/main" id="{8DB6DABC-E9EF-9FDE-94DE-D2E941E350C8}"/>
+              </a:ext>
+            </a:extLst>
+          </p:cNvPr>
+          <p:cNvCxnSpPr>
+            <a:cxnSpLocks/>
+            <a:endCxn id="87" idx="2"/>
+          </p:cNvCxnSpPr>
+          <p:nvPr/>
+        </p:nvCxnSpPr>
+        <p:spPr>
+          <a:xfrm>
+            <a:off x="6445025" y="2420888"/>
+            <a:ext cx="5" cy="2012635"/>
+          </a:xfrm>
+          <a:prstGeom prst="straightConnector1">
+            <a:avLst/>
+          </a:prstGeom>
+          <a:ln w="19050">
+            <a:prstDash val="sysDash"/>
+            <a:tailEnd type="triangle"/>
+          </a:ln>
+        </p:spPr>
+        <p:style>
+          <a:lnRef idx="1">
+            <a:schemeClr val="dk1"/>
+          </a:lnRef>
+          <a:fillRef idx="0">
+            <a:schemeClr val="dk1"/>
+          </a:fillRef>
+          <a:effectRef idx="0">
+            <a:schemeClr val="dk1"/>
+          </a:effectRef>
+          <a:fontRef idx="minor">
+            <a:schemeClr val="tx1"/>
+          </a:fontRef>
+        </p:style>
+      </p:cxnSp>
+      <p:cxnSp>
+        <p:nvCxnSpPr>
+          <p:cNvPr id="124" name="直接箭头连接符 123">
+            <a:extLst>
+              <a:ext uri="{FF2B5EF4-FFF2-40B4-BE49-F238E27FC236}">
+                <a16:creationId xmlns:a16="http://schemas.microsoft.com/office/drawing/2014/main" id="{B2AF3B6F-DDF7-FD68-D646-0EF80957254C}"/>
+              </a:ext>
+            </a:extLst>
+          </p:cNvPr>
+          <p:cNvCxnSpPr>
+            <a:cxnSpLocks/>
+            <a:stCxn id="40" idx="0"/>
+            <a:endCxn id="84" idx="2"/>
+          </p:cNvCxnSpPr>
+          <p:nvPr/>
+        </p:nvCxnSpPr>
+        <p:spPr>
+          <a:xfrm>
+            <a:off x="5042037" y="2171101"/>
+            <a:ext cx="7600" cy="2518663"/>
+          </a:xfrm>
+          <a:prstGeom prst="straightConnector1">
+            <a:avLst/>
+          </a:prstGeom>
+          <a:ln w="19050">
+            <a:prstDash val="sysDash"/>
+            <a:tailEnd type="triangle"/>
+          </a:ln>
+        </p:spPr>
+        <p:style>
+          <a:lnRef idx="1">
+            <a:schemeClr val="dk1"/>
+          </a:lnRef>
+          <a:fillRef idx="0">
+            <a:schemeClr val="dk1"/>
+          </a:fillRef>
+          <a:effectRef idx="0">
+            <a:schemeClr val="dk1"/>
+          </a:effectRef>
+          <a:fontRef idx="minor">
+            <a:schemeClr val="tx1"/>
+          </a:fontRef>
+        </p:style>
+      </p:cxnSp>
+      <p:cxnSp>
+        <p:nvCxnSpPr>
+          <p:cNvPr id="127" name="直接箭头连接符 126">
+            <a:extLst>
+              <a:ext uri="{FF2B5EF4-FFF2-40B4-BE49-F238E27FC236}">
+                <a16:creationId xmlns:a16="http://schemas.microsoft.com/office/drawing/2014/main" id="{7FC750CF-8CAE-A93C-B364-80880993DEA8}"/>
+              </a:ext>
+            </a:extLst>
+          </p:cNvPr>
+          <p:cNvCxnSpPr>
+            <a:cxnSpLocks/>
+            <a:stCxn id="30" idx="0"/>
+            <a:endCxn id="76" idx="2"/>
+          </p:cNvCxnSpPr>
+          <p:nvPr/>
+        </p:nvCxnSpPr>
+        <p:spPr>
+          <a:xfrm>
+            <a:off x="3713987" y="1850399"/>
+            <a:ext cx="7600" cy="3160067"/>
+          </a:xfrm>
+          <a:prstGeom prst="straightConnector1">
+            <a:avLst/>
+          </a:prstGeom>
+          <a:ln w="19050">
+            <a:prstDash val="sysDash"/>
+            <a:tailEnd type="triangle"/>
+          </a:ln>
+        </p:spPr>
+        <p:style>
+          <a:lnRef idx="1">
+            <a:schemeClr val="dk1"/>
+          </a:lnRef>
+          <a:fillRef idx="0">
+            <a:schemeClr val="dk1"/>
+          </a:fillRef>
+          <a:effectRef idx="0">
+            <a:schemeClr val="dk1"/>
+          </a:effectRef>
+          <a:fontRef idx="minor">
+            <a:schemeClr val="tx1"/>
+          </a:fontRef>
+        </p:style>
+      </p:cxnSp>
+      <p:cxnSp>
+        <p:nvCxnSpPr>
+          <p:cNvPr id="130" name="直接箭头连接符 129">
+            <a:extLst>
+              <a:ext uri="{FF2B5EF4-FFF2-40B4-BE49-F238E27FC236}">
+                <a16:creationId xmlns:a16="http://schemas.microsoft.com/office/drawing/2014/main" id="{0C4EA4D2-1070-02E5-0185-62E6C8FD4D71}"/>
+              </a:ext>
+            </a:extLst>
+          </p:cNvPr>
+          <p:cNvCxnSpPr>
+            <a:cxnSpLocks/>
+            <a:stCxn id="23" idx="0"/>
+            <a:endCxn id="71" idx="2"/>
+          </p:cNvCxnSpPr>
+          <p:nvPr/>
+        </p:nvCxnSpPr>
+        <p:spPr>
+          <a:xfrm>
+            <a:off x="2385938" y="1624348"/>
+            <a:ext cx="7600" cy="3612169"/>
+          </a:xfrm>
+          <a:prstGeom prst="straightConnector1">
+            <a:avLst/>
+          </a:prstGeom>
+          <a:ln w="19050">
+            <a:prstDash val="sysDash"/>
+            <a:tailEnd type="triangle"/>
+          </a:ln>
+        </p:spPr>
+        <p:style>
+          <a:lnRef idx="1">
+            <a:schemeClr val="dk1"/>
+          </a:lnRef>
+          <a:fillRef idx="0">
+            <a:schemeClr val="dk1"/>
+          </a:fillRef>
+          <a:effectRef idx="0">
+            <a:schemeClr val="dk1"/>
+          </a:effectRef>
+          <a:fontRef idx="minor">
+            <a:schemeClr val="tx1"/>
+          </a:fontRef>
+        </p:style>
+      </p:cxnSp>
+      <p:cxnSp>
+        <p:nvCxnSpPr>
+          <p:cNvPr id="133" name="直接箭头连接符 132">
+            <a:extLst>
+              <a:ext uri="{FF2B5EF4-FFF2-40B4-BE49-F238E27FC236}">
+                <a16:creationId xmlns:a16="http://schemas.microsoft.com/office/drawing/2014/main" id="{ADC18930-21C0-34B1-B692-A17B9A0508E8}"/>
+              </a:ext>
+            </a:extLst>
+          </p:cNvPr>
+          <p:cNvCxnSpPr>
+            <a:cxnSpLocks/>
+            <a:stCxn id="6" idx="0"/>
+            <a:endCxn id="66" idx="2"/>
+          </p:cNvCxnSpPr>
+          <p:nvPr/>
+        </p:nvCxnSpPr>
+        <p:spPr>
+          <a:xfrm>
+            <a:off x="986220" y="1348579"/>
+            <a:ext cx="7600" cy="4163707"/>
+          </a:xfrm>
+          <a:prstGeom prst="straightConnector1">
+            <a:avLst/>
+          </a:prstGeom>
+          <a:ln w="19050">
+            <a:prstDash val="sysDash"/>
+            <a:tailEnd type="triangle"/>
+          </a:ln>
+        </p:spPr>
+        <p:style>
+          <a:lnRef idx="1">
+            <a:schemeClr val="dk1"/>
+          </a:lnRef>
+          <a:fillRef idx="0">
+            <a:schemeClr val="dk1"/>
+          </a:fillRef>
+          <a:effectRef idx="0">
+            <a:schemeClr val="dk1"/>
+          </a:effectRef>
+          <a:fontRef idx="minor">
+            <a:schemeClr val="tx1"/>
+          </a:fontRef>
+        </p:style>
+      </p:cxnSp>
     </p:spTree>
     <p:extLst>
       <p:ext uri="{BB962C8B-B14F-4D97-AF65-F5344CB8AC3E}">
@@ -5554,6 +10301,927 @@
     <a:masterClrMapping/>
   </p:clrMapOvr>
 </p:sld>
+</file>
+
+<file path=ppt/slides/slide4.xml><?xml version="1.0" encoding="utf-8"?>
+<p:sld xmlns:a="http://schemas.openxmlformats.org/drawingml/2006/main" xmlns:r="http://schemas.openxmlformats.org/officeDocument/2006/relationships" xmlns:p="http://schemas.openxmlformats.org/presentationml/2006/main">
+  <p:cSld>
+    <p:spTree>
+      <p:nvGrpSpPr>
+        <p:cNvPr id="1" name=""/>
+        <p:cNvGrpSpPr/>
+        <p:nvPr/>
+      </p:nvGrpSpPr>
+      <p:grpSpPr>
+        <a:xfrm>
+          <a:off x="0" y="0"/>
+          <a:ext cx="0" cy="0"/>
+          <a:chOff x="0" y="0"/>
+          <a:chExt cx="0" cy="0"/>
+        </a:xfrm>
+      </p:grpSpPr>
+      <p:sp>
+        <p:nvSpPr>
+          <p:cNvPr id="32" name="矩形: 圆角 31">
+            <a:extLst>
+              <a:ext uri="{FF2B5EF4-FFF2-40B4-BE49-F238E27FC236}">
+                <a16:creationId xmlns:a16="http://schemas.microsoft.com/office/drawing/2014/main" id="{B5E4C71D-5212-E4C9-EA65-E87C171CC80C}"/>
+              </a:ext>
+            </a:extLst>
+          </p:cNvPr>
+          <p:cNvSpPr/>
+          <p:nvPr/>
+        </p:nvSpPr>
+        <p:spPr>
+          <a:xfrm>
+            <a:off x="4711418" y="362566"/>
+            <a:ext cx="3235600" cy="2494554"/>
+          </a:xfrm>
+          <a:prstGeom prst="roundRect">
+            <a:avLst/>
+          </a:prstGeom>
+          <a:solidFill>
+            <a:srgbClr val="FFF9E7"/>
+          </a:solidFill>
+          <a:ln w="19050">
+            <a:noFill/>
+          </a:ln>
+        </p:spPr>
+        <p:style>
+          <a:lnRef idx="2">
+            <a:schemeClr val="accent1">
+              <a:shade val="15000"/>
+            </a:schemeClr>
+          </a:lnRef>
+          <a:fillRef idx="1">
+            <a:schemeClr val="accent1"/>
+          </a:fillRef>
+          <a:effectRef idx="0">
+            <a:schemeClr val="accent1"/>
+          </a:effectRef>
+          <a:fontRef idx="minor">
+            <a:schemeClr val="lt1"/>
+          </a:fontRef>
+        </p:style>
+        <p:txBody>
+          <a:bodyPr rtlCol="0" anchor="ctr"/>
+          <a:lstStyle/>
+          <a:p>
+            <a:pPr algn="ctr"/>
+            <a:endParaRPr lang="zh-CN" altLang="en-US" dirty="0"/>
+          </a:p>
+        </p:txBody>
+      </p:sp>
+      <p:sp>
+        <p:nvSpPr>
+          <p:cNvPr id="2" name="矩形 1">
+            <a:extLst>
+              <a:ext uri="{FF2B5EF4-FFF2-40B4-BE49-F238E27FC236}">
+                <a16:creationId xmlns:a16="http://schemas.microsoft.com/office/drawing/2014/main" id="{A2E34320-C687-5595-2048-2C4EF705D84F}"/>
+              </a:ext>
+            </a:extLst>
+          </p:cNvPr>
+          <p:cNvSpPr/>
+          <p:nvPr/>
+        </p:nvSpPr>
+        <p:spPr>
+          <a:xfrm>
+            <a:off x="2604289" y="822940"/>
+            <a:ext cx="1751851" cy="1751851"/>
+          </a:xfrm>
+          <a:prstGeom prst="rect">
+            <a:avLst/>
+          </a:prstGeom>
+          <a:gradFill flip="none" rotWithShape="1">
+            <a:gsLst>
+              <a:gs pos="0">
+                <a:schemeClr val="accent3">
+                  <a:lumMod val="67000"/>
+                </a:schemeClr>
+              </a:gs>
+              <a:gs pos="48000">
+                <a:schemeClr val="accent3">
+                  <a:lumMod val="97000"/>
+                  <a:lumOff val="3000"/>
+                </a:schemeClr>
+              </a:gs>
+              <a:gs pos="100000">
+                <a:schemeClr val="accent3">
+                  <a:lumMod val="60000"/>
+                  <a:lumOff val="40000"/>
+                </a:schemeClr>
+              </a:gs>
+            </a:gsLst>
+            <a:lin ang="16200000" scaled="1"/>
+            <a:tileRect/>
+          </a:gradFill>
+          <a:ln>
+            <a:noFill/>
+          </a:ln>
+        </p:spPr>
+        <p:style>
+          <a:lnRef idx="0">
+            <a:scrgbClr r="0" g="0" b="0"/>
+          </a:lnRef>
+          <a:fillRef idx="0">
+            <a:scrgbClr r="0" g="0" b="0"/>
+          </a:fillRef>
+          <a:effectRef idx="0">
+            <a:scrgbClr r="0" g="0" b="0"/>
+          </a:effectRef>
+          <a:fontRef idx="minor">
+            <a:schemeClr val="lt1"/>
+          </a:fontRef>
+        </p:style>
+        <p:txBody>
+          <a:bodyPr rtlCol="0" anchor="ctr"/>
+          <a:lstStyle/>
+          <a:p>
+            <a:pPr algn="ctr"/>
+            <a:r>
+              <a:rPr lang="en-US" altLang="zh-CN" dirty="0"/>
+              <a:t>Placeholder</a:t>
+            </a:r>
+            <a:endParaRPr lang="zh-CN" altLang="en-US" dirty="0"/>
+          </a:p>
+        </p:txBody>
+      </p:sp>
+      <p:pic>
+        <p:nvPicPr>
+          <p:cNvPr id="63" name="图片 62" descr="\documentclass{article}&#10;\usepackage{amsmath}&#10;\pagestyle{empty}&#10;\begin{document}&#10;&#10;\[ z_{0}=y \]&#10;&#10;\end{document}" title="IguanaTex Bitmap Display">
+            <a:extLst>
+              <a:ext uri="{FF2B5EF4-FFF2-40B4-BE49-F238E27FC236}">
+                <a16:creationId xmlns:a16="http://schemas.microsoft.com/office/drawing/2014/main" id="{13A8B153-0359-B34D-D2B6-69AE406F83F5}"/>
+              </a:ext>
+            </a:extLst>
+          </p:cNvPr>
+          <p:cNvPicPr>
+            <a:picLocks noChangeAspect="1"/>
+          </p:cNvPicPr>
+          <p:nvPr>
+            <p:custDataLst>
+              <p:tags r:id="rId1"/>
+            </p:custDataLst>
+          </p:nvPr>
+        </p:nvPicPr>
+        <p:blipFill>
+          <a:blip r:embed="rId6" cstate="print">
+            <a:extLst>
+              <a:ext uri="{28A0092B-C50C-407E-A947-70E740481C1C}">
+                <a14:useLocalDpi xmlns:a14="http://schemas.microsoft.com/office/drawing/2010/main" val="0"/>
+              </a:ext>
+            </a:extLst>
+          </a:blip>
+          <a:stretch>
+            <a:fillRect/>
+          </a:stretch>
+        </p:blipFill>
+        <p:spPr>
+          <a:xfrm>
+            <a:off x="8757337" y="2775595"/>
+            <a:ext cx="682666" cy="163048"/>
+          </a:xfrm>
+          <a:prstGeom prst="rect">
+            <a:avLst/>
+          </a:prstGeom>
+        </p:spPr>
+      </p:pic>
+      <p:sp>
+        <p:nvSpPr>
+          <p:cNvPr id="10" name="梯形 9">
+            <a:extLst>
+              <a:ext uri="{FF2B5EF4-FFF2-40B4-BE49-F238E27FC236}">
+                <a16:creationId xmlns:a16="http://schemas.microsoft.com/office/drawing/2014/main" id="{10ADC86A-8F12-48F6-C43F-B0713F2A4615}"/>
+              </a:ext>
+            </a:extLst>
+          </p:cNvPr>
+          <p:cNvSpPr/>
+          <p:nvPr/>
+        </p:nvSpPr>
+        <p:spPr>
+          <a:xfrm rot="5400000">
+            <a:off x="4778025" y="1166665"/>
+            <a:ext cx="1751853" cy="1091951"/>
+          </a:xfrm>
+          <a:prstGeom prst="trapezoid">
+            <a:avLst/>
+          </a:prstGeom>
+          <a:solidFill>
+            <a:schemeClr val="accent1">
+              <a:lumMod val="60000"/>
+              <a:lumOff val="40000"/>
+            </a:schemeClr>
+          </a:solidFill>
+          <a:ln w="19050">
+            <a:solidFill>
+              <a:schemeClr val="tx1"/>
+            </a:solidFill>
+          </a:ln>
+        </p:spPr>
+        <p:style>
+          <a:lnRef idx="2">
+            <a:schemeClr val="accent1">
+              <a:shade val="15000"/>
+            </a:schemeClr>
+          </a:lnRef>
+          <a:fillRef idx="1">
+            <a:schemeClr val="accent1"/>
+          </a:fillRef>
+          <a:effectRef idx="0">
+            <a:schemeClr val="accent1"/>
+          </a:effectRef>
+          <a:fontRef idx="minor">
+            <a:schemeClr val="lt1"/>
+          </a:fontRef>
+        </p:style>
+        <p:txBody>
+          <a:bodyPr rtlCol="0" anchor="ctr"/>
+          <a:lstStyle/>
+          <a:p>
+            <a:pPr algn="ctr"/>
+            <a:endParaRPr lang="zh-CN" altLang="en-US" dirty="0"/>
+          </a:p>
+        </p:txBody>
+      </p:sp>
+      <p:sp>
+        <p:nvSpPr>
+          <p:cNvPr id="11" name="梯形 10">
+            <a:extLst>
+              <a:ext uri="{FF2B5EF4-FFF2-40B4-BE49-F238E27FC236}">
+                <a16:creationId xmlns:a16="http://schemas.microsoft.com/office/drawing/2014/main" id="{AB512DF4-F871-0978-84E8-68E3773782B7}"/>
+              </a:ext>
+            </a:extLst>
+          </p:cNvPr>
+          <p:cNvSpPr/>
+          <p:nvPr/>
+        </p:nvSpPr>
+        <p:spPr>
+          <a:xfrm rot="16200000">
+            <a:off x="6097828" y="1166664"/>
+            <a:ext cx="1751853" cy="1091951"/>
+          </a:xfrm>
+          <a:prstGeom prst="trapezoid">
+            <a:avLst/>
+          </a:prstGeom>
+          <a:solidFill>
+            <a:schemeClr val="accent1">
+              <a:lumMod val="60000"/>
+              <a:lumOff val="40000"/>
+            </a:schemeClr>
+          </a:solidFill>
+          <a:ln w="19050">
+            <a:solidFill>
+              <a:schemeClr val="tx1"/>
+            </a:solidFill>
+          </a:ln>
+        </p:spPr>
+        <p:style>
+          <a:lnRef idx="2">
+            <a:schemeClr val="accent1">
+              <a:shade val="15000"/>
+            </a:schemeClr>
+          </a:lnRef>
+          <a:fillRef idx="1">
+            <a:schemeClr val="accent1"/>
+          </a:fillRef>
+          <a:effectRef idx="0">
+            <a:schemeClr val="accent1"/>
+          </a:effectRef>
+          <a:fontRef idx="minor">
+            <a:schemeClr val="lt1"/>
+          </a:fontRef>
+        </p:style>
+        <p:txBody>
+          <a:bodyPr rtlCol="0" anchor="ctr"/>
+          <a:lstStyle/>
+          <a:p>
+            <a:pPr algn="ctr"/>
+            <a:endParaRPr lang="zh-CN" altLang="en-US" dirty="0"/>
+          </a:p>
+        </p:txBody>
+      </p:sp>
+      <p:sp>
+        <p:nvSpPr>
+          <p:cNvPr id="12" name="文本框 11">
+            <a:extLst>
+              <a:ext uri="{FF2B5EF4-FFF2-40B4-BE49-F238E27FC236}">
+                <a16:creationId xmlns:a16="http://schemas.microsoft.com/office/drawing/2014/main" id="{EAD9E7E4-E1CE-1F80-24B0-958A1AC4F3F2}"/>
+              </a:ext>
+            </a:extLst>
+          </p:cNvPr>
+          <p:cNvSpPr txBox="1"/>
+          <p:nvPr/>
+        </p:nvSpPr>
+        <p:spPr>
+          <a:xfrm>
+            <a:off x="5767877" y="2426232"/>
+            <a:ext cx="1091952" cy="430887"/>
+          </a:xfrm>
+          <a:prstGeom prst="rect">
+            <a:avLst/>
+          </a:prstGeom>
+          <a:noFill/>
+        </p:spPr>
+        <p:txBody>
+          <a:bodyPr wrap="square" rtlCol="0">
+            <a:spAutoFit/>
+          </a:bodyPr>
+          <a:lstStyle/>
+          <a:p>
+            <a:pPr algn="ctr"/>
+            <a:r>
+              <a:rPr lang="en-US" altLang="zh-CN" sz="1100" dirty="0"/>
+              <a:t>U-Net Denoiser</a:t>
+            </a:r>
+            <a:endParaRPr lang="zh-CN" altLang="en-US" sz="1100" dirty="0"/>
+          </a:p>
+        </p:txBody>
+      </p:sp>
+      <p:sp>
+        <p:nvSpPr>
+          <p:cNvPr id="24" name="矩形 23">
+            <a:extLst>
+              <a:ext uri="{FF2B5EF4-FFF2-40B4-BE49-F238E27FC236}">
+                <a16:creationId xmlns:a16="http://schemas.microsoft.com/office/drawing/2014/main" id="{5A1A5728-A1C7-2A1D-7857-23C499734E1C}"/>
+              </a:ext>
+            </a:extLst>
+          </p:cNvPr>
+          <p:cNvSpPr/>
+          <p:nvPr/>
+        </p:nvSpPr>
+        <p:spPr>
+          <a:xfrm>
+            <a:off x="335360" y="836712"/>
+            <a:ext cx="1751851" cy="1751851"/>
+          </a:xfrm>
+          <a:prstGeom prst="rect">
+            <a:avLst/>
+          </a:prstGeom>
+          <a:gradFill flip="none" rotWithShape="1">
+            <a:gsLst>
+              <a:gs pos="0">
+                <a:schemeClr val="accent3">
+                  <a:lumMod val="67000"/>
+                </a:schemeClr>
+              </a:gs>
+              <a:gs pos="48000">
+                <a:schemeClr val="accent3">
+                  <a:lumMod val="97000"/>
+                  <a:lumOff val="3000"/>
+                </a:schemeClr>
+              </a:gs>
+              <a:gs pos="100000">
+                <a:schemeClr val="accent3">
+                  <a:lumMod val="60000"/>
+                  <a:lumOff val="40000"/>
+                </a:schemeClr>
+              </a:gs>
+            </a:gsLst>
+            <a:lin ang="16200000" scaled="1"/>
+            <a:tileRect/>
+          </a:gradFill>
+          <a:ln>
+            <a:noFill/>
+          </a:ln>
+        </p:spPr>
+        <p:style>
+          <a:lnRef idx="0">
+            <a:scrgbClr r="0" g="0" b="0"/>
+          </a:lnRef>
+          <a:fillRef idx="0">
+            <a:scrgbClr r="0" g="0" b="0"/>
+          </a:fillRef>
+          <a:effectRef idx="0">
+            <a:scrgbClr r="0" g="0" b="0"/>
+          </a:effectRef>
+          <a:fontRef idx="minor">
+            <a:schemeClr val="lt1"/>
+          </a:fontRef>
+        </p:style>
+        <p:txBody>
+          <a:bodyPr rtlCol="0" anchor="ctr"/>
+          <a:lstStyle/>
+          <a:p>
+            <a:pPr algn="ctr"/>
+            <a:r>
+              <a:rPr lang="en-US" altLang="zh-CN" dirty="0"/>
+              <a:t>Placeholder</a:t>
+            </a:r>
+            <a:endParaRPr lang="zh-CN" altLang="en-US" dirty="0"/>
+          </a:p>
+        </p:txBody>
+      </p:sp>
+      <p:pic>
+        <p:nvPicPr>
+          <p:cNvPr id="72" name="图片 71" descr="\documentclass{article}&#10;\usepackage{amsmath}&#10;\pagestyle{empty}&#10;\begin{document}&#10;&#10;\[ z_{T}= x+\epsilon_{boot}\]&#10;&#10;\end{document}" title="IguanaTex Bitmap Display">
+            <a:extLst>
+              <a:ext uri="{FF2B5EF4-FFF2-40B4-BE49-F238E27FC236}">
+                <a16:creationId xmlns:a16="http://schemas.microsoft.com/office/drawing/2014/main" id="{ECB0E66A-3431-0C18-269E-2D708DD56B74}"/>
+              </a:ext>
+            </a:extLst>
+          </p:cNvPr>
+          <p:cNvPicPr>
+            <a:picLocks noChangeAspect="1"/>
+          </p:cNvPicPr>
+          <p:nvPr>
+            <p:custDataLst>
+              <p:tags r:id="rId2"/>
+            </p:custDataLst>
+          </p:nvPr>
+        </p:nvPicPr>
+        <p:blipFill>
+          <a:blip r:embed="rId7" cstate="print">
+            <a:extLst>
+              <a:ext uri="{28A0092B-C50C-407E-A947-70E740481C1C}">
+                <a14:useLocalDpi xmlns:a14="http://schemas.microsoft.com/office/drawing/2010/main" val="0"/>
+              </a:ext>
+            </a:extLst>
+          </a:blip>
+          <a:stretch>
+            <a:fillRect/>
+          </a:stretch>
+        </p:blipFill>
+        <p:spPr>
+          <a:xfrm>
+            <a:off x="2722119" y="2708825"/>
+            <a:ext cx="1516189" cy="187429"/>
+          </a:xfrm>
+          <a:prstGeom prst="rect">
+            <a:avLst/>
+          </a:prstGeom>
+        </p:spPr>
+      </p:pic>
+      <p:cxnSp>
+        <p:nvCxnSpPr>
+          <p:cNvPr id="26" name="直接箭头连接符 25">
+            <a:extLst>
+              <a:ext uri="{FF2B5EF4-FFF2-40B4-BE49-F238E27FC236}">
+                <a16:creationId xmlns:a16="http://schemas.microsoft.com/office/drawing/2014/main" id="{4B88E80A-0DEA-3B97-EC00-486AF848CAA8}"/>
+              </a:ext>
+            </a:extLst>
+          </p:cNvPr>
+          <p:cNvCxnSpPr>
+            <a:cxnSpLocks/>
+          </p:cNvCxnSpPr>
+          <p:nvPr/>
+        </p:nvCxnSpPr>
+        <p:spPr>
+          <a:xfrm>
+            <a:off x="2207032" y="1725992"/>
+            <a:ext cx="272138" cy="0"/>
+          </a:xfrm>
+          <a:prstGeom prst="straightConnector1">
+            <a:avLst/>
+          </a:prstGeom>
+          <a:ln w="19050">
+            <a:tailEnd type="triangle"/>
+          </a:ln>
+        </p:spPr>
+        <p:style>
+          <a:lnRef idx="1">
+            <a:schemeClr val="dk1"/>
+          </a:lnRef>
+          <a:fillRef idx="0">
+            <a:schemeClr val="dk1"/>
+          </a:fillRef>
+          <a:effectRef idx="0">
+            <a:schemeClr val="dk1"/>
+          </a:effectRef>
+          <a:fontRef idx="minor">
+            <a:schemeClr val="tx1"/>
+          </a:fontRef>
+        </p:style>
+      </p:cxnSp>
+      <p:pic>
+        <p:nvPicPr>
+          <p:cNvPr id="31" name="图片 30" descr="\documentclass{article}&#10;\usepackage{amsmath}&#10;\pagestyle{empty}&#10;\begin{document}&#10;&#10;&#10;\[ D_{\theta}(z_{t},t,x) \]&#10;&#10;\end{document}" title="IguanaTex Bitmap Display">
+            <a:extLst>
+              <a:ext uri="{FF2B5EF4-FFF2-40B4-BE49-F238E27FC236}">
+                <a16:creationId xmlns:a16="http://schemas.microsoft.com/office/drawing/2014/main" id="{9E84F408-9252-0E23-2656-6C4610DC971F}"/>
+              </a:ext>
+            </a:extLst>
+          </p:cNvPr>
+          <p:cNvPicPr>
+            <a:picLocks noChangeAspect="1"/>
+          </p:cNvPicPr>
+          <p:nvPr>
+            <p:custDataLst>
+              <p:tags r:id="rId3"/>
+            </p:custDataLst>
+          </p:nvPr>
+        </p:nvPicPr>
+        <p:blipFill>
+          <a:blip r:embed="rId8" cstate="print">
+            <a:extLst>
+              <a:ext uri="{28A0092B-C50C-407E-A947-70E740481C1C}">
+                <a14:useLocalDpi xmlns:a14="http://schemas.microsoft.com/office/drawing/2010/main" val="0"/>
+              </a:ext>
+            </a:extLst>
+          </a:blip>
+          <a:stretch>
+            <a:fillRect/>
+          </a:stretch>
+        </p:blipFill>
+        <p:spPr>
+          <a:xfrm>
+            <a:off x="5724764" y="695702"/>
+            <a:ext cx="1153523" cy="254476"/>
+          </a:xfrm>
+          <a:prstGeom prst="rect">
+            <a:avLst/>
+          </a:prstGeom>
+        </p:spPr>
+      </p:pic>
+      <p:sp>
+        <p:nvSpPr>
+          <p:cNvPr id="33" name="箭头: 环形 32">
+            <a:extLst>
+              <a:ext uri="{FF2B5EF4-FFF2-40B4-BE49-F238E27FC236}">
+                <a16:creationId xmlns:a16="http://schemas.microsoft.com/office/drawing/2014/main" id="{DCF0BA00-B9ED-D691-F19E-E470F84A1DCB}"/>
+              </a:ext>
+            </a:extLst>
+          </p:cNvPr>
+          <p:cNvSpPr/>
+          <p:nvPr/>
+        </p:nvSpPr>
+        <p:spPr>
+          <a:xfrm flipH="1">
+            <a:off x="7451175" y="576459"/>
+            <a:ext cx="260253" cy="260253"/>
+          </a:xfrm>
+          <a:prstGeom prst="circularArrow">
+            <a:avLst>
+              <a:gd name="adj1" fmla="val 12500"/>
+              <a:gd name="adj2" fmla="val 1142319"/>
+              <a:gd name="adj3" fmla="val 20457681"/>
+              <a:gd name="adj4" fmla="val 4670234"/>
+              <a:gd name="adj5" fmla="val 12500"/>
+            </a:avLst>
+          </a:prstGeom>
+          <a:solidFill>
+            <a:srgbClr val="EE964B"/>
+          </a:solidFill>
+          <a:ln w="19050">
+            <a:noFill/>
+          </a:ln>
+        </p:spPr>
+        <p:style>
+          <a:lnRef idx="2">
+            <a:schemeClr val="accent1">
+              <a:shade val="15000"/>
+            </a:schemeClr>
+          </a:lnRef>
+          <a:fillRef idx="1">
+            <a:schemeClr val="accent1"/>
+          </a:fillRef>
+          <a:effectRef idx="0">
+            <a:schemeClr val="accent1"/>
+          </a:effectRef>
+          <a:fontRef idx="minor">
+            <a:schemeClr val="lt1"/>
+          </a:fontRef>
+        </p:style>
+        <p:txBody>
+          <a:bodyPr rtlCol="0" anchor="ctr"/>
+          <a:lstStyle/>
+          <a:p>
+            <a:pPr algn="ctr"/>
+            <a:endParaRPr lang="zh-CN" altLang="en-US" dirty="0">
+              <a:solidFill>
+                <a:schemeClr val="tx1"/>
+              </a:solidFill>
+            </a:endParaRPr>
+          </a:p>
+        </p:txBody>
+      </p:sp>
+      <p:sp>
+        <p:nvSpPr>
+          <p:cNvPr id="34" name="文本框 33">
+            <a:extLst>
+              <a:ext uri="{FF2B5EF4-FFF2-40B4-BE49-F238E27FC236}">
+                <a16:creationId xmlns:a16="http://schemas.microsoft.com/office/drawing/2014/main" id="{70DC7D5A-07AB-5C8F-1688-1B23AC06A313}"/>
+              </a:ext>
+            </a:extLst>
+          </p:cNvPr>
+          <p:cNvSpPr txBox="1"/>
+          <p:nvPr/>
+        </p:nvSpPr>
+        <p:spPr>
+          <a:xfrm>
+            <a:off x="7195282" y="345227"/>
+            <a:ext cx="715320" cy="261610"/>
+          </a:xfrm>
+          <a:prstGeom prst="rect">
+            <a:avLst/>
+          </a:prstGeom>
+          <a:noFill/>
+        </p:spPr>
+        <p:txBody>
+          <a:bodyPr wrap="square" rtlCol="0">
+            <a:spAutoFit/>
+          </a:bodyPr>
+          <a:lstStyle/>
+          <a:p>
+            <a:pPr algn="ctr"/>
+            <a:r>
+              <a:rPr lang="en-US" altLang="zh-CN" sz="1100" dirty="0"/>
+              <a:t>×</a:t>
+            </a:r>
+            <a:r>
+              <a:rPr lang="en-US" altLang="zh-CN" sz="1100" b="1" i="1" dirty="0"/>
+              <a:t>T</a:t>
+            </a:r>
+            <a:endParaRPr lang="zh-CN" altLang="en-US" sz="1100" b="1" i="1" dirty="0"/>
+          </a:p>
+        </p:txBody>
+      </p:sp>
+      <p:sp>
+        <p:nvSpPr>
+          <p:cNvPr id="37" name="矩形 36">
+            <a:extLst>
+              <a:ext uri="{FF2B5EF4-FFF2-40B4-BE49-F238E27FC236}">
+                <a16:creationId xmlns:a16="http://schemas.microsoft.com/office/drawing/2014/main" id="{463513E4-9EDF-06D7-7DDF-4AF4D5980C82}"/>
+              </a:ext>
+            </a:extLst>
+          </p:cNvPr>
+          <p:cNvSpPr/>
+          <p:nvPr/>
+        </p:nvSpPr>
+        <p:spPr>
+          <a:xfrm>
+            <a:off x="8222745" y="822939"/>
+            <a:ext cx="1751851" cy="1751851"/>
+          </a:xfrm>
+          <a:prstGeom prst="rect">
+            <a:avLst/>
+          </a:prstGeom>
+          <a:gradFill flip="none" rotWithShape="1">
+            <a:gsLst>
+              <a:gs pos="0">
+                <a:schemeClr val="accent3">
+                  <a:lumMod val="67000"/>
+                </a:schemeClr>
+              </a:gs>
+              <a:gs pos="48000">
+                <a:schemeClr val="accent3">
+                  <a:lumMod val="97000"/>
+                  <a:lumOff val="3000"/>
+                </a:schemeClr>
+              </a:gs>
+              <a:gs pos="100000">
+                <a:schemeClr val="accent3">
+                  <a:lumMod val="60000"/>
+                  <a:lumOff val="40000"/>
+                </a:schemeClr>
+              </a:gs>
+            </a:gsLst>
+            <a:lin ang="16200000" scaled="1"/>
+            <a:tileRect/>
+          </a:gradFill>
+          <a:ln>
+            <a:noFill/>
+          </a:ln>
+        </p:spPr>
+        <p:style>
+          <a:lnRef idx="0">
+            <a:scrgbClr r="0" g="0" b="0"/>
+          </a:lnRef>
+          <a:fillRef idx="0">
+            <a:scrgbClr r="0" g="0" b="0"/>
+          </a:fillRef>
+          <a:effectRef idx="0">
+            <a:scrgbClr r="0" g="0" b="0"/>
+          </a:effectRef>
+          <a:fontRef idx="minor">
+            <a:schemeClr val="lt1"/>
+          </a:fontRef>
+        </p:style>
+        <p:txBody>
+          <a:bodyPr rtlCol="0" anchor="ctr"/>
+          <a:lstStyle/>
+          <a:p>
+            <a:pPr algn="ctr"/>
+            <a:r>
+              <a:rPr lang="en-US" altLang="zh-CN" dirty="0"/>
+              <a:t>Target</a:t>
+            </a:r>
+            <a:endParaRPr lang="zh-CN" altLang="en-US" dirty="0"/>
+          </a:p>
+        </p:txBody>
+      </p:sp>
+      <p:pic>
+        <p:nvPicPr>
+          <p:cNvPr id="70" name="图片 69" descr="\documentclass{article}&#10;\usepackage{amsmath}&#10;\pagestyle{empty}&#10;\begin{document}&#10;&#10;&#10;\[ x \]&#10;&#10;\end{document}" title="IguanaTex Bitmap Display">
+            <a:extLst>
+              <a:ext uri="{FF2B5EF4-FFF2-40B4-BE49-F238E27FC236}">
+                <a16:creationId xmlns:a16="http://schemas.microsoft.com/office/drawing/2014/main" id="{1F51960F-D5D4-3ED3-8BC9-BF687BC80AB9}"/>
+              </a:ext>
+            </a:extLst>
+          </p:cNvPr>
+          <p:cNvPicPr>
+            <a:picLocks noChangeAspect="1"/>
+          </p:cNvPicPr>
+          <p:nvPr>
+            <p:custDataLst>
+              <p:tags r:id="rId4"/>
+            </p:custDataLst>
+          </p:nvPr>
+        </p:nvPicPr>
+        <p:blipFill>
+          <a:blip r:embed="rId9" cstate="print">
+            <a:extLst>
+              <a:ext uri="{28A0092B-C50C-407E-A947-70E740481C1C}">
+                <a14:useLocalDpi xmlns:a14="http://schemas.microsoft.com/office/drawing/2010/main" val="0"/>
+              </a:ext>
+            </a:extLst>
+          </a:blip>
+          <a:stretch>
+            <a:fillRect/>
+          </a:stretch>
+        </p:blipFill>
+        <p:spPr>
+          <a:xfrm>
+            <a:off x="1147285" y="2791355"/>
+            <a:ext cx="128000" cy="114286"/>
+          </a:xfrm>
+          <a:prstGeom prst="rect">
+            <a:avLst/>
+          </a:prstGeom>
+        </p:spPr>
+      </p:pic>
+      <p:pic>
+        <p:nvPicPr>
+          <p:cNvPr id="73" name="图片 72" descr="文本&#10;&#10;AI 生成的内容可能不正确。">
+            <a:extLst>
+              <a:ext uri="{FF2B5EF4-FFF2-40B4-BE49-F238E27FC236}">
+                <a16:creationId xmlns:a16="http://schemas.microsoft.com/office/drawing/2014/main" id="{FA47DDA9-E3C0-5DE3-1B68-27FC3CB2681D}"/>
+              </a:ext>
+            </a:extLst>
+          </p:cNvPr>
+          <p:cNvPicPr>
+            <a:picLocks noChangeAspect="1"/>
+          </p:cNvPicPr>
+          <p:nvPr/>
+        </p:nvPicPr>
+        <p:blipFill>
+          <a:blip r:embed="rId10"/>
+          <a:stretch>
+            <a:fillRect/>
+          </a:stretch>
+        </p:blipFill>
+        <p:spPr>
+          <a:xfrm>
+            <a:off x="0" y="3360093"/>
+            <a:ext cx="12192000" cy="2837074"/>
+          </a:xfrm>
+          <a:prstGeom prst="rect">
+            <a:avLst/>
+          </a:prstGeom>
+        </p:spPr>
+      </p:pic>
+    </p:spTree>
+    <p:extLst>
+      <p:ext uri="{BB962C8B-B14F-4D97-AF65-F5344CB8AC3E}">
+        <p14:creationId xmlns:p14="http://schemas.microsoft.com/office/powerpoint/2010/main" val="1436287397"/>
+      </p:ext>
+    </p:extLst>
+  </p:cSld>
+  <p:clrMapOvr>
+    <a:masterClrMapping/>
+  </p:clrMapOvr>
+</p:sld>
+</file>
+
+<file path=ppt/slides/slide5.xml><?xml version="1.0" encoding="utf-8"?>
+<p:sld xmlns:a="http://schemas.openxmlformats.org/drawingml/2006/main" xmlns:r="http://schemas.openxmlformats.org/officeDocument/2006/relationships" xmlns:p="http://schemas.openxmlformats.org/presentationml/2006/main">
+  <p:cSld>
+    <p:spTree>
+      <p:nvGrpSpPr>
+        <p:cNvPr id="1" name=""/>
+        <p:cNvGrpSpPr/>
+        <p:nvPr/>
+      </p:nvGrpSpPr>
+      <p:grpSpPr>
+        <a:xfrm>
+          <a:off x="0" y="0"/>
+          <a:ext cx="0" cy="0"/>
+          <a:chOff x="0" y="0"/>
+          <a:chExt cx="0" cy="0"/>
+        </a:xfrm>
+      </p:grpSpPr>
+      <p:pic>
+        <p:nvPicPr>
+          <p:cNvPr id="5" name="图片 4" descr="图形用户界面, 文本, 应用程序&#10;&#10;AI 生成的内容可能不正确。">
+            <a:extLst>
+              <a:ext uri="{FF2B5EF4-FFF2-40B4-BE49-F238E27FC236}">
+                <a16:creationId xmlns:a16="http://schemas.microsoft.com/office/drawing/2014/main" id="{12000C60-6337-7733-B642-7DE875261151}"/>
+              </a:ext>
+            </a:extLst>
+          </p:cNvPr>
+          <p:cNvPicPr>
+            <a:picLocks noChangeAspect="1"/>
+          </p:cNvPicPr>
+          <p:nvPr/>
+        </p:nvPicPr>
+        <p:blipFill>
+          <a:blip r:embed="rId2"/>
+          <a:stretch>
+            <a:fillRect/>
+          </a:stretch>
+        </p:blipFill>
+        <p:spPr>
+          <a:xfrm>
+            <a:off x="0" y="184235"/>
+            <a:ext cx="12192000" cy="6489530"/>
+          </a:xfrm>
+          <a:prstGeom prst="rect">
+            <a:avLst/>
+          </a:prstGeom>
+        </p:spPr>
+      </p:pic>
+    </p:spTree>
+    <p:extLst>
+      <p:ext uri="{BB962C8B-B14F-4D97-AF65-F5344CB8AC3E}">
+        <p14:creationId xmlns:p14="http://schemas.microsoft.com/office/powerpoint/2010/main" val="3796170582"/>
+      </p:ext>
+    </p:extLst>
+  </p:cSld>
+  <p:clrMapOvr>
+    <a:masterClrMapping/>
+  </p:clrMapOvr>
+</p:sld>
+</file>
+
+<file path=ppt/tags/tag1.xml><?xml version="1.0" encoding="utf-8"?>
+<p:tagLst xmlns:a="http://schemas.openxmlformats.org/drawingml/2006/main" xmlns:r="http://schemas.openxmlformats.org/officeDocument/2006/relationships" xmlns:p="http://schemas.openxmlformats.org/presentationml/2006/main">
+  <p:tag name="OUTPUTDPI" val="1200"/>
+  <p:tag name="ORIGINALHEIGHT" val="80.24"/>
+  <p:tag name="ORIGINALWIDTH" val="335.958"/>
+  <p:tag name="LATEXADDIN" val="\documentclass{article}&#10;\usepackage{amsmath}&#10;\pagestyle{empty}&#10;\begin{document}&#10;&#10;\[ z_{0}=y \]&#10;&#10;\end{document}"/>
+  <p:tag name="IGUANATEXSIZE" val="20"/>
+  <p:tag name="IGUANATEXCURSOR" val="88"/>
+  <p:tag name="TRANSPARENCY" val="True"/>
+  <p:tag name="LATEXENGINEID" val="0"/>
+  <p:tag name="TEMPFOLDER" val="c:\temp\"/>
+  <p:tag name="LATEXFORMHEIGHT" val="312"/>
+  <p:tag name="LATEXFORMWIDTH" val="384"/>
+  <p:tag name="LATEXFORMWRAP" val="True"/>
+  <p:tag name="BITMAPVECTOR" val="0"/>
+</p:tagLst>
+</file>
+
+<file path=ppt/tags/tag2.xml><?xml version="1.0" encoding="utf-8"?>
+<p:tagLst xmlns:a="http://schemas.openxmlformats.org/drawingml/2006/main" xmlns:r="http://schemas.openxmlformats.org/officeDocument/2006/relationships" xmlns:p="http://schemas.openxmlformats.org/presentationml/2006/main">
+  <p:tag name="OUTPUTDPI" val="1200"/>
+  <p:tag name="ORIGINALHEIGHT" val="92.2385"/>
+  <p:tag name="ORIGINALWIDTH" val="746.1567"/>
+  <p:tag name="LATEXADDIN" val="\documentclass{article}&#10;\usepackage{amsmath}&#10;\pagestyle{empty}&#10;\begin{document}&#10;&#10;\[ z_{T}= x+\epsilon_{boot}\]&#10;&#10;\end{document}"/>
+  <p:tag name="IGUANATEXSIZE" val="20"/>
+  <p:tag name="IGUANATEXCURSOR" val="107"/>
+  <p:tag name="TRANSPARENCY" val="True"/>
+  <p:tag name="LATEXENGINEID" val="0"/>
+  <p:tag name="TEMPFOLDER" val="c:\temp\"/>
+  <p:tag name="LATEXFORMHEIGHT" val="312"/>
+  <p:tag name="LATEXFORMWIDTH" val="384"/>
+  <p:tag name="LATEXFORMWRAP" val="True"/>
+  <p:tag name="BITMAPVECTOR" val="0"/>
+</p:tagLst>
+</file>
+
+<file path=ppt/tags/tag3.xml><?xml version="1.0" encoding="utf-8"?>
+<p:tagLst xmlns:a="http://schemas.openxmlformats.org/drawingml/2006/main" xmlns:r="http://schemas.openxmlformats.org/officeDocument/2006/relationships" xmlns:p="http://schemas.openxmlformats.org/presentationml/2006/main">
+  <p:tag name="OUTPUTDPI" val="1200"/>
+  <p:tag name="ORIGINALHEIGHT" val="125.2343"/>
+  <p:tag name="ORIGINALWIDTH" val="567.6791"/>
+  <p:tag name="LATEXADDIN" val="\documentclass{article}&#10;\usepackage{amsmath}&#10;\pagestyle{empty}&#10;\begin{document}&#10;&#10;&#10;\[ D_{\theta}(z_{t},t,x) \]&#10;&#10;\end{document}"/>
+  <p:tag name="IGUANATEXSIZE" val="20"/>
+  <p:tag name="IGUANATEXCURSOR" val="104"/>
+  <p:tag name="TRANSPARENCY" val="True"/>
+  <p:tag name="LATEXENGINEID" val="0"/>
+  <p:tag name="TEMPFOLDER" val="c:\temp\"/>
+  <p:tag name="LATEXFORMHEIGHT" val="312"/>
+  <p:tag name="LATEXFORMWIDTH" val="384"/>
+  <p:tag name="LATEXFORMWRAP" val="True"/>
+  <p:tag name="BITMAPVECTOR" val="0"/>
+</p:tagLst>
+</file>
+
+<file path=ppt/tags/tag4.xml><?xml version="1.0" encoding="utf-8"?>
+<p:tagLst xmlns:a="http://schemas.openxmlformats.org/drawingml/2006/main" xmlns:r="http://schemas.openxmlformats.org/officeDocument/2006/relationships" xmlns:p="http://schemas.openxmlformats.org/presentationml/2006/main">
+  <p:tag name="OUTPUTDPI" val="1200"/>
+  <p:tag name="ORIGINALHEIGHT" val="56.24299"/>
+  <p:tag name="ORIGINALWIDTH" val="62.99213"/>
+  <p:tag name="LATEXADDIN" val="\documentclass{article}&#10;\usepackage{amsmath}&#10;\pagestyle{empty}&#10;\begin{document}&#10;&#10;&#10;\[ x \]&#10;&#10;\end{document}"/>
+  <p:tag name="IGUANATEXSIZE" val="20"/>
+  <p:tag name="IGUANATEXCURSOR" val="86"/>
+  <p:tag name="TRANSPARENCY" val="True"/>
+  <p:tag name="LATEXENGINEID" val="0"/>
+  <p:tag name="TEMPFOLDER" val="c:\temp\"/>
+  <p:tag name="LATEXFORMHEIGHT" val="312"/>
+  <p:tag name="LATEXFORMWIDTH" val="384"/>
+  <p:tag name="LATEXFORMWRAP" val="True"/>
+  <p:tag name="BITMAPVECTOR" val="0"/>
+</p:tagLst>
 </file>
 
 <file path=ppt/theme/theme1.xml><?xml version="1.0" encoding="utf-8"?>
@@ -5747,7 +11415,42 @@
       </a:bgFillStyleLst>
     </a:fmtScheme>
   </a:themeElements>
-  <a:objectDefaults/>
+  <a:objectDefaults>
+    <a:spDef>
+      <a:spPr>
+        <a:solidFill>
+          <a:srgbClr val="EE964B"/>
+        </a:solidFill>
+        <a:ln w="19050">
+          <a:solidFill>
+            <a:schemeClr val="tx1"/>
+          </a:solidFill>
+        </a:ln>
+      </a:spPr>
+      <a:bodyPr rtlCol="0" anchor="ctr"/>
+      <a:lstStyle>
+        <a:defPPr algn="ctr">
+          <a:defRPr dirty="0"/>
+        </a:defPPr>
+      </a:lstStyle>
+      <a:style>
+        <a:lnRef idx="2">
+          <a:schemeClr val="accent1">
+            <a:shade val="15000"/>
+          </a:schemeClr>
+        </a:lnRef>
+        <a:fillRef idx="1">
+          <a:schemeClr val="accent1"/>
+        </a:fillRef>
+        <a:effectRef idx="0">
+          <a:schemeClr val="accent1"/>
+        </a:effectRef>
+        <a:fontRef idx="minor">
+          <a:schemeClr val="lt1"/>
+        </a:fontRef>
+      </a:style>
+    </a:spDef>
+  </a:objectDefaults>
   <a:extraClrSchemeLst/>
   <a:extLst>
     <a:ext uri="{05A4C25C-085E-4340-85A3-A5531E510DB2}">
